--- a/reports/9-11.pptx
+++ b/reports/9-11.pptx
@@ -11,12 +11,34 @@
     <p:sldId id="259" r:id="rId5"/>
     <p:sldId id="260" r:id="rId6"/>
     <p:sldId id="261" r:id="rId7"/>
-    <p:sldId id="262" r:id="rId8"/>
-    <p:sldId id="263" r:id="rId9"/>
-    <p:sldId id="264" r:id="rId10"/>
-    <p:sldId id="265" r:id="rId11"/>
-    <p:sldId id="266" r:id="rId12"/>
-    <p:sldId id="267" r:id="rId13"/>
+    <p:sldId id="269" r:id="rId8"/>
+    <p:sldId id="262" r:id="rId9"/>
+    <p:sldId id="263" r:id="rId10"/>
+    <p:sldId id="264" r:id="rId11"/>
+    <p:sldId id="270" r:id="rId12"/>
+    <p:sldId id="265" r:id="rId13"/>
+    <p:sldId id="266" r:id="rId14"/>
+    <p:sldId id="267" r:id="rId15"/>
+    <p:sldId id="271" r:id="rId16"/>
+    <p:sldId id="272" r:id="rId17"/>
+    <p:sldId id="273" r:id="rId18"/>
+    <p:sldId id="274" r:id="rId19"/>
+    <p:sldId id="275" r:id="rId20"/>
+    <p:sldId id="276" r:id="rId21"/>
+    <p:sldId id="277" r:id="rId22"/>
+    <p:sldId id="278" r:id="rId23"/>
+    <p:sldId id="279" r:id="rId24"/>
+    <p:sldId id="286" r:id="rId25"/>
+    <p:sldId id="287" r:id="rId26"/>
+    <p:sldId id="288" r:id="rId27"/>
+    <p:sldId id="280" r:id="rId28"/>
+    <p:sldId id="281" r:id="rId29"/>
+    <p:sldId id="282" r:id="rId30"/>
+    <p:sldId id="283" r:id="rId31"/>
+    <p:sldId id="284" r:id="rId32"/>
+    <p:sldId id="285" r:id="rId33"/>
+    <p:sldId id="289" r:id="rId34"/>
+    <p:sldId id="291" r:id="rId35"/>
   </p:sldIdLst>
   <p:sldSz cx="12192000" cy="6858000"/>
   <p:notesSz cx="6858000" cy="9144000"/>
@@ -115,6 +137,11 @@
       </a:defRPr>
     </a:lvl9pPr>
   </p:defaultTextStyle>
+  <p:extLst>
+    <p:ext uri="{EFAFB233-063F-42B5-8137-9DF3F51BA10A}">
+      <p15:sldGuideLst xmlns:p15="http://schemas.microsoft.com/office/powerpoint/2012/main"/>
+    </p:ext>
+  </p:extLst>
 </p:presentation>
 </file>
 
@@ -249,7 +276,7 @@
           <a:p>
             <a:fld id="{57B23071-4853-454D-B5DE-95FBFC953AC8}" type="datetimeFigureOut">
               <a:rPr lang="en-US" smtClean="0"/>
-              <a:t>11/9/2025</a:t>
+              <a:t>12/20/2025</a:t>
             </a:fld>
             <a:endParaRPr lang="en-US"/>
           </a:p>
@@ -419,7 +446,7 @@
           <a:p>
             <a:fld id="{57B23071-4853-454D-B5DE-95FBFC953AC8}" type="datetimeFigureOut">
               <a:rPr lang="en-US" smtClean="0"/>
-              <a:t>11/9/2025</a:t>
+              <a:t>12/20/2025</a:t>
             </a:fld>
             <a:endParaRPr lang="en-US"/>
           </a:p>
@@ -599,7 +626,7 @@
           <a:p>
             <a:fld id="{57B23071-4853-454D-B5DE-95FBFC953AC8}" type="datetimeFigureOut">
               <a:rPr lang="en-US" smtClean="0"/>
-              <a:t>11/9/2025</a:t>
+              <a:t>12/20/2025</a:t>
             </a:fld>
             <a:endParaRPr lang="en-US"/>
           </a:p>
@@ -769,7 +796,7 @@
           <a:p>
             <a:fld id="{57B23071-4853-454D-B5DE-95FBFC953AC8}" type="datetimeFigureOut">
               <a:rPr lang="en-US" smtClean="0"/>
-              <a:t>11/9/2025</a:t>
+              <a:t>12/20/2025</a:t>
             </a:fld>
             <a:endParaRPr lang="en-US"/>
           </a:p>
@@ -1015,7 +1042,7 @@
           <a:p>
             <a:fld id="{57B23071-4853-454D-B5DE-95FBFC953AC8}" type="datetimeFigureOut">
               <a:rPr lang="en-US" smtClean="0"/>
-              <a:t>11/9/2025</a:t>
+              <a:t>12/20/2025</a:t>
             </a:fld>
             <a:endParaRPr lang="en-US"/>
           </a:p>
@@ -1247,7 +1274,7 @@
           <a:p>
             <a:fld id="{57B23071-4853-454D-B5DE-95FBFC953AC8}" type="datetimeFigureOut">
               <a:rPr lang="en-US" smtClean="0"/>
-              <a:t>11/9/2025</a:t>
+              <a:t>12/20/2025</a:t>
             </a:fld>
             <a:endParaRPr lang="en-US"/>
           </a:p>
@@ -1614,7 +1641,7 @@
           <a:p>
             <a:fld id="{57B23071-4853-454D-B5DE-95FBFC953AC8}" type="datetimeFigureOut">
               <a:rPr lang="en-US" smtClean="0"/>
-              <a:t>11/9/2025</a:t>
+              <a:t>12/20/2025</a:t>
             </a:fld>
             <a:endParaRPr lang="en-US"/>
           </a:p>
@@ -1732,7 +1759,7 @@
           <a:p>
             <a:fld id="{57B23071-4853-454D-B5DE-95FBFC953AC8}" type="datetimeFigureOut">
               <a:rPr lang="en-US" smtClean="0"/>
-              <a:t>11/9/2025</a:t>
+              <a:t>12/20/2025</a:t>
             </a:fld>
             <a:endParaRPr lang="en-US"/>
           </a:p>
@@ -1827,7 +1854,7 @@
           <a:p>
             <a:fld id="{57B23071-4853-454D-B5DE-95FBFC953AC8}" type="datetimeFigureOut">
               <a:rPr lang="en-US" smtClean="0"/>
-              <a:t>11/9/2025</a:t>
+              <a:t>12/20/2025</a:t>
             </a:fld>
             <a:endParaRPr lang="en-US"/>
           </a:p>
@@ -2104,7 +2131,7 @@
           <a:p>
             <a:fld id="{57B23071-4853-454D-B5DE-95FBFC953AC8}" type="datetimeFigureOut">
               <a:rPr lang="en-US" smtClean="0"/>
-              <a:t>11/9/2025</a:t>
+              <a:t>12/20/2025</a:t>
             </a:fld>
             <a:endParaRPr lang="en-US"/>
           </a:p>
@@ -2357,7 +2384,7 @@
           <a:p>
             <a:fld id="{57B23071-4853-454D-B5DE-95FBFC953AC8}" type="datetimeFigureOut">
               <a:rPr lang="en-US" smtClean="0"/>
-              <a:t>11/9/2025</a:t>
+              <a:t>12/20/2025</a:t>
             </a:fld>
             <a:endParaRPr lang="en-US"/>
           </a:p>
@@ -2570,7 +2597,7 @@
           <a:p>
             <a:fld id="{57B23071-4853-454D-B5DE-95FBFC953AC8}" type="datetimeFigureOut">
               <a:rPr lang="en-US" smtClean="0"/>
-              <a:t>11/9/2025</a:t>
+              <a:t>12/20/2025</a:t>
             </a:fld>
             <a:endParaRPr lang="en-US"/>
           </a:p>
@@ -3088,7 +3115,7 @@
           <a:p>
             <a:r>
               <a:rPr lang="en-US" dirty="0" smtClean="0"/>
-              <a:t>Tổng kết mô hình định lượng</a:t>
+              <a:t>Finetuning Att-cnn</a:t>
             </a:r>
             <a:endParaRPr lang="en-US" dirty="0"/>
           </a:p>
@@ -3111,23 +3138,14 @@
           <a:p>
             <a:r>
               <a:rPr lang="en-US" dirty="0" smtClean="0"/>
-              <a:t>LSTM baseline thể hiện ổn định, phù hợp làm chuẩn</a:t>
+              <a:t>Loss ổn định sớm</a:t>
             </a:r>
           </a:p>
           <a:p>
             <a:r>
               <a:rPr lang="en-US" dirty="0" smtClean="0"/>
-              <a:t>ATT-CNN-LSTM cho kết quả định lượng tốt nhất, phản ánh rõ giao động của chuỗi</a:t>
-            </a:r>
-          </a:p>
-          <a:p>
-            <a:r>
-              <a:rPr lang="en-US" dirty="0" smtClean="0"/>
-              <a:t>Transformer tạo embedding trừu tượng mạnh</a:t>
-            </a:r>
-          </a:p>
-          <a:p>
-            <a:endParaRPr lang="en-US" dirty="0"/>
+              <a:t>MSE và MAE tốt hơn một chút </a:t>
+            </a:r>
           </a:p>
           <a:p>
             <a:pPr marL="0" indent="0">
@@ -3135,15 +3153,64 @@
             </a:pPr>
             <a:r>
               <a:rPr lang="en-US" dirty="0" smtClean="0"/>
-              <a:t>-&gt; sẵn sàng cho tích hợp finBERT + ATT-CNN + Transformer</a:t>
-            </a:r>
-          </a:p>
-        </p:txBody>
-      </p:sp>
+              <a:t>So với transformer</a:t>
+            </a:r>
+            <a:endParaRPr lang="en-US" dirty="0"/>
+          </a:p>
+        </p:txBody>
+      </p:sp>
+      <p:pic>
+        <p:nvPicPr>
+          <p:cNvPr id="5" name="Picture 4"/>
+          <p:cNvPicPr>
+            <a:picLocks noChangeAspect="1"/>
+          </p:cNvPicPr>
+          <p:nvPr/>
+        </p:nvPicPr>
+        <p:blipFill>
+          <a:blip r:embed="rId2"/>
+          <a:stretch>
+            <a:fillRect/>
+          </a:stretch>
+        </p:blipFill>
+        <p:spPr>
+          <a:xfrm>
+            <a:off x="6198577" y="710437"/>
+            <a:ext cx="5595397" cy="2744409"/>
+          </a:xfrm>
+          <a:prstGeom prst="rect">
+            <a:avLst/>
+          </a:prstGeom>
+        </p:spPr>
+      </p:pic>
+      <p:pic>
+        <p:nvPicPr>
+          <p:cNvPr id="6" name="Picture 5"/>
+          <p:cNvPicPr>
+            <a:picLocks noChangeAspect="1"/>
+          </p:cNvPicPr>
+          <p:nvPr/>
+        </p:nvPicPr>
+        <p:blipFill>
+          <a:blip r:embed="rId3"/>
+          <a:stretch>
+            <a:fillRect/>
+          </a:stretch>
+        </p:blipFill>
+        <p:spPr>
+          <a:xfrm>
+            <a:off x="5043596" y="3589783"/>
+            <a:ext cx="6245728" cy="3159447"/>
+          </a:xfrm>
+          <a:prstGeom prst="rect">
+            <a:avLst/>
+          </a:prstGeom>
+        </p:spPr>
+      </p:pic>
     </p:spTree>
     <p:extLst>
       <p:ext uri="{BB962C8B-B14F-4D97-AF65-F5344CB8AC3E}">
-        <p14:creationId xmlns:p14="http://schemas.microsoft.com/office/powerpoint/2010/main" val="4101327151"/>
+        <p14:creationId xmlns:p14="http://schemas.microsoft.com/office/powerpoint/2010/main" val="4218851155"/>
       </p:ext>
     </p:extLst>
   </p:cSld>
@@ -3194,91 +3261,42 @@
           <a:p>
             <a:r>
               <a:rPr lang="en-US" dirty="0" smtClean="0"/>
-              <a:t>Training Fusion</a:t>
+              <a:t>Kết quả so sánh baseline vs att-cnn và transformer </a:t>
             </a:r>
             <a:endParaRPr lang="en-US" dirty="0"/>
           </a:p>
         </p:txBody>
       </p:sp>
-      <p:sp>
-        <p:nvSpPr>
-          <p:cNvPr id="3" name="Content Placeholder 2"/>
-          <p:cNvSpPr>
-            <a:spLocks noGrp="1"/>
-          </p:cNvSpPr>
+      <p:pic>
+        <p:nvPicPr>
+          <p:cNvPr id="4" name="Content Placeholder 3"/>
+          <p:cNvPicPr>
+            <a:picLocks noGrp="1" noChangeAspect="1"/>
+          </p:cNvPicPr>
           <p:nvPr>
             <p:ph idx="1"/>
           </p:nvPr>
-        </p:nvSpPr>
-        <p:spPr/>
-        <p:txBody>
-          <a:bodyPr/>
-          <a:lstStyle/>
-          <a:p>
-            <a:r>
-              <a:rPr lang="vi-VN" dirty="0"/>
-              <a:t>input_dim: 3843     </a:t>
-            </a:r>
-            <a:r>
-              <a:rPr lang="en-US" dirty="0" smtClean="0"/>
-              <a:t>= finBERT + Transformer + ATT-CNN</a:t>
-            </a:r>
-            <a:endParaRPr lang="vi-VN" dirty="0"/>
-          </a:p>
-          <a:p>
-            <a:r>
-              <a:rPr lang="vi-VN" dirty="0"/>
-              <a:t>hidden_dim: 512</a:t>
-            </a:r>
-          </a:p>
-          <a:p>
-            <a:r>
-              <a:rPr lang="vi-VN" dirty="0"/>
-              <a:t>output_dim: 256  </a:t>
-            </a:r>
-            <a:endParaRPr lang="en-US" dirty="0" smtClean="0"/>
-          </a:p>
-          <a:p>
-            <a:r>
-              <a:rPr lang="en-US" dirty="0"/>
-              <a:t>lr: 1e-4</a:t>
-            </a:r>
-          </a:p>
-          <a:p>
-            <a:r>
-              <a:rPr lang="en-US" dirty="0"/>
-              <a:t>epochs: 100</a:t>
-            </a:r>
-          </a:p>
-          <a:p>
-            <a:r>
-              <a:rPr lang="en-US" dirty="0"/>
-              <a:t>optimizer: </a:t>
-            </a:r>
-            <a:r>
-              <a:rPr lang="en-US" dirty="0" smtClean="0"/>
-              <a:t>Adam</a:t>
-            </a:r>
-          </a:p>
-          <a:p>
-            <a:r>
-              <a:rPr lang="en-US" dirty="0" smtClean="0"/>
-              <a:t>Sử dụng embedding dựa trên inference tập test của 3 mô hình</a:t>
-            </a:r>
-            <a:endParaRPr lang="en-US" dirty="0"/>
-          </a:p>
-          <a:p>
-            <a:endParaRPr lang="vi-VN" dirty="0"/>
-          </a:p>
-          <a:p>
-            <a:endParaRPr lang="en-US" dirty="0" smtClean="0"/>
-          </a:p>
-        </p:txBody>
-      </p:sp>
+        </p:nvPicPr>
+        <p:blipFill>
+          <a:blip r:embed="rId2"/>
+          <a:stretch>
+            <a:fillRect/>
+          </a:stretch>
+        </p:blipFill>
+        <p:spPr>
+          <a:xfrm>
+            <a:off x="838200" y="2029619"/>
+            <a:ext cx="10515600" cy="3943350"/>
+          </a:xfrm>
+          <a:prstGeom prst="rect">
+            <a:avLst/>
+          </a:prstGeom>
+        </p:spPr>
+      </p:pic>
     </p:spTree>
     <p:extLst>
       <p:ext uri="{BB962C8B-B14F-4D97-AF65-F5344CB8AC3E}">
-        <p14:creationId xmlns:p14="http://schemas.microsoft.com/office/powerpoint/2010/main" val="455751403"/>
+        <p14:creationId xmlns:p14="http://schemas.microsoft.com/office/powerpoint/2010/main" val="3540940774"/>
       </p:ext>
     </p:extLst>
   </p:cSld>
@@ -3329,6 +3347,305 @@
           <a:p>
             <a:r>
               <a:rPr lang="en-US" dirty="0" smtClean="0"/>
+              <a:t>Tổng kết mô hình định lượng</a:t>
+            </a:r>
+            <a:endParaRPr lang="en-US" dirty="0"/>
+          </a:p>
+        </p:txBody>
+      </p:sp>
+      <p:sp>
+        <p:nvSpPr>
+          <p:cNvPr id="3" name="Content Placeholder 2"/>
+          <p:cNvSpPr>
+            <a:spLocks noGrp="1"/>
+          </p:cNvSpPr>
+          <p:nvPr>
+            <p:ph idx="1"/>
+          </p:nvPr>
+        </p:nvSpPr>
+        <p:spPr/>
+        <p:txBody>
+          <a:bodyPr/>
+          <a:lstStyle/>
+          <a:p>
+            <a:r>
+              <a:rPr lang="en-US" dirty="0" smtClean="0"/>
+              <a:t>LSTM baseline thể hiện ổn định, phù hợp làm chuẩn</a:t>
+            </a:r>
+          </a:p>
+          <a:p>
+            <a:r>
+              <a:rPr lang="en-US" dirty="0" smtClean="0"/>
+              <a:t>ATT-CNN-LSTM cho kết quả định lượng tốt nhất, phản ánh rõ giao động của chuỗi</a:t>
+            </a:r>
+          </a:p>
+          <a:p>
+            <a:r>
+              <a:rPr lang="en-US" dirty="0" smtClean="0"/>
+              <a:t>Transformer tạo embedding trừu tượng mạnh</a:t>
+            </a:r>
+          </a:p>
+          <a:p>
+            <a:endParaRPr lang="en-US" dirty="0"/>
+          </a:p>
+          <a:p>
+            <a:pPr marL="0" indent="0">
+              <a:buNone/>
+            </a:pPr>
+            <a:r>
+              <a:rPr lang="en-US" dirty="0" smtClean="0"/>
+              <a:t>-&gt; sẵn sàng cho tích hợp finBERT + ATT-CNN + Transformer</a:t>
+            </a:r>
+          </a:p>
+        </p:txBody>
+      </p:sp>
+    </p:spTree>
+    <p:extLst>
+      <p:ext uri="{BB962C8B-B14F-4D97-AF65-F5344CB8AC3E}">
+        <p14:creationId xmlns:p14="http://schemas.microsoft.com/office/powerpoint/2010/main" val="4101327151"/>
+      </p:ext>
+    </p:extLst>
+  </p:cSld>
+  <p:clrMapOvr>
+    <a:masterClrMapping/>
+  </p:clrMapOvr>
+  <p:timing>
+    <p:tnLst>
+      <p:par>
+        <p:cTn id="1" dur="indefinite" restart="never" nodeType="tmRoot"/>
+      </p:par>
+    </p:tnLst>
+  </p:timing>
+</p:sld>
+</file>
+
+<file path=ppt/slides/slide13.xml><?xml version="1.0" encoding="utf-8"?>
+<p:sld xmlns:a="http://schemas.openxmlformats.org/drawingml/2006/main" xmlns:r="http://schemas.openxmlformats.org/officeDocument/2006/relationships" xmlns:p="http://schemas.openxmlformats.org/presentationml/2006/main">
+  <p:cSld>
+    <p:spTree>
+      <p:nvGrpSpPr>
+        <p:cNvPr id="1" name=""/>
+        <p:cNvGrpSpPr/>
+        <p:nvPr/>
+      </p:nvGrpSpPr>
+      <p:grpSpPr>
+        <a:xfrm>
+          <a:off x="0" y="0"/>
+          <a:ext cx="0" cy="0"/>
+          <a:chOff x="0" y="0"/>
+          <a:chExt cx="0" cy="0"/>
+        </a:xfrm>
+      </p:grpSpPr>
+      <p:sp>
+        <p:nvSpPr>
+          <p:cNvPr id="2" name="Title 1"/>
+          <p:cNvSpPr>
+            <a:spLocks noGrp="1"/>
+          </p:cNvSpPr>
+          <p:nvPr>
+            <p:ph type="title"/>
+          </p:nvPr>
+        </p:nvSpPr>
+        <p:spPr/>
+        <p:txBody>
+          <a:bodyPr/>
+          <a:lstStyle/>
+          <a:p>
+            <a:r>
+              <a:rPr lang="en-US" dirty="0" smtClean="0"/>
+              <a:t>Training Fusion</a:t>
+            </a:r>
+            <a:endParaRPr lang="en-US" dirty="0"/>
+          </a:p>
+        </p:txBody>
+      </p:sp>
+      <p:sp>
+        <p:nvSpPr>
+          <p:cNvPr id="3" name="Content Placeholder 2"/>
+          <p:cNvSpPr>
+            <a:spLocks noGrp="1"/>
+          </p:cNvSpPr>
+          <p:nvPr>
+            <p:ph idx="1"/>
+          </p:nvPr>
+        </p:nvSpPr>
+        <p:spPr/>
+        <p:txBody>
+          <a:bodyPr/>
+          <a:lstStyle/>
+          <a:p>
+            <a:r>
+              <a:rPr lang="vi-VN" dirty="0"/>
+              <a:t>input_dim: </a:t>
+            </a:r>
+            <a:r>
+              <a:rPr lang="en-US" dirty="0" smtClean="0"/>
+              <a:t>1283</a:t>
+            </a:r>
+            <a:r>
+              <a:rPr lang="vi-VN" dirty="0" smtClean="0"/>
+              <a:t> </a:t>
+            </a:r>
+            <a:r>
+              <a:rPr lang="vi-VN" dirty="0"/>
+              <a:t>    </a:t>
+            </a:r>
+            <a:r>
+              <a:rPr lang="en-US" dirty="0" smtClean="0"/>
+              <a:t>= </a:t>
+            </a:r>
+            <a:r>
+              <a:rPr lang="en-US" dirty="0" smtClean="0"/>
+              <a:t>finBERT(3) </a:t>
+            </a:r>
+            <a:r>
+              <a:rPr lang="en-US" dirty="0" smtClean="0"/>
+              <a:t>+ </a:t>
+            </a:r>
+            <a:r>
+              <a:rPr lang="en-US" dirty="0" smtClean="0"/>
+              <a:t>Transformer(512) </a:t>
+            </a:r>
+            <a:r>
+              <a:rPr lang="en-US" dirty="0" smtClean="0"/>
+              <a:t>+ </a:t>
+            </a:r>
+            <a:r>
+              <a:rPr lang="en-US" dirty="0" smtClean="0"/>
+              <a:t>ATT-CNN(786)</a:t>
+            </a:r>
+            <a:endParaRPr lang="vi-VN" dirty="0"/>
+          </a:p>
+          <a:p>
+            <a:r>
+              <a:rPr lang="vi-VN" dirty="0"/>
+              <a:t>hidden_dim: </a:t>
+            </a:r>
+            <a:r>
+              <a:rPr lang="en-US" dirty="0" smtClean="0"/>
+              <a:t>[1024, </a:t>
+            </a:r>
+            <a:r>
+              <a:rPr lang="vi-VN" dirty="0" smtClean="0"/>
+              <a:t>512</a:t>
+            </a:r>
+            <a:r>
+              <a:rPr lang="en-US" dirty="0" smtClean="0"/>
+              <a:t>]</a:t>
+            </a:r>
+            <a:endParaRPr lang="vi-VN" dirty="0"/>
+          </a:p>
+          <a:p>
+            <a:r>
+              <a:rPr lang="vi-VN" dirty="0"/>
+              <a:t>output_dim: 256  </a:t>
+            </a:r>
+            <a:endParaRPr lang="en-US" dirty="0" smtClean="0"/>
+          </a:p>
+          <a:p>
+            <a:r>
+              <a:rPr lang="en-US" dirty="0"/>
+              <a:t>lr: </a:t>
+            </a:r>
+            <a:r>
+              <a:rPr lang="en-US" dirty="0" smtClean="0"/>
+              <a:t>0.0001</a:t>
+            </a:r>
+            <a:endParaRPr lang="en-US" dirty="0"/>
+          </a:p>
+          <a:p>
+            <a:r>
+              <a:rPr lang="en-US" dirty="0"/>
+              <a:t>epochs: 100</a:t>
+            </a:r>
+          </a:p>
+          <a:p>
+            <a:r>
+              <a:rPr lang="en-US" dirty="0"/>
+              <a:t>optimizer: </a:t>
+            </a:r>
+            <a:r>
+              <a:rPr lang="en-US" dirty="0" smtClean="0"/>
+              <a:t>Adam</a:t>
+            </a:r>
+          </a:p>
+          <a:p>
+            <a:r>
+              <a:rPr lang="en-US" dirty="0" smtClean="0"/>
+              <a:t>Sử dụng embedding dựa trên </a:t>
+            </a:r>
+            <a:r>
+              <a:rPr lang="en-US" dirty="0" smtClean="0"/>
+              <a:t>inference tập train của </a:t>
+            </a:r>
+            <a:r>
+              <a:rPr lang="en-US" dirty="0" smtClean="0"/>
+              <a:t>3 mô hình</a:t>
+            </a:r>
+            <a:endParaRPr lang="en-US" dirty="0"/>
+          </a:p>
+          <a:p>
+            <a:endParaRPr lang="vi-VN" dirty="0"/>
+          </a:p>
+          <a:p>
+            <a:endParaRPr lang="en-US" dirty="0" smtClean="0"/>
+          </a:p>
+        </p:txBody>
+      </p:sp>
+    </p:spTree>
+    <p:extLst>
+      <p:ext uri="{BB962C8B-B14F-4D97-AF65-F5344CB8AC3E}">
+        <p14:creationId xmlns:p14="http://schemas.microsoft.com/office/powerpoint/2010/main" val="455751403"/>
+      </p:ext>
+    </p:extLst>
+  </p:cSld>
+  <p:clrMapOvr>
+    <a:masterClrMapping/>
+  </p:clrMapOvr>
+  <p:timing>
+    <p:tnLst>
+      <p:par>
+        <p:cTn id="1" dur="indefinite" restart="never" nodeType="tmRoot"/>
+      </p:par>
+    </p:tnLst>
+  </p:timing>
+</p:sld>
+</file>
+
+<file path=ppt/slides/slide14.xml><?xml version="1.0" encoding="utf-8"?>
+<p:sld xmlns:a="http://schemas.openxmlformats.org/drawingml/2006/main" xmlns:r="http://schemas.openxmlformats.org/officeDocument/2006/relationships" xmlns:p="http://schemas.openxmlformats.org/presentationml/2006/main">
+  <p:cSld>
+    <p:spTree>
+      <p:nvGrpSpPr>
+        <p:cNvPr id="1" name=""/>
+        <p:cNvGrpSpPr/>
+        <p:nvPr/>
+      </p:nvGrpSpPr>
+      <p:grpSpPr>
+        <a:xfrm>
+          <a:off x="0" y="0"/>
+          <a:ext cx="0" cy="0"/>
+          <a:chOff x="0" y="0"/>
+          <a:chExt cx="0" cy="0"/>
+        </a:xfrm>
+      </p:grpSpPr>
+      <p:sp>
+        <p:nvSpPr>
+          <p:cNvPr id="2" name="Title 1"/>
+          <p:cNvSpPr>
+            <a:spLocks noGrp="1"/>
+          </p:cNvSpPr>
+          <p:nvPr>
+            <p:ph type="title"/>
+          </p:nvPr>
+        </p:nvSpPr>
+        <p:spPr/>
+        <p:txBody>
+          <a:bodyPr/>
+          <a:lstStyle/>
+          <a:p>
+            <a:r>
+              <a:rPr lang="en-US" dirty="0" smtClean="0"/>
               <a:t>Training Fusion</a:t>
             </a:r>
             <a:endParaRPr lang="en-US" dirty="0"/>
@@ -3372,6 +3689,843 @@
             <a:r>
               <a:rPr lang="en-US" dirty="0" smtClean="0"/>
               <a:t>256 chiều</a:t>
+            </a:r>
+          </a:p>
+        </p:txBody>
+      </p:sp>
+      <p:pic>
+        <p:nvPicPr>
+          <p:cNvPr id="5" name="Picture 4"/>
+          <p:cNvPicPr>
+            <a:picLocks noChangeAspect="1"/>
+          </p:cNvPicPr>
+          <p:nvPr/>
+        </p:nvPicPr>
+        <p:blipFill>
+          <a:blip r:embed="rId2"/>
+          <a:stretch>
+            <a:fillRect/>
+          </a:stretch>
+        </p:blipFill>
+        <p:spPr>
+          <a:xfrm>
+            <a:off x="5904213" y="652634"/>
+            <a:ext cx="5174096" cy="5242339"/>
+          </a:xfrm>
+          <a:prstGeom prst="rect">
+            <a:avLst/>
+          </a:prstGeom>
+        </p:spPr>
+      </p:pic>
+    </p:spTree>
+    <p:extLst>
+      <p:ext uri="{BB962C8B-B14F-4D97-AF65-F5344CB8AC3E}">
+        <p14:creationId xmlns:p14="http://schemas.microsoft.com/office/powerpoint/2010/main" val="3622452549"/>
+      </p:ext>
+    </p:extLst>
+  </p:cSld>
+  <p:clrMapOvr>
+    <a:masterClrMapping/>
+  </p:clrMapOvr>
+  <p:timing>
+    <p:tnLst>
+      <p:par>
+        <p:cTn id="1" dur="indefinite" restart="never" nodeType="tmRoot"/>
+      </p:par>
+    </p:tnLst>
+  </p:timing>
+</p:sld>
+</file>
+
+<file path=ppt/slides/slide15.xml><?xml version="1.0" encoding="utf-8"?>
+<p:sld xmlns:a="http://schemas.openxmlformats.org/drawingml/2006/main" xmlns:r="http://schemas.openxmlformats.org/officeDocument/2006/relationships" xmlns:p="http://schemas.openxmlformats.org/presentationml/2006/main">
+  <p:cSld>
+    <p:spTree>
+      <p:nvGrpSpPr>
+        <p:cNvPr id="1" name=""/>
+        <p:cNvGrpSpPr/>
+        <p:nvPr/>
+      </p:nvGrpSpPr>
+      <p:grpSpPr>
+        <a:xfrm>
+          <a:off x="0" y="0"/>
+          <a:ext cx="0" cy="0"/>
+          <a:chOff x="0" y="0"/>
+          <a:chExt cx="0" cy="0"/>
+        </a:xfrm>
+      </p:grpSpPr>
+      <p:sp>
+        <p:nvSpPr>
+          <p:cNvPr id="2" name="Title 1"/>
+          <p:cNvSpPr>
+            <a:spLocks noGrp="1"/>
+          </p:cNvSpPr>
+          <p:nvPr>
+            <p:ph type="title"/>
+          </p:nvPr>
+        </p:nvSpPr>
+        <p:spPr/>
+        <p:txBody>
+          <a:bodyPr/>
+          <a:lstStyle/>
+          <a:p>
+            <a:r>
+              <a:rPr lang="en-US" dirty="0" smtClean="0"/>
+              <a:t>Training </a:t>
+            </a:r>
+            <a:r>
+              <a:rPr lang="en-US" dirty="0"/>
+              <a:t>Bandit LinUCB</a:t>
+            </a:r>
+            <a:endParaRPr lang="en-US" dirty="0"/>
+          </a:p>
+        </p:txBody>
+      </p:sp>
+      <p:sp>
+        <p:nvSpPr>
+          <p:cNvPr id="6" name="Rectangle 2"/>
+          <p:cNvSpPr>
+            <a:spLocks noGrp="1" noChangeArrowheads="1"/>
+          </p:cNvSpPr>
+          <p:nvPr>
+            <p:ph idx="1"/>
+          </p:nvPr>
+        </p:nvSpPr>
+        <p:spPr bwMode="auto">
+          <a:xfrm>
+            <a:off x="838200" y="2154636"/>
+            <a:ext cx="10635762" cy="3693319"/>
+          </a:xfrm>
+          <a:prstGeom prst="rect">
+            <a:avLst/>
+          </a:prstGeom>
+          <a:noFill/>
+          <a:ln>
+            <a:noFill/>
+          </a:ln>
+          <a:effectLst/>
+          <a:extLst>
+            <a:ext uri="{909E8E84-426E-40DD-AFC4-6F175D3DCCD1}">
+              <a14:hiddenFill xmlns:a14="http://schemas.microsoft.com/office/drawing/2010/main">
+                <a:solidFill>
+                  <a:schemeClr val="accent1"/>
+                </a:solidFill>
+              </a14:hiddenFill>
+            </a:ext>
+            <a:ext uri="{91240B29-F687-4F45-9708-019B960494DF}">
+              <a14:hiddenLine xmlns:a14="http://schemas.microsoft.com/office/drawing/2010/main" w="9525">
+                <a:solidFill>
+                  <a:schemeClr val="tx1"/>
+                </a:solidFill>
+                <a:miter lim="800000"/>
+                <a:headEnd/>
+                <a:tailEnd/>
+              </a14:hiddenLine>
+            </a:ext>
+            <a:ext uri="{AF507438-7753-43E0-B8FC-AC1667EBCBE1}">
+              <a14:hiddenEffects xmlns:a14="http://schemas.microsoft.com/office/drawing/2010/main">
+                <a:effectLst>
+                  <a:outerShdw dist="35921" dir="2700000" algn="ctr" rotWithShape="0">
+                    <a:schemeClr val="bg2"/>
+                  </a:outerShdw>
+                </a:effectLst>
+              </a14:hiddenEffects>
+            </a:ext>
+          </a:extLst>
+        </p:spPr>
+        <p:txBody>
+          <a:bodyPr vert="horz" wrap="square" lIns="91440" tIns="45720" rIns="91440" bIns="45720" numCol="1" anchor="ctr" anchorCtr="0" compatLnSpc="1">
+            <a:prstTxWarp prst="textNoShape">
+              <a:avLst/>
+            </a:prstTxWarp>
+            <a:spAutoFit/>
+          </a:bodyPr>
+          <a:lstStyle/>
+          <a:p>
+            <a:pPr marL="0" marR="0" lvl="0" indent="0" algn="l" defTabSz="914400" rtl="0" eaLnBrk="0" fontAlgn="base" latinLnBrk="0" hangingPunct="0">
+              <a:lnSpc>
+                <a:spcPct val="100000"/>
+              </a:lnSpc>
+              <a:spcBef>
+                <a:spcPct val="0"/>
+              </a:spcBef>
+              <a:spcAft>
+                <a:spcPct val="0"/>
+              </a:spcAft>
+              <a:buClrTx/>
+              <a:buSzTx/>
+              <a:buFontTx/>
+              <a:buChar char="•"/>
+              <a:tabLst/>
+            </a:pPr>
+            <a:r>
+              <a:rPr kumimoji="0" lang="en-US" altLang="en-US" sz="1800" b="0" i="0" u="none" strike="noStrike" cap="none" normalizeH="0" baseline="0" dirty="0" smtClean="0">
+                <a:ln>
+                  <a:noFill/>
+                </a:ln>
+                <a:solidFill>
+                  <a:schemeClr val="tx1"/>
+                </a:solidFill>
+                <a:effectLst/>
+                <a:latin typeface="Arial" panose="020B0604020202020204" pitchFamily="34" charset="0"/>
+              </a:rPr>
+              <a:t>Agent được mô hình hóa như </a:t>
+            </a:r>
+            <a:r>
+              <a:rPr kumimoji="0" lang="en-US" altLang="en-US" sz="1800" b="1" i="0" u="none" strike="noStrike" cap="none" normalizeH="0" baseline="0" dirty="0" smtClean="0">
+                <a:ln>
+                  <a:noFill/>
+                </a:ln>
+                <a:solidFill>
+                  <a:schemeClr val="tx1"/>
+                </a:solidFill>
+                <a:effectLst/>
+                <a:latin typeface="Arial" panose="020B0604020202020204" pitchFamily="34" charset="0"/>
+              </a:rPr>
+              <a:t>contextual bandit (LinUCB)</a:t>
+            </a:r>
+            <a:r>
+              <a:rPr kumimoji="0" lang="en-US" altLang="en-US" sz="1800" b="0" i="0" u="none" strike="noStrike" cap="none" normalizeH="0" baseline="0" dirty="0" smtClean="0">
+                <a:ln>
+                  <a:noFill/>
+                </a:ln>
+                <a:solidFill>
+                  <a:schemeClr val="tx1"/>
+                </a:solidFill>
+                <a:effectLst/>
+                <a:latin typeface="Arial" panose="020B0604020202020204" pitchFamily="34" charset="0"/>
+              </a:rPr>
+              <a:t>, chọn hành động FLAT/LONG/SHORT theo context hiện tại.</a:t>
+            </a:r>
+          </a:p>
+          <a:p>
+            <a:pPr marL="0" marR="0" lvl="0" indent="0" algn="l" defTabSz="914400" rtl="0" eaLnBrk="0" fontAlgn="base" latinLnBrk="0" hangingPunct="0">
+              <a:lnSpc>
+                <a:spcPct val="100000"/>
+              </a:lnSpc>
+              <a:spcBef>
+                <a:spcPct val="0"/>
+              </a:spcBef>
+              <a:spcAft>
+                <a:spcPct val="0"/>
+              </a:spcAft>
+              <a:buClrTx/>
+              <a:buSzTx/>
+              <a:buNone/>
+              <a:tabLst/>
+            </a:pPr>
+            <a:endParaRPr kumimoji="0" lang="en-US" altLang="en-US" sz="1800" b="0" i="0" u="none" strike="noStrike" cap="none" normalizeH="0" baseline="0" dirty="0" smtClean="0">
+              <a:ln>
+                <a:noFill/>
+              </a:ln>
+              <a:solidFill>
+                <a:schemeClr val="tx1"/>
+              </a:solidFill>
+              <a:effectLst/>
+              <a:latin typeface="Arial" panose="020B0604020202020204" pitchFamily="34" charset="0"/>
+            </a:endParaRPr>
+          </a:p>
+          <a:p>
+            <a:pPr marL="0" marR="0" lvl="0" indent="0" algn="l" defTabSz="914400" rtl="0" eaLnBrk="0" fontAlgn="base" latinLnBrk="0" hangingPunct="0">
+              <a:lnSpc>
+                <a:spcPct val="100000"/>
+              </a:lnSpc>
+              <a:spcBef>
+                <a:spcPct val="0"/>
+              </a:spcBef>
+              <a:spcAft>
+                <a:spcPct val="0"/>
+              </a:spcAft>
+              <a:buClrTx/>
+              <a:buSzTx/>
+              <a:buFontTx/>
+              <a:buChar char="•"/>
+              <a:tabLst/>
+            </a:pPr>
+            <a:r>
+              <a:rPr kumimoji="0" lang="en-US" altLang="en-US" sz="1800" b="0" i="0" u="none" strike="noStrike" cap="none" normalizeH="0" baseline="0" dirty="0" smtClean="0">
+                <a:ln>
+                  <a:noFill/>
+                </a:ln>
+                <a:solidFill>
+                  <a:schemeClr val="tx1"/>
+                </a:solidFill>
+                <a:effectLst/>
+                <a:latin typeface="Arial" panose="020B0604020202020204" pitchFamily="34" charset="0"/>
+              </a:rPr>
+              <a:t>Context gồm </a:t>
+            </a:r>
+            <a:r>
+              <a:rPr kumimoji="0" lang="en-US" altLang="en-US" sz="1800" b="1" i="0" u="none" strike="noStrike" cap="none" normalizeH="0" baseline="0" dirty="0" smtClean="0">
+                <a:ln>
+                  <a:noFill/>
+                </a:ln>
+                <a:solidFill>
+                  <a:schemeClr val="tx1"/>
+                </a:solidFill>
+                <a:effectLst/>
+                <a:latin typeface="Arial" panose="020B0604020202020204" pitchFamily="34" charset="0"/>
+              </a:rPr>
+              <a:t>fusion embedding + đặc trưng kỹ thuật nhẹ</a:t>
+            </a:r>
+            <a:r>
+              <a:rPr kumimoji="0" lang="en-US" altLang="en-US" sz="1800" b="0" i="0" u="none" strike="noStrike" cap="none" normalizeH="0" baseline="0" dirty="0" smtClean="0">
+                <a:ln>
+                  <a:noFill/>
+                </a:ln>
+                <a:solidFill>
+                  <a:schemeClr val="tx1"/>
+                </a:solidFill>
+                <a:effectLst/>
+                <a:latin typeface="Arial" panose="020B0604020202020204" pitchFamily="34" charset="0"/>
+              </a:rPr>
+              <a:t>, chỉ sử dụng thông tin sẵn có tại thời điểm quyết định.</a:t>
+            </a:r>
+          </a:p>
+          <a:p>
+            <a:pPr marL="0" marR="0" lvl="0" indent="0" algn="l" defTabSz="914400" rtl="0" eaLnBrk="0" fontAlgn="base" latinLnBrk="0" hangingPunct="0">
+              <a:lnSpc>
+                <a:spcPct val="100000"/>
+              </a:lnSpc>
+              <a:spcBef>
+                <a:spcPct val="0"/>
+              </a:spcBef>
+              <a:spcAft>
+                <a:spcPct val="0"/>
+              </a:spcAft>
+              <a:buClrTx/>
+              <a:buSzTx/>
+              <a:buNone/>
+              <a:tabLst/>
+            </a:pPr>
+            <a:endParaRPr kumimoji="0" lang="en-US" altLang="en-US" sz="1800" b="0" i="0" u="none" strike="noStrike" cap="none" normalizeH="0" baseline="0" dirty="0" smtClean="0">
+              <a:ln>
+                <a:noFill/>
+              </a:ln>
+              <a:solidFill>
+                <a:schemeClr val="tx1"/>
+              </a:solidFill>
+              <a:effectLst/>
+              <a:latin typeface="Arial" panose="020B0604020202020204" pitchFamily="34" charset="0"/>
+            </a:endParaRPr>
+          </a:p>
+          <a:p>
+            <a:pPr marL="0" marR="0" lvl="0" indent="0" algn="l" defTabSz="914400" rtl="0" eaLnBrk="0" fontAlgn="base" latinLnBrk="0" hangingPunct="0">
+              <a:lnSpc>
+                <a:spcPct val="100000"/>
+              </a:lnSpc>
+              <a:spcBef>
+                <a:spcPct val="0"/>
+              </a:spcBef>
+              <a:spcAft>
+                <a:spcPct val="0"/>
+              </a:spcAft>
+              <a:buClrTx/>
+              <a:buSzTx/>
+              <a:buFontTx/>
+              <a:buChar char="•"/>
+              <a:tabLst/>
+            </a:pPr>
+            <a:r>
+              <a:rPr kumimoji="0" lang="en-US" altLang="en-US" sz="1800" b="0" i="0" u="none" strike="noStrike" cap="none" normalizeH="0" baseline="0" dirty="0" smtClean="0">
+                <a:ln>
+                  <a:noFill/>
+                </a:ln>
+                <a:solidFill>
+                  <a:schemeClr val="tx1"/>
+                </a:solidFill>
+                <a:effectLst/>
+                <a:latin typeface="Arial" panose="020B0604020202020204" pitchFamily="34" charset="0"/>
+              </a:rPr>
+              <a:t>Reward là </a:t>
+            </a:r>
+            <a:r>
+              <a:rPr kumimoji="0" lang="en-US" altLang="en-US" sz="1800" b="1" i="0" u="none" strike="noStrike" cap="none" normalizeH="0" baseline="0" dirty="0" smtClean="0">
+                <a:ln>
+                  <a:noFill/>
+                </a:ln>
+                <a:solidFill>
+                  <a:schemeClr val="tx1"/>
+                </a:solidFill>
+                <a:effectLst/>
+                <a:latin typeface="Arial" panose="020B0604020202020204" pitchFamily="34" charset="0"/>
+              </a:rPr>
+              <a:t>log-wealth increment</a:t>
+            </a:r>
+            <a:r>
+              <a:rPr kumimoji="0" lang="en-US" altLang="en-US" sz="1800" b="0" i="0" u="none" strike="noStrike" cap="none" normalizeH="0" baseline="0" dirty="0" smtClean="0">
+                <a:ln>
+                  <a:noFill/>
+                </a:ln>
+                <a:solidFill>
+                  <a:schemeClr val="tx1"/>
+                </a:solidFill>
+                <a:effectLst/>
+                <a:latin typeface="Arial" panose="020B0604020202020204" pitchFamily="34" charset="0"/>
+              </a:rPr>
+              <a:t>, giúp mô hình </a:t>
+            </a:r>
+            <a:r>
+              <a:rPr kumimoji="0" lang="en-US" altLang="en-US" sz="1800" b="1" i="0" u="none" strike="noStrike" cap="none" normalizeH="0" baseline="0" dirty="0" smtClean="0">
+                <a:ln>
+                  <a:noFill/>
+                </a:ln>
+                <a:solidFill>
+                  <a:schemeClr val="tx1"/>
+                </a:solidFill>
+                <a:effectLst/>
+                <a:latin typeface="Arial" panose="020B0604020202020204" pitchFamily="34" charset="0"/>
+              </a:rPr>
+              <a:t>không phụ thuộc quy mô vốn</a:t>
+            </a:r>
+            <a:r>
+              <a:rPr kumimoji="0" lang="en-US" altLang="en-US" sz="1800" b="0" i="0" u="none" strike="noStrike" cap="none" normalizeH="0" baseline="0" dirty="0" smtClean="0">
+                <a:ln>
+                  <a:noFill/>
+                </a:ln>
+                <a:solidFill>
+                  <a:schemeClr val="tx1"/>
+                </a:solidFill>
+                <a:effectLst/>
+                <a:latin typeface="Arial" panose="020B0604020202020204" pitchFamily="34" charset="0"/>
+              </a:rPr>
+              <a:t>.</a:t>
+            </a:r>
+          </a:p>
+          <a:p>
+            <a:pPr marL="0" marR="0" lvl="0" indent="0" algn="l" defTabSz="914400" rtl="0" eaLnBrk="0" fontAlgn="base" latinLnBrk="0" hangingPunct="0">
+              <a:lnSpc>
+                <a:spcPct val="100000"/>
+              </a:lnSpc>
+              <a:spcBef>
+                <a:spcPct val="0"/>
+              </a:spcBef>
+              <a:spcAft>
+                <a:spcPct val="0"/>
+              </a:spcAft>
+              <a:buClrTx/>
+              <a:buSzTx/>
+              <a:buNone/>
+              <a:tabLst/>
+            </a:pPr>
+            <a:endParaRPr kumimoji="0" lang="en-US" altLang="en-US" sz="1800" b="0" i="0" u="none" strike="noStrike" cap="none" normalizeH="0" baseline="0" dirty="0" smtClean="0">
+              <a:ln>
+                <a:noFill/>
+              </a:ln>
+              <a:solidFill>
+                <a:schemeClr val="tx1"/>
+              </a:solidFill>
+              <a:effectLst/>
+              <a:latin typeface="Arial" panose="020B0604020202020204" pitchFamily="34" charset="0"/>
+            </a:endParaRPr>
+          </a:p>
+          <a:p>
+            <a:pPr marL="0" marR="0" lvl="0" indent="0" algn="l" defTabSz="914400" rtl="0" eaLnBrk="0" fontAlgn="base" latinLnBrk="0" hangingPunct="0">
+              <a:lnSpc>
+                <a:spcPct val="100000"/>
+              </a:lnSpc>
+              <a:spcBef>
+                <a:spcPct val="0"/>
+              </a:spcBef>
+              <a:spcAft>
+                <a:spcPct val="0"/>
+              </a:spcAft>
+              <a:buClrTx/>
+              <a:buSzTx/>
+              <a:buFontTx/>
+              <a:buChar char="•"/>
+              <a:tabLst/>
+            </a:pPr>
+            <a:r>
+              <a:rPr kumimoji="0" lang="en-US" altLang="en-US" sz="1800" b="1" i="0" u="none" strike="noStrike" cap="none" normalizeH="0" baseline="0" dirty="0" smtClean="0">
+                <a:ln>
+                  <a:noFill/>
+                </a:ln>
+                <a:solidFill>
+                  <a:schemeClr val="tx1"/>
+                </a:solidFill>
+                <a:effectLst/>
+                <a:latin typeface="Arial" panose="020B0604020202020204" pitchFamily="34" charset="0"/>
+              </a:rPr>
+              <a:t>Diagonal LinUCB + UCB bonus</a:t>
+            </a:r>
+            <a:r>
+              <a:rPr kumimoji="0" lang="en-US" altLang="en-US" sz="1800" b="0" i="0" u="none" strike="noStrike" cap="none" normalizeH="0" baseline="0" dirty="0" smtClean="0">
+                <a:ln>
+                  <a:noFill/>
+                </a:ln>
+                <a:solidFill>
+                  <a:schemeClr val="tx1"/>
+                </a:solidFill>
+                <a:effectLst/>
+                <a:latin typeface="Arial" panose="020B0604020202020204" pitchFamily="34" charset="0"/>
+              </a:rPr>
+              <a:t> cân bằng giữa khai thác và khám phá.</a:t>
+            </a:r>
+          </a:p>
+          <a:p>
+            <a:pPr marL="0" marR="0" lvl="0" indent="0" algn="l" defTabSz="914400" rtl="0" eaLnBrk="0" fontAlgn="base" latinLnBrk="0" hangingPunct="0">
+              <a:lnSpc>
+                <a:spcPct val="100000"/>
+              </a:lnSpc>
+              <a:spcBef>
+                <a:spcPct val="0"/>
+              </a:spcBef>
+              <a:spcAft>
+                <a:spcPct val="0"/>
+              </a:spcAft>
+              <a:buClrTx/>
+              <a:buSzTx/>
+              <a:buFontTx/>
+              <a:buChar char="•"/>
+              <a:tabLst/>
+            </a:pPr>
+            <a:endParaRPr kumimoji="0" lang="en-US" altLang="en-US" sz="1800" b="0" i="0" u="none" strike="noStrike" cap="none" normalizeH="0" baseline="0" dirty="0" smtClean="0">
+              <a:ln>
+                <a:noFill/>
+              </a:ln>
+              <a:solidFill>
+                <a:schemeClr val="tx1"/>
+              </a:solidFill>
+              <a:effectLst/>
+              <a:latin typeface="Arial" panose="020B0604020202020204" pitchFamily="34" charset="0"/>
+            </a:endParaRPr>
+          </a:p>
+          <a:p>
+            <a:pPr marL="0" marR="0" lvl="0" indent="0" algn="l" defTabSz="914400" rtl="0" eaLnBrk="0" fontAlgn="base" latinLnBrk="0" hangingPunct="0">
+              <a:lnSpc>
+                <a:spcPct val="100000"/>
+              </a:lnSpc>
+              <a:spcBef>
+                <a:spcPct val="0"/>
+              </a:spcBef>
+              <a:spcAft>
+                <a:spcPct val="0"/>
+              </a:spcAft>
+              <a:buClrTx/>
+              <a:buSzTx/>
+              <a:buFontTx/>
+              <a:buChar char="•"/>
+              <a:tabLst/>
+            </a:pPr>
+            <a:r>
+              <a:rPr kumimoji="0" lang="en-US" altLang="en-US" sz="1800" b="0" i="0" u="none" strike="noStrike" cap="none" normalizeH="0" baseline="0" dirty="0" smtClean="0">
+                <a:ln>
+                  <a:noFill/>
+                </a:ln>
+                <a:solidFill>
+                  <a:schemeClr val="tx1"/>
+                </a:solidFill>
+                <a:effectLst/>
+                <a:latin typeface="Arial" panose="020B0604020202020204" pitchFamily="34" charset="0"/>
+              </a:rPr>
+              <a:t>Tham số được </a:t>
+            </a:r>
+            <a:r>
+              <a:rPr kumimoji="0" lang="en-US" altLang="en-US" sz="1800" b="1" i="0" u="none" strike="noStrike" cap="none" normalizeH="0" baseline="0" dirty="0" smtClean="0">
+                <a:ln>
+                  <a:noFill/>
+                </a:ln>
+                <a:solidFill>
+                  <a:schemeClr val="tx1"/>
+                </a:solidFill>
+                <a:effectLst/>
+                <a:latin typeface="Arial" panose="020B0604020202020204" pitchFamily="34" charset="0"/>
+              </a:rPr>
+              <a:t>cập nhật online với forgetting factor</a:t>
+            </a:r>
+            <a:r>
+              <a:rPr kumimoji="0" lang="en-US" altLang="en-US" sz="1800" b="0" i="0" u="none" strike="noStrike" cap="none" normalizeH="0" baseline="0" dirty="0" smtClean="0">
+                <a:ln>
+                  <a:noFill/>
+                </a:ln>
+                <a:solidFill>
+                  <a:schemeClr val="tx1"/>
+                </a:solidFill>
+                <a:effectLst/>
+                <a:latin typeface="Arial" panose="020B0604020202020204" pitchFamily="34" charset="0"/>
+              </a:rPr>
+              <a:t>, thích nghi thị trường.</a:t>
+            </a:r>
+          </a:p>
+          <a:p>
+            <a:pPr marL="0" marR="0" lvl="0" indent="0" algn="l" defTabSz="914400" rtl="0" eaLnBrk="0" fontAlgn="base" latinLnBrk="0" hangingPunct="0">
+              <a:lnSpc>
+                <a:spcPct val="100000"/>
+              </a:lnSpc>
+              <a:spcBef>
+                <a:spcPct val="0"/>
+              </a:spcBef>
+              <a:spcAft>
+                <a:spcPct val="0"/>
+              </a:spcAft>
+              <a:buClrTx/>
+              <a:buSzTx/>
+              <a:buNone/>
+              <a:tabLst/>
+            </a:pPr>
+            <a:endParaRPr kumimoji="0" lang="en-US" altLang="en-US" sz="1800" b="0" i="0" u="none" strike="noStrike" cap="none" normalizeH="0" baseline="0" dirty="0" smtClean="0">
+              <a:ln>
+                <a:noFill/>
+              </a:ln>
+              <a:solidFill>
+                <a:schemeClr val="tx1"/>
+              </a:solidFill>
+              <a:effectLst/>
+              <a:latin typeface="Arial" panose="020B0604020202020204" pitchFamily="34" charset="0"/>
+            </a:endParaRPr>
+          </a:p>
+          <a:p>
+            <a:pPr marL="0" marR="0" lvl="0" indent="0" algn="l" defTabSz="914400" rtl="0" eaLnBrk="0" fontAlgn="base" latinLnBrk="0" hangingPunct="0">
+              <a:lnSpc>
+                <a:spcPct val="100000"/>
+              </a:lnSpc>
+              <a:spcBef>
+                <a:spcPct val="0"/>
+              </a:spcBef>
+              <a:spcAft>
+                <a:spcPct val="0"/>
+              </a:spcAft>
+              <a:buClrTx/>
+              <a:buSzTx/>
+              <a:buFontTx/>
+              <a:buChar char="•"/>
+              <a:tabLst/>
+            </a:pPr>
+            <a:r>
+              <a:rPr kumimoji="0" lang="en-US" altLang="en-US" sz="1800" b="0" i="0" u="none" strike="noStrike" cap="none" normalizeH="0" baseline="0" dirty="0" smtClean="0">
+                <a:ln>
+                  <a:noFill/>
+                </a:ln>
+                <a:solidFill>
+                  <a:schemeClr val="tx1"/>
+                </a:solidFill>
+                <a:effectLst/>
+                <a:latin typeface="Arial" panose="020B0604020202020204" pitchFamily="34" charset="0"/>
+              </a:rPr>
+              <a:t>Execution </a:t>
+            </a:r>
+            <a:r>
+              <a:rPr kumimoji="0" lang="en-US" altLang="en-US" sz="1800" b="1" i="0" u="none" strike="noStrike" cap="none" normalizeH="0" baseline="0" dirty="0" smtClean="0">
+                <a:ln>
+                  <a:noFill/>
+                </a:ln>
+                <a:solidFill>
+                  <a:schemeClr val="tx1"/>
+                </a:solidFill>
+                <a:effectLst/>
+                <a:latin typeface="Arial" panose="020B0604020202020204" pitchFamily="34" charset="0"/>
+              </a:rPr>
+              <a:t>trễ 1 bar (trade at next open)</a:t>
+            </a:r>
+            <a:r>
+              <a:rPr kumimoji="0" lang="en-US" altLang="en-US" sz="1800" b="0" i="0" u="none" strike="noStrike" cap="none" normalizeH="0" baseline="0" dirty="0" smtClean="0">
+                <a:ln>
+                  <a:noFill/>
+                </a:ln>
+                <a:solidFill>
+                  <a:schemeClr val="tx1"/>
+                </a:solidFill>
+                <a:effectLst/>
+                <a:latin typeface="Arial" panose="020B0604020202020204" pitchFamily="34" charset="0"/>
+              </a:rPr>
+              <a:t>, tránh look-ahead bias.</a:t>
+            </a:r>
+          </a:p>
+        </p:txBody>
+      </p:sp>
+    </p:spTree>
+    <p:extLst>
+      <p:ext uri="{BB962C8B-B14F-4D97-AF65-F5344CB8AC3E}">
+        <p14:creationId xmlns:p14="http://schemas.microsoft.com/office/powerpoint/2010/main" val="3302240628"/>
+      </p:ext>
+    </p:extLst>
+  </p:cSld>
+  <p:clrMapOvr>
+    <a:masterClrMapping/>
+  </p:clrMapOvr>
+  <p:timing>
+    <p:tnLst>
+      <p:par>
+        <p:cTn id="1" dur="indefinite" restart="never" nodeType="tmRoot"/>
+      </p:par>
+    </p:tnLst>
+  </p:timing>
+</p:sld>
+</file>
+
+<file path=ppt/slides/slide16.xml><?xml version="1.0" encoding="utf-8"?>
+<p:sld xmlns:a="http://schemas.openxmlformats.org/drawingml/2006/main" xmlns:r="http://schemas.openxmlformats.org/officeDocument/2006/relationships" xmlns:p="http://schemas.openxmlformats.org/presentationml/2006/main">
+  <p:cSld>
+    <p:spTree>
+      <p:nvGrpSpPr>
+        <p:cNvPr id="1" name=""/>
+        <p:cNvGrpSpPr/>
+        <p:nvPr/>
+      </p:nvGrpSpPr>
+      <p:grpSpPr>
+        <a:xfrm>
+          <a:off x="0" y="0"/>
+          <a:ext cx="0" cy="0"/>
+          <a:chOff x="0" y="0"/>
+          <a:chExt cx="0" cy="0"/>
+        </a:xfrm>
+      </p:grpSpPr>
+      <p:sp>
+        <p:nvSpPr>
+          <p:cNvPr id="2" name="Title 1"/>
+          <p:cNvSpPr>
+            <a:spLocks noGrp="1"/>
+          </p:cNvSpPr>
+          <p:nvPr>
+            <p:ph type="title"/>
+          </p:nvPr>
+        </p:nvSpPr>
+        <p:spPr/>
+        <p:txBody>
+          <a:bodyPr/>
+          <a:lstStyle/>
+          <a:p>
+            <a:r>
+              <a:rPr lang="en-US" dirty="0" smtClean="0"/>
+              <a:t>Training </a:t>
+            </a:r>
+            <a:r>
+              <a:rPr lang="en-US" dirty="0"/>
+              <a:t>Bandit LinUCB</a:t>
+            </a:r>
+            <a:endParaRPr lang="en-US" dirty="0"/>
+          </a:p>
+        </p:txBody>
+      </p:sp>
+      <p:sp>
+        <p:nvSpPr>
+          <p:cNvPr id="6" name="Rectangle 2"/>
+          <p:cNvSpPr>
+            <a:spLocks noGrp="1" noChangeArrowheads="1"/>
+          </p:cNvSpPr>
+          <p:nvPr>
+            <p:ph idx="1"/>
+          </p:nvPr>
+        </p:nvSpPr>
+        <p:spPr bwMode="auto">
+          <a:xfrm>
+            <a:off x="838200" y="2078206"/>
+            <a:ext cx="4595446" cy="3846181"/>
+          </a:xfrm>
+          <a:prstGeom prst="rect">
+            <a:avLst/>
+          </a:prstGeom>
+          <a:noFill/>
+          <a:ln>
+            <a:noFill/>
+          </a:ln>
+          <a:effectLst/>
+          <a:extLst>
+            <a:ext uri="{909E8E84-426E-40DD-AFC4-6F175D3DCCD1}">
+              <a14:hiddenFill xmlns:a14="http://schemas.microsoft.com/office/drawing/2010/main">
+                <a:solidFill>
+                  <a:schemeClr val="accent1"/>
+                </a:solidFill>
+              </a14:hiddenFill>
+            </a:ext>
+            <a:ext uri="{91240B29-F687-4F45-9708-019B960494DF}">
+              <a14:hiddenLine xmlns:a14="http://schemas.microsoft.com/office/drawing/2010/main" w="9525">
+                <a:solidFill>
+                  <a:schemeClr val="tx1"/>
+                </a:solidFill>
+                <a:miter lim="800000"/>
+                <a:headEnd/>
+                <a:tailEnd/>
+              </a14:hiddenLine>
+            </a:ext>
+            <a:ext uri="{AF507438-7753-43E0-B8FC-AC1667EBCBE1}">
+              <a14:hiddenEffects xmlns:a14="http://schemas.microsoft.com/office/drawing/2010/main">
+                <a:effectLst>
+                  <a:outerShdw dist="35921" dir="2700000" algn="ctr" rotWithShape="0">
+                    <a:schemeClr val="bg2"/>
+                  </a:outerShdw>
+                </a:effectLst>
+              </a14:hiddenEffects>
+            </a:ext>
+          </a:extLst>
+        </p:spPr>
+        <p:txBody>
+          <a:bodyPr vert="horz" wrap="square" lIns="91440" tIns="45720" rIns="91440" bIns="45720" numCol="1" anchor="ctr" anchorCtr="0" compatLnSpc="1">
+            <a:prstTxWarp prst="textNoShape">
+              <a:avLst/>
+            </a:prstTxWarp>
+            <a:spAutoFit/>
+          </a:bodyPr>
+          <a:lstStyle/>
+          <a:p>
+            <a:r>
+              <a:rPr lang="vi-VN" sz="1800" dirty="0"/>
+              <a:t>Agent LinDiagUCB với context 260 chiều </a:t>
+            </a:r>
+            <a:r>
+              <a:rPr lang="vi-VN" sz="1800" b="1" dirty="0"/>
+              <a:t>không hội tụ</a:t>
+            </a:r>
+            <a:r>
+              <a:rPr lang="vi-VN" sz="1800" dirty="0"/>
+              <a:t>, equity giảm mạnh về cuối train.</a:t>
+            </a:r>
+          </a:p>
+          <a:p>
+            <a:r>
+              <a:rPr lang="vi-VN" sz="1800" dirty="0"/>
+              <a:t>Sharpe âm liên tục và </a:t>
+            </a:r>
+            <a:r>
+              <a:rPr lang="vi-VN" sz="1800" b="1" dirty="0"/>
+              <a:t>max drawdown ~99%</a:t>
+            </a:r>
+            <a:r>
+              <a:rPr lang="vi-VN" sz="1800" dirty="0"/>
+              <a:t>, cho thấy policy học được không ổn định.</a:t>
+            </a:r>
+          </a:p>
+          <a:p>
+            <a:r>
+              <a:rPr lang="vi-VN" sz="1800" dirty="0"/>
+              <a:t>Action distribution bị </a:t>
+            </a:r>
+            <a:r>
+              <a:rPr lang="vi-VN" sz="1800" b="1" dirty="0"/>
+              <a:t>lệch mạnh về SHORT</a:t>
+            </a:r>
+            <a:r>
+              <a:rPr lang="vi-VN" sz="1800" dirty="0"/>
+              <a:t>, gần như không sử dụng FLAT.</a:t>
+            </a:r>
+          </a:p>
+          <a:p>
+            <a:r>
+              <a:rPr lang="vi-VN" sz="1800" dirty="0"/>
+              <a:t>Gamma cao khiến agent </a:t>
+            </a:r>
+            <a:r>
+              <a:rPr lang="vi-VN" sz="1800" b="1" dirty="0"/>
+              <a:t>ghi nhớ bias sai quá lâu</a:t>
+            </a:r>
+            <a:r>
+              <a:rPr lang="vi-VN" sz="1800" dirty="0"/>
+              <a:t>, khó tự điều chỉnh.</a:t>
+            </a:r>
+          </a:p>
+          <a:p>
+            <a:r>
+              <a:rPr lang="vi-VN" sz="1800" dirty="0"/>
+              <a:t>Kết quả train phản ánh </a:t>
+            </a:r>
+            <a:r>
+              <a:rPr lang="vi-VN" sz="1800" b="1" dirty="0"/>
+              <a:t>giới hạn của bandit tuyến tính</a:t>
+            </a:r>
+            <a:r>
+              <a:rPr lang="vi-VN" sz="1800" dirty="0"/>
+              <a:t> khi dùng fusion embeddings + tech features.</a:t>
             </a:r>
           </a:p>
         </p:txBody>
@@ -3392,8 +4546,8 @@
         </p:blipFill>
         <p:spPr>
           <a:xfrm>
-            <a:off x="5600902" y="1690688"/>
-            <a:ext cx="6652854" cy="4902103"/>
+            <a:off x="6018491" y="1501724"/>
+            <a:ext cx="5587355" cy="4838934"/>
           </a:xfrm>
           <a:prstGeom prst="rect">
             <a:avLst/>
@@ -3403,7 +4557,1155 @@
     </p:spTree>
     <p:extLst>
       <p:ext uri="{BB962C8B-B14F-4D97-AF65-F5344CB8AC3E}">
-        <p14:creationId xmlns:p14="http://schemas.microsoft.com/office/powerpoint/2010/main" val="3622452549"/>
+        <p14:creationId xmlns:p14="http://schemas.microsoft.com/office/powerpoint/2010/main" val="2522082179"/>
+      </p:ext>
+    </p:extLst>
+  </p:cSld>
+  <p:clrMapOvr>
+    <a:masterClrMapping/>
+  </p:clrMapOvr>
+  <p:timing>
+    <p:tnLst>
+      <p:par>
+        <p:cTn id="1" dur="indefinite" restart="never" nodeType="tmRoot"/>
+      </p:par>
+    </p:tnLst>
+  </p:timing>
+</p:sld>
+</file>
+
+<file path=ppt/slides/slide17.xml><?xml version="1.0" encoding="utf-8"?>
+<p:sld xmlns:a="http://schemas.openxmlformats.org/drawingml/2006/main" xmlns:r="http://schemas.openxmlformats.org/officeDocument/2006/relationships" xmlns:p="http://schemas.openxmlformats.org/presentationml/2006/main">
+  <p:cSld>
+    <p:spTree>
+      <p:nvGrpSpPr>
+        <p:cNvPr id="1" name=""/>
+        <p:cNvGrpSpPr/>
+        <p:nvPr/>
+      </p:nvGrpSpPr>
+      <p:grpSpPr>
+        <a:xfrm>
+          <a:off x="0" y="0"/>
+          <a:ext cx="0" cy="0"/>
+          <a:chOff x="0" y="0"/>
+          <a:chExt cx="0" cy="0"/>
+        </a:xfrm>
+      </p:grpSpPr>
+      <p:sp>
+        <p:nvSpPr>
+          <p:cNvPr id="2" name="Title 1"/>
+          <p:cNvSpPr>
+            <a:spLocks noGrp="1"/>
+          </p:cNvSpPr>
+          <p:nvPr>
+            <p:ph type="title"/>
+          </p:nvPr>
+        </p:nvSpPr>
+        <p:spPr/>
+        <p:txBody>
+          <a:bodyPr/>
+          <a:lstStyle/>
+          <a:p>
+            <a:r>
+              <a:rPr lang="en-US" dirty="0" smtClean="0"/>
+              <a:t>Training </a:t>
+            </a:r>
+            <a:r>
+              <a:rPr lang="en-US" dirty="0"/>
+              <a:t>Bandit LinUCB</a:t>
+            </a:r>
+            <a:endParaRPr lang="en-US" dirty="0"/>
+          </a:p>
+        </p:txBody>
+      </p:sp>
+      <p:sp>
+        <p:nvSpPr>
+          <p:cNvPr id="6" name="Rectangle 2"/>
+          <p:cNvSpPr>
+            <a:spLocks noGrp="1" noChangeArrowheads="1"/>
+          </p:cNvSpPr>
+          <p:nvPr>
+            <p:ph idx="1"/>
+          </p:nvPr>
+        </p:nvSpPr>
+        <p:spPr bwMode="auto">
+          <a:xfrm>
+            <a:off x="838200" y="2078206"/>
+            <a:ext cx="4595446" cy="3846181"/>
+          </a:xfrm>
+          <a:prstGeom prst="rect">
+            <a:avLst/>
+          </a:prstGeom>
+          <a:noFill/>
+          <a:ln>
+            <a:noFill/>
+          </a:ln>
+          <a:effectLst/>
+          <a:extLst>
+            <a:ext uri="{909E8E84-426E-40DD-AFC4-6F175D3DCCD1}">
+              <a14:hiddenFill xmlns:a14="http://schemas.microsoft.com/office/drawing/2010/main">
+                <a:solidFill>
+                  <a:schemeClr val="accent1"/>
+                </a:solidFill>
+              </a14:hiddenFill>
+            </a:ext>
+            <a:ext uri="{91240B29-F687-4F45-9708-019B960494DF}">
+              <a14:hiddenLine xmlns:a14="http://schemas.microsoft.com/office/drawing/2010/main" w="9525">
+                <a:solidFill>
+                  <a:schemeClr val="tx1"/>
+                </a:solidFill>
+                <a:miter lim="800000"/>
+                <a:headEnd/>
+                <a:tailEnd/>
+              </a14:hiddenLine>
+            </a:ext>
+            <a:ext uri="{AF507438-7753-43E0-B8FC-AC1667EBCBE1}">
+              <a14:hiddenEffects xmlns:a14="http://schemas.microsoft.com/office/drawing/2010/main">
+                <a:effectLst>
+                  <a:outerShdw dist="35921" dir="2700000" algn="ctr" rotWithShape="0">
+                    <a:schemeClr val="bg2"/>
+                  </a:outerShdw>
+                </a:effectLst>
+              </a14:hiddenEffects>
+            </a:ext>
+          </a:extLst>
+        </p:spPr>
+        <p:txBody>
+          <a:bodyPr vert="horz" wrap="square" lIns="91440" tIns="45720" rIns="91440" bIns="45720" numCol="1" anchor="ctr" anchorCtr="0" compatLnSpc="1">
+            <a:prstTxWarp prst="textNoShape">
+              <a:avLst/>
+            </a:prstTxWarp>
+            <a:spAutoFit/>
+          </a:bodyPr>
+          <a:lstStyle/>
+          <a:p>
+            <a:r>
+              <a:rPr lang="vi-VN" sz="1800" dirty="0"/>
+              <a:t>Agent LinDiagUCB với context 260 chiều </a:t>
+            </a:r>
+            <a:r>
+              <a:rPr lang="vi-VN" sz="1800" b="1" dirty="0"/>
+              <a:t>không hội tụ</a:t>
+            </a:r>
+            <a:r>
+              <a:rPr lang="vi-VN" sz="1800" dirty="0"/>
+              <a:t>, equity giảm mạnh về cuối train.</a:t>
+            </a:r>
+          </a:p>
+          <a:p>
+            <a:r>
+              <a:rPr lang="vi-VN" sz="1800" dirty="0"/>
+              <a:t>Sharpe âm liên tục và </a:t>
+            </a:r>
+            <a:r>
+              <a:rPr lang="vi-VN" sz="1800" b="1" dirty="0"/>
+              <a:t>max drawdown ~99%</a:t>
+            </a:r>
+            <a:r>
+              <a:rPr lang="vi-VN" sz="1800" dirty="0"/>
+              <a:t>, cho thấy policy học được không ổn định.</a:t>
+            </a:r>
+          </a:p>
+          <a:p>
+            <a:r>
+              <a:rPr lang="vi-VN" sz="1800" dirty="0"/>
+              <a:t>Action distribution bị </a:t>
+            </a:r>
+            <a:r>
+              <a:rPr lang="vi-VN" sz="1800" b="1" dirty="0"/>
+              <a:t>lệch mạnh về SHORT</a:t>
+            </a:r>
+            <a:r>
+              <a:rPr lang="vi-VN" sz="1800" dirty="0"/>
+              <a:t>, gần như không sử dụng FLAT.</a:t>
+            </a:r>
+          </a:p>
+          <a:p>
+            <a:r>
+              <a:rPr lang="vi-VN" sz="1800" dirty="0"/>
+              <a:t>Gamma cao khiến agent </a:t>
+            </a:r>
+            <a:r>
+              <a:rPr lang="vi-VN" sz="1800" b="1" dirty="0"/>
+              <a:t>ghi nhớ bias sai quá lâu</a:t>
+            </a:r>
+            <a:r>
+              <a:rPr lang="vi-VN" sz="1800" dirty="0"/>
+              <a:t>, khó tự điều chỉnh.</a:t>
+            </a:r>
+          </a:p>
+          <a:p>
+            <a:r>
+              <a:rPr lang="vi-VN" sz="1800" dirty="0"/>
+              <a:t>Kết quả train phản ánh </a:t>
+            </a:r>
+            <a:r>
+              <a:rPr lang="vi-VN" sz="1800" b="1" dirty="0"/>
+              <a:t>giới hạn của bandit tuyến tính</a:t>
+            </a:r>
+            <a:r>
+              <a:rPr lang="vi-VN" sz="1800" dirty="0"/>
+              <a:t> khi dùng fusion embeddings + tech features.</a:t>
+            </a:r>
+          </a:p>
+        </p:txBody>
+      </p:sp>
+      <p:pic>
+        <p:nvPicPr>
+          <p:cNvPr id="4" name="Picture 3"/>
+          <p:cNvPicPr>
+            <a:picLocks noChangeAspect="1"/>
+          </p:cNvPicPr>
+          <p:nvPr/>
+        </p:nvPicPr>
+        <p:blipFill>
+          <a:blip r:embed="rId2"/>
+          <a:stretch>
+            <a:fillRect/>
+          </a:stretch>
+        </p:blipFill>
+        <p:spPr>
+          <a:xfrm>
+            <a:off x="6018491" y="1501724"/>
+            <a:ext cx="5587355" cy="4838934"/>
+          </a:xfrm>
+          <a:prstGeom prst="rect">
+            <a:avLst/>
+          </a:prstGeom>
+        </p:spPr>
+      </p:pic>
+    </p:spTree>
+    <p:extLst>
+      <p:ext uri="{BB962C8B-B14F-4D97-AF65-F5344CB8AC3E}">
+        <p14:creationId xmlns:p14="http://schemas.microsoft.com/office/powerpoint/2010/main" val="850647234"/>
+      </p:ext>
+    </p:extLst>
+  </p:cSld>
+  <p:clrMapOvr>
+    <a:masterClrMapping/>
+  </p:clrMapOvr>
+  <p:timing>
+    <p:tnLst>
+      <p:par>
+        <p:cTn id="1" dur="indefinite" restart="never" nodeType="tmRoot"/>
+      </p:par>
+    </p:tnLst>
+  </p:timing>
+</p:sld>
+</file>
+
+<file path=ppt/slides/slide18.xml><?xml version="1.0" encoding="utf-8"?>
+<p:sld xmlns:a="http://schemas.openxmlformats.org/drawingml/2006/main" xmlns:r="http://schemas.openxmlformats.org/officeDocument/2006/relationships" xmlns:p="http://schemas.openxmlformats.org/presentationml/2006/main">
+  <p:cSld>
+    <p:spTree>
+      <p:nvGrpSpPr>
+        <p:cNvPr id="1" name=""/>
+        <p:cNvGrpSpPr/>
+        <p:nvPr/>
+      </p:nvGrpSpPr>
+      <p:grpSpPr>
+        <a:xfrm>
+          <a:off x="0" y="0"/>
+          <a:ext cx="0" cy="0"/>
+          <a:chOff x="0" y="0"/>
+          <a:chExt cx="0" cy="0"/>
+        </a:xfrm>
+      </p:grpSpPr>
+      <p:sp>
+        <p:nvSpPr>
+          <p:cNvPr id="2" name="Title 1"/>
+          <p:cNvSpPr>
+            <a:spLocks noGrp="1"/>
+          </p:cNvSpPr>
+          <p:nvPr>
+            <p:ph type="title"/>
+          </p:nvPr>
+        </p:nvSpPr>
+        <p:spPr/>
+        <p:txBody>
+          <a:bodyPr/>
+          <a:lstStyle/>
+          <a:p>
+            <a:r>
+              <a:rPr lang="en-US" dirty="0" smtClean="0"/>
+              <a:t>Backtest - Finbert</a:t>
+            </a:r>
+            <a:endParaRPr lang="en-US" dirty="0"/>
+          </a:p>
+        </p:txBody>
+      </p:sp>
+      <p:sp>
+        <p:nvSpPr>
+          <p:cNvPr id="5" name="Rectangle 1"/>
+          <p:cNvSpPr>
+            <a:spLocks noGrp="1" noChangeArrowheads="1"/>
+          </p:cNvSpPr>
+          <p:nvPr>
+            <p:ph idx="1"/>
+          </p:nvPr>
+        </p:nvSpPr>
+        <p:spPr bwMode="auto">
+          <a:xfrm>
+            <a:off x="838199" y="1369805"/>
+            <a:ext cx="10108223" cy="5262979"/>
+          </a:xfrm>
+          <a:prstGeom prst="rect">
+            <a:avLst/>
+          </a:prstGeom>
+          <a:noFill/>
+          <a:ln>
+            <a:noFill/>
+          </a:ln>
+          <a:effectLst/>
+          <a:extLst>
+            <a:ext uri="{909E8E84-426E-40DD-AFC4-6F175D3DCCD1}">
+              <a14:hiddenFill xmlns:a14="http://schemas.microsoft.com/office/drawing/2010/main">
+                <a:solidFill>
+                  <a:schemeClr val="accent1"/>
+                </a:solidFill>
+              </a14:hiddenFill>
+            </a:ext>
+            <a:ext uri="{91240B29-F687-4F45-9708-019B960494DF}">
+              <a14:hiddenLine xmlns:a14="http://schemas.microsoft.com/office/drawing/2010/main" w="9525">
+                <a:solidFill>
+                  <a:schemeClr val="tx1"/>
+                </a:solidFill>
+                <a:miter lim="800000"/>
+                <a:headEnd/>
+                <a:tailEnd/>
+              </a14:hiddenLine>
+            </a:ext>
+            <a:ext uri="{AF507438-7753-43E0-B8FC-AC1667EBCBE1}">
+              <a14:hiddenEffects xmlns:a14="http://schemas.microsoft.com/office/drawing/2010/main">
+                <a:effectLst>
+                  <a:outerShdw dist="35921" dir="2700000" algn="ctr" rotWithShape="0">
+                    <a:schemeClr val="bg2"/>
+                  </a:outerShdw>
+                </a:effectLst>
+              </a14:hiddenEffects>
+            </a:ext>
+          </a:extLst>
+        </p:spPr>
+        <p:txBody>
+          <a:bodyPr vert="horz" wrap="square" lIns="91440" tIns="45720" rIns="91440" bIns="45720" numCol="1" anchor="ctr" anchorCtr="0" compatLnSpc="1">
+            <a:prstTxWarp prst="textNoShape">
+              <a:avLst/>
+            </a:prstTxWarp>
+            <a:spAutoFit/>
+          </a:bodyPr>
+          <a:lstStyle/>
+          <a:p>
+            <a:pPr marL="0" marR="0" lvl="0" indent="0" algn="l" defTabSz="914400" rtl="0" eaLnBrk="0" fontAlgn="base" latinLnBrk="0" hangingPunct="0">
+              <a:lnSpc>
+                <a:spcPct val="100000"/>
+              </a:lnSpc>
+              <a:spcBef>
+                <a:spcPct val="0"/>
+              </a:spcBef>
+              <a:spcAft>
+                <a:spcPct val="0"/>
+              </a:spcAft>
+              <a:buClrTx/>
+              <a:buSzTx/>
+              <a:buFontTx/>
+              <a:buChar char="•"/>
+              <a:tabLst/>
+            </a:pPr>
+            <a:r>
+              <a:rPr kumimoji="0" lang="en-US" altLang="en-US" b="0" i="0" u="none" strike="noStrike" cap="none" normalizeH="0" baseline="0" dirty="0" smtClean="0">
+                <a:ln>
+                  <a:noFill/>
+                </a:ln>
+                <a:solidFill>
+                  <a:schemeClr val="tx1"/>
+                </a:solidFill>
+                <a:effectLst/>
+                <a:latin typeface="Arial" panose="020B0604020202020204" pitchFamily="34" charset="0"/>
+              </a:rPr>
+              <a:t>Sử dụng </a:t>
+            </a:r>
+            <a:r>
+              <a:rPr kumimoji="0" lang="en-US" altLang="en-US" b="1" i="0" u="none" strike="noStrike" cap="none" normalizeH="0" baseline="0" dirty="0" smtClean="0">
+                <a:ln>
+                  <a:noFill/>
+                </a:ln>
+                <a:solidFill>
+                  <a:schemeClr val="tx1"/>
+                </a:solidFill>
+                <a:effectLst/>
+                <a:latin typeface="Arial" panose="020B0604020202020204" pitchFamily="34" charset="0"/>
+              </a:rPr>
+              <a:t>FinBERT đã fine-tune</a:t>
+            </a:r>
+            <a:r>
+              <a:rPr kumimoji="0" lang="en-US" altLang="en-US" b="0" i="0" u="none" strike="noStrike" cap="none" normalizeH="0" baseline="0" dirty="0" smtClean="0">
+                <a:ln>
+                  <a:noFill/>
+                </a:ln>
+                <a:solidFill>
+                  <a:schemeClr val="tx1"/>
+                </a:solidFill>
+                <a:effectLst/>
+                <a:latin typeface="Arial" panose="020B0604020202020204" pitchFamily="34" charset="0"/>
+              </a:rPr>
+              <a:t> để trích xuất sentiment từ tiêu đề tin tức trong từng giai đoạn backtest.</a:t>
+            </a:r>
+          </a:p>
+          <a:p>
+            <a:pPr marL="0" marR="0" lvl="0" indent="0" algn="l" defTabSz="914400" rtl="0" eaLnBrk="0" fontAlgn="base" latinLnBrk="0" hangingPunct="0">
+              <a:lnSpc>
+                <a:spcPct val="100000"/>
+              </a:lnSpc>
+              <a:spcBef>
+                <a:spcPct val="0"/>
+              </a:spcBef>
+              <a:spcAft>
+                <a:spcPct val="0"/>
+              </a:spcAft>
+              <a:buClrTx/>
+              <a:buSzTx/>
+              <a:buFontTx/>
+              <a:buChar char="•"/>
+              <a:tabLst/>
+            </a:pPr>
+            <a:r>
+              <a:rPr kumimoji="0" lang="en-US" altLang="en-US" b="0" i="0" u="none" strike="noStrike" cap="none" normalizeH="0" baseline="0" dirty="0" smtClean="0">
+                <a:ln>
+                  <a:noFill/>
+                </a:ln>
+                <a:solidFill>
+                  <a:schemeClr val="tx1"/>
+                </a:solidFill>
+                <a:effectLst/>
+                <a:latin typeface="Arial" panose="020B0604020202020204" pitchFamily="34" charset="0"/>
+              </a:rPr>
+              <a:t>Thực hiện </a:t>
+            </a:r>
+            <a:r>
+              <a:rPr kumimoji="0" lang="en-US" altLang="en-US" b="1" i="0" u="none" strike="noStrike" cap="none" normalizeH="0" baseline="0" dirty="0" smtClean="0">
+                <a:ln>
+                  <a:noFill/>
+                </a:ln>
+                <a:solidFill>
+                  <a:schemeClr val="tx1"/>
+                </a:solidFill>
+                <a:effectLst/>
+                <a:latin typeface="Arial" panose="020B0604020202020204" pitchFamily="34" charset="0"/>
+              </a:rPr>
+              <a:t>inference thuần (no fine-tuning)</a:t>
+            </a:r>
+            <a:r>
+              <a:rPr kumimoji="0" lang="en-US" altLang="en-US" b="0" i="0" u="none" strike="noStrike" cap="none" normalizeH="0" baseline="0" dirty="0" smtClean="0">
+                <a:ln>
+                  <a:noFill/>
+                </a:ln>
+                <a:solidFill>
+                  <a:schemeClr val="tx1"/>
+                </a:solidFill>
+                <a:effectLst/>
+                <a:latin typeface="Arial" panose="020B0604020202020204" pitchFamily="34" charset="0"/>
+              </a:rPr>
+              <a:t> nhằm tránh information leakage.</a:t>
+            </a:r>
+          </a:p>
+          <a:p>
+            <a:pPr marL="0" marR="0" lvl="0" indent="0" algn="l" defTabSz="914400" rtl="0" eaLnBrk="0" fontAlgn="base" latinLnBrk="0" hangingPunct="0">
+              <a:lnSpc>
+                <a:spcPct val="100000"/>
+              </a:lnSpc>
+              <a:spcBef>
+                <a:spcPct val="0"/>
+              </a:spcBef>
+              <a:spcAft>
+                <a:spcPct val="0"/>
+              </a:spcAft>
+              <a:buClrTx/>
+              <a:buSzTx/>
+              <a:buFontTx/>
+              <a:buChar char="•"/>
+              <a:tabLst/>
+            </a:pPr>
+            <a:r>
+              <a:rPr kumimoji="0" lang="en-US" altLang="en-US" b="0" i="0" u="none" strike="noStrike" cap="none" normalizeH="0" baseline="0" dirty="0" smtClean="0">
+                <a:ln>
+                  <a:noFill/>
+                </a:ln>
+                <a:solidFill>
+                  <a:schemeClr val="tx1"/>
+                </a:solidFill>
+                <a:effectLst/>
+                <a:latin typeface="Arial" panose="020B0604020202020204" pitchFamily="34" charset="0"/>
+              </a:rPr>
+              <a:t>Tổng hợp sentiment theo </a:t>
+            </a:r>
+            <a:r>
+              <a:rPr kumimoji="0" lang="en-US" altLang="en-US" b="1" i="0" u="none" strike="noStrike" cap="none" normalizeH="0" baseline="0" dirty="0" smtClean="0">
+                <a:ln>
+                  <a:noFill/>
+                </a:ln>
+                <a:solidFill>
+                  <a:schemeClr val="tx1"/>
+                </a:solidFill>
+                <a:effectLst/>
+                <a:latin typeface="Arial" panose="020B0604020202020204" pitchFamily="34" charset="0"/>
+              </a:rPr>
+              <a:t>trung bình ngày (daily mean)</a:t>
+            </a:r>
+            <a:r>
+              <a:rPr kumimoji="0" lang="en-US" altLang="en-US" b="0" i="0" u="none" strike="noStrike" cap="none" normalizeH="0" baseline="0" dirty="0" smtClean="0">
+                <a:ln>
+                  <a:noFill/>
+                </a:ln>
+                <a:solidFill>
+                  <a:schemeClr val="tx1"/>
+                </a:solidFill>
+                <a:effectLst/>
+                <a:latin typeface="Arial" panose="020B0604020202020204" pitchFamily="34" charset="0"/>
+              </a:rPr>
+              <a:t> để giảm nhiễu tin tức ngắn hạn.</a:t>
+            </a:r>
+          </a:p>
+          <a:p>
+            <a:pPr marL="0" marR="0" lvl="0" indent="0" algn="l" defTabSz="914400" rtl="0" eaLnBrk="0" fontAlgn="base" latinLnBrk="0" hangingPunct="0">
+              <a:lnSpc>
+                <a:spcPct val="100000"/>
+              </a:lnSpc>
+              <a:spcBef>
+                <a:spcPct val="0"/>
+              </a:spcBef>
+              <a:spcAft>
+                <a:spcPct val="0"/>
+              </a:spcAft>
+              <a:buClrTx/>
+              <a:buSzTx/>
+              <a:buFontTx/>
+              <a:buChar char="•"/>
+              <a:tabLst/>
+            </a:pPr>
+            <a:r>
+              <a:rPr kumimoji="0" lang="en-US" altLang="en-US" b="0" i="0" u="none" strike="noStrike" cap="none" normalizeH="0" baseline="0" dirty="0" smtClean="0">
+                <a:ln>
+                  <a:noFill/>
+                </a:ln>
+                <a:solidFill>
+                  <a:schemeClr val="tx1"/>
+                </a:solidFill>
+                <a:effectLst/>
+                <a:latin typeface="Arial" panose="020B0604020202020204" pitchFamily="34" charset="0"/>
+              </a:rPr>
+              <a:t>Ánh xạ sentiment sang chuỗi OHLCV bằng </a:t>
+            </a:r>
+            <a:r>
+              <a:rPr kumimoji="0" lang="en-US" altLang="en-US" b="1" i="0" u="none" strike="noStrike" cap="none" normalizeH="0" baseline="0" dirty="0" smtClean="0">
+                <a:ln>
+                  <a:noFill/>
+                </a:ln>
+                <a:solidFill>
+                  <a:schemeClr val="tx1"/>
+                </a:solidFill>
+                <a:effectLst/>
+                <a:latin typeface="Arial" panose="020B0604020202020204" pitchFamily="34" charset="0"/>
+              </a:rPr>
+              <a:t>forward-fill</a:t>
+            </a:r>
+            <a:r>
+              <a:rPr kumimoji="0" lang="en-US" altLang="en-US" b="0" i="0" u="none" strike="noStrike" cap="none" normalizeH="0" baseline="0" dirty="0" smtClean="0">
+                <a:ln>
+                  <a:noFill/>
+                </a:ln>
+                <a:solidFill>
+                  <a:schemeClr val="tx1"/>
+                </a:solidFill>
+                <a:effectLst/>
+                <a:latin typeface="Arial" panose="020B0604020202020204" pitchFamily="34" charset="0"/>
+              </a:rPr>
+              <a:t>, đảm bảo không dùng dữ liệu tương lai.</a:t>
+            </a:r>
+          </a:p>
+          <a:p>
+            <a:pPr marL="0" marR="0" lvl="0" indent="0" algn="l" defTabSz="914400" rtl="0" eaLnBrk="0" fontAlgn="base" latinLnBrk="0" hangingPunct="0">
+              <a:lnSpc>
+                <a:spcPct val="100000"/>
+              </a:lnSpc>
+              <a:spcBef>
+                <a:spcPct val="0"/>
+              </a:spcBef>
+              <a:spcAft>
+                <a:spcPct val="0"/>
+              </a:spcAft>
+              <a:buClrTx/>
+              <a:buSzTx/>
+              <a:buFontTx/>
+              <a:buChar char="•"/>
+              <a:tabLst/>
+            </a:pPr>
+            <a:r>
+              <a:rPr kumimoji="0" lang="en-US" altLang="en-US" b="0" i="0" u="none" strike="noStrike" cap="none" normalizeH="0" baseline="0" dirty="0" smtClean="0">
+                <a:ln>
+                  <a:noFill/>
+                </a:ln>
+                <a:solidFill>
+                  <a:schemeClr val="tx1"/>
+                </a:solidFill>
+                <a:effectLst/>
+                <a:latin typeface="Arial" panose="020B0604020202020204" pitchFamily="34" charset="0"/>
+              </a:rPr>
+              <a:t>Cắt bỏ </a:t>
+            </a:r>
+            <a:r>
+              <a:rPr kumimoji="0" lang="en-US" altLang="en-US" b="1" i="0" u="none" strike="noStrike" cap="none" normalizeH="0" baseline="0" dirty="0" smtClean="0">
+                <a:ln>
+                  <a:noFill/>
+                </a:ln>
+                <a:solidFill>
+                  <a:schemeClr val="tx1"/>
+                </a:solidFill>
+                <a:effectLst/>
+                <a:latin typeface="Arial" panose="020B0604020202020204" pitchFamily="34" charset="0"/>
+              </a:rPr>
+              <a:t>LOOKBACK ban đầu</a:t>
+            </a:r>
+            <a:r>
+              <a:rPr kumimoji="0" lang="en-US" altLang="en-US" b="0" i="0" u="none" strike="noStrike" cap="none" normalizeH="0" baseline="0" dirty="0" smtClean="0">
+                <a:ln>
+                  <a:noFill/>
+                </a:ln>
+                <a:solidFill>
+                  <a:schemeClr val="tx1"/>
+                </a:solidFill>
+                <a:effectLst/>
+                <a:latin typeface="Arial" panose="020B0604020202020204" pitchFamily="34" charset="0"/>
+              </a:rPr>
+              <a:t> để đồng bộ với pipeline backtest thời gian.</a:t>
+            </a:r>
+          </a:p>
+          <a:p>
+            <a:pPr marL="0" marR="0" lvl="0" indent="0" algn="l" defTabSz="914400" rtl="0" eaLnBrk="0" fontAlgn="base" latinLnBrk="0" hangingPunct="0">
+              <a:lnSpc>
+                <a:spcPct val="100000"/>
+              </a:lnSpc>
+              <a:spcBef>
+                <a:spcPct val="0"/>
+              </a:spcBef>
+              <a:spcAft>
+                <a:spcPct val="0"/>
+              </a:spcAft>
+              <a:buClrTx/>
+              <a:buSzTx/>
+              <a:buFontTx/>
+              <a:buChar char="•"/>
+              <a:tabLst/>
+            </a:pPr>
+            <a:r>
+              <a:rPr kumimoji="0" lang="en-US" altLang="en-US" b="0" i="0" u="none" strike="noStrike" cap="none" normalizeH="0" baseline="0" dirty="0" smtClean="0">
+                <a:ln>
+                  <a:noFill/>
+                </a:ln>
+                <a:solidFill>
+                  <a:schemeClr val="tx1"/>
+                </a:solidFill>
+                <a:effectLst/>
+                <a:latin typeface="Arial" panose="020B0604020202020204" pitchFamily="34" charset="0"/>
+              </a:rPr>
+              <a:t>Sinh </a:t>
+            </a:r>
+            <a:r>
+              <a:rPr kumimoji="0" lang="en-US" altLang="en-US" b="1" i="0" u="none" strike="noStrike" cap="none" normalizeH="0" baseline="0" dirty="0" smtClean="0">
+                <a:ln>
+                  <a:noFill/>
+                </a:ln>
+                <a:solidFill>
+                  <a:schemeClr val="tx1"/>
+                </a:solidFill>
+                <a:effectLst/>
+                <a:latin typeface="Arial" panose="020B0604020202020204" pitchFamily="34" charset="0"/>
+              </a:rPr>
+              <a:t>sentiment embeddings theo từng backtest split</a:t>
+            </a:r>
+            <a:r>
+              <a:rPr kumimoji="0" lang="en-US" altLang="en-US" b="0" i="0" u="none" strike="noStrike" cap="none" normalizeH="0" baseline="0" dirty="0" smtClean="0">
+                <a:ln>
+                  <a:noFill/>
+                </a:ln>
+                <a:solidFill>
+                  <a:schemeClr val="tx1"/>
+                </a:solidFill>
+                <a:effectLst/>
+                <a:latin typeface="Arial" panose="020B0604020202020204" pitchFamily="34" charset="0"/>
+              </a:rPr>
+              <a:t>, dùng làm input cho mô hình giao dịch.</a:t>
+            </a:r>
+          </a:p>
+        </p:txBody>
+      </p:sp>
+    </p:spTree>
+    <p:extLst>
+      <p:ext uri="{BB962C8B-B14F-4D97-AF65-F5344CB8AC3E}">
+        <p14:creationId xmlns:p14="http://schemas.microsoft.com/office/powerpoint/2010/main" val="3690312878"/>
+      </p:ext>
+    </p:extLst>
+  </p:cSld>
+  <p:clrMapOvr>
+    <a:masterClrMapping/>
+  </p:clrMapOvr>
+  <p:timing>
+    <p:tnLst>
+      <p:par>
+        <p:cTn id="1" dur="indefinite" restart="never" nodeType="tmRoot"/>
+      </p:par>
+    </p:tnLst>
+  </p:timing>
+</p:sld>
+</file>
+
+<file path=ppt/slides/slide19.xml><?xml version="1.0" encoding="utf-8"?>
+<p:sld xmlns:a="http://schemas.openxmlformats.org/drawingml/2006/main" xmlns:r="http://schemas.openxmlformats.org/officeDocument/2006/relationships" xmlns:p="http://schemas.openxmlformats.org/presentationml/2006/main">
+  <p:cSld>
+    <p:spTree>
+      <p:nvGrpSpPr>
+        <p:cNvPr id="1" name=""/>
+        <p:cNvGrpSpPr/>
+        <p:nvPr/>
+      </p:nvGrpSpPr>
+      <p:grpSpPr>
+        <a:xfrm>
+          <a:off x="0" y="0"/>
+          <a:ext cx="0" cy="0"/>
+          <a:chOff x="0" y="0"/>
+          <a:chExt cx="0" cy="0"/>
+        </a:xfrm>
+      </p:grpSpPr>
+      <p:sp>
+        <p:nvSpPr>
+          <p:cNvPr id="2" name="Title 1"/>
+          <p:cNvSpPr>
+            <a:spLocks noGrp="1"/>
+          </p:cNvSpPr>
+          <p:nvPr>
+            <p:ph type="title"/>
+          </p:nvPr>
+        </p:nvSpPr>
+        <p:spPr/>
+        <p:txBody>
+          <a:bodyPr/>
+          <a:lstStyle/>
+          <a:p>
+            <a:r>
+              <a:rPr lang="en-US" dirty="0" smtClean="0"/>
+              <a:t>Backtest - Finbert</a:t>
+            </a:r>
+            <a:endParaRPr lang="en-US" dirty="0"/>
+          </a:p>
+        </p:txBody>
+      </p:sp>
+      <p:sp>
+        <p:nvSpPr>
+          <p:cNvPr id="5" name="Rectangle 1"/>
+          <p:cNvSpPr>
+            <a:spLocks noGrp="1" noChangeArrowheads="1"/>
+          </p:cNvSpPr>
+          <p:nvPr>
+            <p:ph idx="1"/>
+          </p:nvPr>
+        </p:nvSpPr>
+        <p:spPr bwMode="auto">
+          <a:xfrm>
+            <a:off x="838199" y="1369805"/>
+            <a:ext cx="10108223" cy="5262979"/>
+          </a:xfrm>
+          <a:prstGeom prst="rect">
+            <a:avLst/>
+          </a:prstGeom>
+          <a:noFill/>
+          <a:ln>
+            <a:noFill/>
+          </a:ln>
+          <a:effectLst/>
+          <a:extLst>
+            <a:ext uri="{909E8E84-426E-40DD-AFC4-6F175D3DCCD1}">
+              <a14:hiddenFill xmlns:a14="http://schemas.microsoft.com/office/drawing/2010/main">
+                <a:solidFill>
+                  <a:schemeClr val="accent1"/>
+                </a:solidFill>
+              </a14:hiddenFill>
+            </a:ext>
+            <a:ext uri="{91240B29-F687-4F45-9708-019B960494DF}">
+              <a14:hiddenLine xmlns:a14="http://schemas.microsoft.com/office/drawing/2010/main" w="9525">
+                <a:solidFill>
+                  <a:schemeClr val="tx1"/>
+                </a:solidFill>
+                <a:miter lim="800000"/>
+                <a:headEnd/>
+                <a:tailEnd/>
+              </a14:hiddenLine>
+            </a:ext>
+            <a:ext uri="{AF507438-7753-43E0-B8FC-AC1667EBCBE1}">
+              <a14:hiddenEffects xmlns:a14="http://schemas.microsoft.com/office/drawing/2010/main">
+                <a:effectLst>
+                  <a:outerShdw dist="35921" dir="2700000" algn="ctr" rotWithShape="0">
+                    <a:schemeClr val="bg2"/>
+                  </a:outerShdw>
+                </a:effectLst>
+              </a14:hiddenEffects>
+            </a:ext>
+          </a:extLst>
+        </p:spPr>
+        <p:txBody>
+          <a:bodyPr vert="horz" wrap="square" lIns="91440" tIns="45720" rIns="91440" bIns="45720" numCol="1" anchor="ctr" anchorCtr="0" compatLnSpc="1">
+            <a:prstTxWarp prst="textNoShape">
+              <a:avLst/>
+            </a:prstTxWarp>
+            <a:spAutoFit/>
+          </a:bodyPr>
+          <a:lstStyle/>
+          <a:p>
+            <a:pPr marL="0" marR="0" lvl="0" indent="0" algn="l" defTabSz="914400" rtl="0" eaLnBrk="0" fontAlgn="base" latinLnBrk="0" hangingPunct="0">
+              <a:lnSpc>
+                <a:spcPct val="100000"/>
+              </a:lnSpc>
+              <a:spcBef>
+                <a:spcPct val="0"/>
+              </a:spcBef>
+              <a:spcAft>
+                <a:spcPct val="0"/>
+              </a:spcAft>
+              <a:buClrTx/>
+              <a:buSzTx/>
+              <a:buFontTx/>
+              <a:buChar char="•"/>
+              <a:tabLst/>
+            </a:pPr>
+            <a:r>
+              <a:rPr kumimoji="0" lang="en-US" altLang="en-US" b="0" i="0" u="none" strike="noStrike" cap="none" normalizeH="0" baseline="0" dirty="0" smtClean="0">
+                <a:ln>
+                  <a:noFill/>
+                </a:ln>
+                <a:solidFill>
+                  <a:schemeClr val="tx1"/>
+                </a:solidFill>
+                <a:effectLst/>
+                <a:latin typeface="Arial" panose="020B0604020202020204" pitchFamily="34" charset="0"/>
+              </a:rPr>
+              <a:t>Sử dụng </a:t>
+            </a:r>
+            <a:r>
+              <a:rPr kumimoji="0" lang="en-US" altLang="en-US" b="1" i="0" u="none" strike="noStrike" cap="none" normalizeH="0" baseline="0" dirty="0" smtClean="0">
+                <a:ln>
+                  <a:noFill/>
+                </a:ln>
+                <a:solidFill>
+                  <a:schemeClr val="tx1"/>
+                </a:solidFill>
+                <a:effectLst/>
+                <a:latin typeface="Arial" panose="020B0604020202020204" pitchFamily="34" charset="0"/>
+              </a:rPr>
+              <a:t>FinBERT đã fine-tune</a:t>
+            </a:r>
+            <a:r>
+              <a:rPr kumimoji="0" lang="en-US" altLang="en-US" b="0" i="0" u="none" strike="noStrike" cap="none" normalizeH="0" baseline="0" dirty="0" smtClean="0">
+                <a:ln>
+                  <a:noFill/>
+                </a:ln>
+                <a:solidFill>
+                  <a:schemeClr val="tx1"/>
+                </a:solidFill>
+                <a:effectLst/>
+                <a:latin typeface="Arial" panose="020B0604020202020204" pitchFamily="34" charset="0"/>
+              </a:rPr>
+              <a:t> để trích xuất sentiment từ tiêu đề tin tức trong từng giai đoạn backtest.</a:t>
+            </a:r>
+          </a:p>
+          <a:p>
+            <a:pPr marL="0" marR="0" lvl="0" indent="0" algn="l" defTabSz="914400" rtl="0" eaLnBrk="0" fontAlgn="base" latinLnBrk="0" hangingPunct="0">
+              <a:lnSpc>
+                <a:spcPct val="100000"/>
+              </a:lnSpc>
+              <a:spcBef>
+                <a:spcPct val="0"/>
+              </a:spcBef>
+              <a:spcAft>
+                <a:spcPct val="0"/>
+              </a:spcAft>
+              <a:buClrTx/>
+              <a:buSzTx/>
+              <a:buFontTx/>
+              <a:buChar char="•"/>
+              <a:tabLst/>
+            </a:pPr>
+            <a:r>
+              <a:rPr kumimoji="0" lang="en-US" altLang="en-US" b="0" i="0" u="none" strike="noStrike" cap="none" normalizeH="0" baseline="0" dirty="0" smtClean="0">
+                <a:ln>
+                  <a:noFill/>
+                </a:ln>
+                <a:solidFill>
+                  <a:schemeClr val="tx1"/>
+                </a:solidFill>
+                <a:effectLst/>
+                <a:latin typeface="Arial" panose="020B0604020202020204" pitchFamily="34" charset="0"/>
+              </a:rPr>
+              <a:t>Thực hiện </a:t>
+            </a:r>
+            <a:r>
+              <a:rPr kumimoji="0" lang="en-US" altLang="en-US" b="1" i="0" u="none" strike="noStrike" cap="none" normalizeH="0" baseline="0" dirty="0" smtClean="0">
+                <a:ln>
+                  <a:noFill/>
+                </a:ln>
+                <a:solidFill>
+                  <a:schemeClr val="tx1"/>
+                </a:solidFill>
+                <a:effectLst/>
+                <a:latin typeface="Arial" panose="020B0604020202020204" pitchFamily="34" charset="0"/>
+              </a:rPr>
+              <a:t>inference thuần (no fine-tuning)</a:t>
+            </a:r>
+            <a:r>
+              <a:rPr kumimoji="0" lang="en-US" altLang="en-US" b="0" i="0" u="none" strike="noStrike" cap="none" normalizeH="0" baseline="0" dirty="0" smtClean="0">
+                <a:ln>
+                  <a:noFill/>
+                </a:ln>
+                <a:solidFill>
+                  <a:schemeClr val="tx1"/>
+                </a:solidFill>
+                <a:effectLst/>
+                <a:latin typeface="Arial" panose="020B0604020202020204" pitchFamily="34" charset="0"/>
+              </a:rPr>
+              <a:t> nhằm tránh information leakage.</a:t>
+            </a:r>
+          </a:p>
+          <a:p>
+            <a:pPr marL="0" marR="0" lvl="0" indent="0" algn="l" defTabSz="914400" rtl="0" eaLnBrk="0" fontAlgn="base" latinLnBrk="0" hangingPunct="0">
+              <a:lnSpc>
+                <a:spcPct val="100000"/>
+              </a:lnSpc>
+              <a:spcBef>
+                <a:spcPct val="0"/>
+              </a:spcBef>
+              <a:spcAft>
+                <a:spcPct val="0"/>
+              </a:spcAft>
+              <a:buClrTx/>
+              <a:buSzTx/>
+              <a:buFontTx/>
+              <a:buChar char="•"/>
+              <a:tabLst/>
+            </a:pPr>
+            <a:r>
+              <a:rPr kumimoji="0" lang="en-US" altLang="en-US" b="0" i="0" u="none" strike="noStrike" cap="none" normalizeH="0" baseline="0" dirty="0" smtClean="0">
+                <a:ln>
+                  <a:noFill/>
+                </a:ln>
+                <a:solidFill>
+                  <a:schemeClr val="tx1"/>
+                </a:solidFill>
+                <a:effectLst/>
+                <a:latin typeface="Arial" panose="020B0604020202020204" pitchFamily="34" charset="0"/>
+              </a:rPr>
+              <a:t>Tổng hợp sentiment theo </a:t>
+            </a:r>
+            <a:r>
+              <a:rPr kumimoji="0" lang="en-US" altLang="en-US" b="1" i="0" u="none" strike="noStrike" cap="none" normalizeH="0" baseline="0" dirty="0" smtClean="0">
+                <a:ln>
+                  <a:noFill/>
+                </a:ln>
+                <a:solidFill>
+                  <a:schemeClr val="tx1"/>
+                </a:solidFill>
+                <a:effectLst/>
+                <a:latin typeface="Arial" panose="020B0604020202020204" pitchFamily="34" charset="0"/>
+              </a:rPr>
+              <a:t>trung bình ngày (daily mean)</a:t>
+            </a:r>
+            <a:r>
+              <a:rPr kumimoji="0" lang="en-US" altLang="en-US" b="0" i="0" u="none" strike="noStrike" cap="none" normalizeH="0" baseline="0" dirty="0" smtClean="0">
+                <a:ln>
+                  <a:noFill/>
+                </a:ln>
+                <a:solidFill>
+                  <a:schemeClr val="tx1"/>
+                </a:solidFill>
+                <a:effectLst/>
+                <a:latin typeface="Arial" panose="020B0604020202020204" pitchFamily="34" charset="0"/>
+              </a:rPr>
+              <a:t> để giảm nhiễu tin tức ngắn hạn.</a:t>
+            </a:r>
+          </a:p>
+          <a:p>
+            <a:pPr marL="0" marR="0" lvl="0" indent="0" algn="l" defTabSz="914400" rtl="0" eaLnBrk="0" fontAlgn="base" latinLnBrk="0" hangingPunct="0">
+              <a:lnSpc>
+                <a:spcPct val="100000"/>
+              </a:lnSpc>
+              <a:spcBef>
+                <a:spcPct val="0"/>
+              </a:spcBef>
+              <a:spcAft>
+                <a:spcPct val="0"/>
+              </a:spcAft>
+              <a:buClrTx/>
+              <a:buSzTx/>
+              <a:buFontTx/>
+              <a:buChar char="•"/>
+              <a:tabLst/>
+            </a:pPr>
+            <a:r>
+              <a:rPr kumimoji="0" lang="en-US" altLang="en-US" b="0" i="0" u="none" strike="noStrike" cap="none" normalizeH="0" baseline="0" dirty="0" smtClean="0">
+                <a:ln>
+                  <a:noFill/>
+                </a:ln>
+                <a:solidFill>
+                  <a:schemeClr val="tx1"/>
+                </a:solidFill>
+                <a:effectLst/>
+                <a:latin typeface="Arial" panose="020B0604020202020204" pitchFamily="34" charset="0"/>
+              </a:rPr>
+              <a:t>Ánh xạ sentiment sang chuỗi OHLCV bằng </a:t>
+            </a:r>
+            <a:r>
+              <a:rPr kumimoji="0" lang="en-US" altLang="en-US" b="1" i="0" u="none" strike="noStrike" cap="none" normalizeH="0" baseline="0" dirty="0" smtClean="0">
+                <a:ln>
+                  <a:noFill/>
+                </a:ln>
+                <a:solidFill>
+                  <a:schemeClr val="tx1"/>
+                </a:solidFill>
+                <a:effectLst/>
+                <a:latin typeface="Arial" panose="020B0604020202020204" pitchFamily="34" charset="0"/>
+              </a:rPr>
+              <a:t>forward-fill</a:t>
+            </a:r>
+            <a:r>
+              <a:rPr kumimoji="0" lang="en-US" altLang="en-US" b="0" i="0" u="none" strike="noStrike" cap="none" normalizeH="0" baseline="0" dirty="0" smtClean="0">
+                <a:ln>
+                  <a:noFill/>
+                </a:ln>
+                <a:solidFill>
+                  <a:schemeClr val="tx1"/>
+                </a:solidFill>
+                <a:effectLst/>
+                <a:latin typeface="Arial" panose="020B0604020202020204" pitchFamily="34" charset="0"/>
+              </a:rPr>
+              <a:t>, đảm bảo không dùng dữ liệu tương lai.</a:t>
+            </a:r>
+          </a:p>
+          <a:p>
+            <a:pPr marL="0" marR="0" lvl="0" indent="0" algn="l" defTabSz="914400" rtl="0" eaLnBrk="0" fontAlgn="base" latinLnBrk="0" hangingPunct="0">
+              <a:lnSpc>
+                <a:spcPct val="100000"/>
+              </a:lnSpc>
+              <a:spcBef>
+                <a:spcPct val="0"/>
+              </a:spcBef>
+              <a:spcAft>
+                <a:spcPct val="0"/>
+              </a:spcAft>
+              <a:buClrTx/>
+              <a:buSzTx/>
+              <a:buFontTx/>
+              <a:buChar char="•"/>
+              <a:tabLst/>
+            </a:pPr>
+            <a:r>
+              <a:rPr kumimoji="0" lang="en-US" altLang="en-US" b="0" i="0" u="none" strike="noStrike" cap="none" normalizeH="0" baseline="0" dirty="0" smtClean="0">
+                <a:ln>
+                  <a:noFill/>
+                </a:ln>
+                <a:solidFill>
+                  <a:schemeClr val="tx1"/>
+                </a:solidFill>
+                <a:effectLst/>
+                <a:latin typeface="Arial" panose="020B0604020202020204" pitchFamily="34" charset="0"/>
+              </a:rPr>
+              <a:t>Cắt bỏ </a:t>
+            </a:r>
+            <a:r>
+              <a:rPr kumimoji="0" lang="en-US" altLang="en-US" b="1" i="0" u="none" strike="noStrike" cap="none" normalizeH="0" baseline="0" dirty="0" smtClean="0">
+                <a:ln>
+                  <a:noFill/>
+                </a:ln>
+                <a:solidFill>
+                  <a:schemeClr val="tx1"/>
+                </a:solidFill>
+                <a:effectLst/>
+                <a:latin typeface="Arial" panose="020B0604020202020204" pitchFamily="34" charset="0"/>
+              </a:rPr>
+              <a:t>LOOKBACK ban đầu</a:t>
+            </a:r>
+            <a:r>
+              <a:rPr kumimoji="0" lang="en-US" altLang="en-US" b="0" i="0" u="none" strike="noStrike" cap="none" normalizeH="0" baseline="0" dirty="0" smtClean="0">
+                <a:ln>
+                  <a:noFill/>
+                </a:ln>
+                <a:solidFill>
+                  <a:schemeClr val="tx1"/>
+                </a:solidFill>
+                <a:effectLst/>
+                <a:latin typeface="Arial" panose="020B0604020202020204" pitchFamily="34" charset="0"/>
+              </a:rPr>
+              <a:t> để đồng bộ với pipeline backtest thời gian.</a:t>
+            </a:r>
+          </a:p>
+          <a:p>
+            <a:pPr marL="0" marR="0" lvl="0" indent="0" algn="l" defTabSz="914400" rtl="0" eaLnBrk="0" fontAlgn="base" latinLnBrk="0" hangingPunct="0">
+              <a:lnSpc>
+                <a:spcPct val="100000"/>
+              </a:lnSpc>
+              <a:spcBef>
+                <a:spcPct val="0"/>
+              </a:spcBef>
+              <a:spcAft>
+                <a:spcPct val="0"/>
+              </a:spcAft>
+              <a:buClrTx/>
+              <a:buSzTx/>
+              <a:buFontTx/>
+              <a:buChar char="•"/>
+              <a:tabLst/>
+            </a:pPr>
+            <a:r>
+              <a:rPr kumimoji="0" lang="en-US" altLang="en-US" b="0" i="0" u="none" strike="noStrike" cap="none" normalizeH="0" baseline="0" dirty="0" smtClean="0">
+                <a:ln>
+                  <a:noFill/>
+                </a:ln>
+                <a:solidFill>
+                  <a:schemeClr val="tx1"/>
+                </a:solidFill>
+                <a:effectLst/>
+                <a:latin typeface="Arial" panose="020B0604020202020204" pitchFamily="34" charset="0"/>
+              </a:rPr>
+              <a:t>Sinh </a:t>
+            </a:r>
+            <a:r>
+              <a:rPr kumimoji="0" lang="en-US" altLang="en-US" b="1" i="0" u="none" strike="noStrike" cap="none" normalizeH="0" baseline="0" dirty="0" smtClean="0">
+                <a:ln>
+                  <a:noFill/>
+                </a:ln>
+                <a:solidFill>
+                  <a:schemeClr val="tx1"/>
+                </a:solidFill>
+                <a:effectLst/>
+                <a:latin typeface="Arial" panose="020B0604020202020204" pitchFamily="34" charset="0"/>
+              </a:rPr>
+              <a:t>sentiment embeddings theo từng backtest split</a:t>
+            </a:r>
+            <a:r>
+              <a:rPr kumimoji="0" lang="en-US" altLang="en-US" b="0" i="0" u="none" strike="noStrike" cap="none" normalizeH="0" baseline="0" dirty="0" smtClean="0">
+                <a:ln>
+                  <a:noFill/>
+                </a:ln>
+                <a:solidFill>
+                  <a:schemeClr val="tx1"/>
+                </a:solidFill>
+                <a:effectLst/>
+                <a:latin typeface="Arial" panose="020B0604020202020204" pitchFamily="34" charset="0"/>
+              </a:rPr>
+              <a:t>, dùng làm input cho mô hình giao dịch.</a:t>
+            </a:r>
+          </a:p>
+        </p:txBody>
+      </p:sp>
+    </p:spTree>
+    <p:extLst>
+      <p:ext uri="{BB962C8B-B14F-4D97-AF65-F5344CB8AC3E}">
+        <p14:creationId xmlns:p14="http://schemas.microsoft.com/office/powerpoint/2010/main" val="3077308553"/>
       </p:ext>
     </p:extLst>
   </p:cSld>
@@ -3529,6 +5831,3010 @@
 </p:sld>
 </file>
 
+<file path=ppt/slides/slide20.xml><?xml version="1.0" encoding="utf-8"?>
+<p:sld xmlns:a="http://schemas.openxmlformats.org/drawingml/2006/main" xmlns:r="http://schemas.openxmlformats.org/officeDocument/2006/relationships" xmlns:p="http://schemas.openxmlformats.org/presentationml/2006/main">
+  <p:cSld>
+    <p:spTree>
+      <p:nvGrpSpPr>
+        <p:cNvPr id="1" name=""/>
+        <p:cNvGrpSpPr/>
+        <p:nvPr/>
+      </p:nvGrpSpPr>
+      <p:grpSpPr>
+        <a:xfrm>
+          <a:off x="0" y="0"/>
+          <a:ext cx="0" cy="0"/>
+          <a:chOff x="0" y="0"/>
+          <a:chExt cx="0" cy="0"/>
+        </a:xfrm>
+      </p:grpSpPr>
+      <p:sp>
+        <p:nvSpPr>
+          <p:cNvPr id="2" name="Title 1"/>
+          <p:cNvSpPr>
+            <a:spLocks noGrp="1"/>
+          </p:cNvSpPr>
+          <p:nvPr>
+            <p:ph type="title"/>
+          </p:nvPr>
+        </p:nvSpPr>
+        <p:spPr/>
+        <p:txBody>
+          <a:bodyPr/>
+          <a:lstStyle/>
+          <a:p>
+            <a:r>
+              <a:rPr lang="en-US" dirty="0" smtClean="0"/>
+              <a:t>Backtest – att-cnn</a:t>
+            </a:r>
+            <a:endParaRPr lang="en-US" dirty="0"/>
+          </a:p>
+        </p:txBody>
+      </p:sp>
+      <p:sp>
+        <p:nvSpPr>
+          <p:cNvPr id="5" name="Rectangle 1"/>
+          <p:cNvSpPr>
+            <a:spLocks noGrp="1" noChangeArrowheads="1"/>
+          </p:cNvSpPr>
+          <p:nvPr>
+            <p:ph idx="1"/>
+          </p:nvPr>
+        </p:nvSpPr>
+        <p:spPr bwMode="auto">
+          <a:xfrm>
+            <a:off x="838199" y="1369805"/>
+            <a:ext cx="10108223" cy="5262979"/>
+          </a:xfrm>
+          <a:prstGeom prst="rect">
+            <a:avLst/>
+          </a:prstGeom>
+          <a:noFill/>
+          <a:ln>
+            <a:noFill/>
+          </a:ln>
+          <a:effectLst/>
+          <a:extLst>
+            <a:ext uri="{909E8E84-426E-40DD-AFC4-6F175D3DCCD1}">
+              <a14:hiddenFill xmlns:a14="http://schemas.microsoft.com/office/drawing/2010/main">
+                <a:solidFill>
+                  <a:schemeClr val="accent1"/>
+                </a:solidFill>
+              </a14:hiddenFill>
+            </a:ext>
+            <a:ext uri="{91240B29-F687-4F45-9708-019B960494DF}">
+              <a14:hiddenLine xmlns:a14="http://schemas.microsoft.com/office/drawing/2010/main" w="9525">
+                <a:solidFill>
+                  <a:schemeClr val="tx1"/>
+                </a:solidFill>
+                <a:miter lim="800000"/>
+                <a:headEnd/>
+                <a:tailEnd/>
+              </a14:hiddenLine>
+            </a:ext>
+            <a:ext uri="{AF507438-7753-43E0-B8FC-AC1667EBCBE1}">
+              <a14:hiddenEffects xmlns:a14="http://schemas.microsoft.com/office/drawing/2010/main">
+                <a:effectLst>
+                  <a:outerShdw dist="35921" dir="2700000" algn="ctr" rotWithShape="0">
+                    <a:schemeClr val="bg2"/>
+                  </a:outerShdw>
+                </a:effectLst>
+              </a14:hiddenEffects>
+            </a:ext>
+          </a:extLst>
+        </p:spPr>
+        <p:txBody>
+          <a:bodyPr vert="horz" wrap="square" lIns="91440" tIns="45720" rIns="91440" bIns="45720" numCol="1" anchor="ctr" anchorCtr="0" compatLnSpc="1">
+            <a:prstTxWarp prst="textNoShape">
+              <a:avLst/>
+            </a:prstTxWarp>
+            <a:spAutoFit/>
+          </a:bodyPr>
+          <a:lstStyle/>
+          <a:p>
+            <a:pPr marL="0" lvl="0" indent="0" eaLnBrk="0" fontAlgn="base" hangingPunct="0">
+              <a:lnSpc>
+                <a:spcPct val="100000"/>
+              </a:lnSpc>
+              <a:spcBef>
+                <a:spcPct val="0"/>
+              </a:spcBef>
+              <a:spcAft>
+                <a:spcPct val="0"/>
+              </a:spcAft>
+              <a:buFontTx/>
+              <a:buChar char="•"/>
+            </a:pPr>
+            <a:r>
+              <a:rPr lang="en-US" altLang="en-US" dirty="0">
+                <a:latin typeface="Arial" panose="020B0604020202020204" pitchFamily="34" charset="0"/>
+              </a:rPr>
+              <a:t>Sử dụng </a:t>
+            </a:r>
+            <a:r>
+              <a:rPr lang="en-US" altLang="en-US" b="1" dirty="0">
+                <a:latin typeface="Arial" panose="020B0604020202020204" pitchFamily="34" charset="0"/>
+              </a:rPr>
+              <a:t>ATT-CNN-LSTM v3 đã train trước</a:t>
+            </a:r>
+            <a:r>
+              <a:rPr lang="en-US" altLang="en-US" dirty="0">
+                <a:latin typeface="Arial" panose="020B0604020202020204" pitchFamily="34" charset="0"/>
+              </a:rPr>
+              <a:t>, chỉ chạy </a:t>
+            </a:r>
+            <a:r>
+              <a:rPr lang="en-US" altLang="en-US" b="1" dirty="0">
+                <a:latin typeface="Arial" panose="020B0604020202020204" pitchFamily="34" charset="0"/>
+              </a:rPr>
+              <a:t>inference</a:t>
+            </a:r>
+            <a:r>
+              <a:rPr lang="en-US" altLang="en-US" dirty="0">
+                <a:latin typeface="Arial" panose="020B0604020202020204" pitchFamily="34" charset="0"/>
+              </a:rPr>
+              <a:t> trong giai đoạn backtest.</a:t>
+            </a:r>
+          </a:p>
+          <a:p>
+            <a:pPr marL="0" lvl="0" indent="0" eaLnBrk="0" fontAlgn="base" hangingPunct="0">
+              <a:lnSpc>
+                <a:spcPct val="100000"/>
+              </a:lnSpc>
+              <a:spcBef>
+                <a:spcPct val="0"/>
+              </a:spcBef>
+              <a:spcAft>
+                <a:spcPct val="0"/>
+              </a:spcAft>
+              <a:buFontTx/>
+              <a:buChar char="•"/>
+            </a:pPr>
+            <a:r>
+              <a:rPr lang="en-US" altLang="en-US" dirty="0">
+                <a:latin typeface="Arial" panose="020B0604020202020204" pitchFamily="34" charset="0"/>
+              </a:rPr>
+              <a:t>Chuỗi OHLCV + indicators được tạo theo </a:t>
+            </a:r>
+            <a:r>
+              <a:rPr lang="en-US" altLang="en-US" b="1" dirty="0">
+                <a:latin typeface="Arial" panose="020B0604020202020204" pitchFamily="34" charset="0"/>
+              </a:rPr>
+              <a:t>cửa sổ LOOKBACK = 60</a:t>
+            </a:r>
+            <a:r>
+              <a:rPr lang="en-US" altLang="en-US" dirty="0">
+                <a:latin typeface="Arial" panose="020B0604020202020204" pitchFamily="34" charset="0"/>
+              </a:rPr>
+              <a:t>, phản ánh động lực ngắn–trung hạn.</a:t>
+            </a:r>
+          </a:p>
+          <a:p>
+            <a:pPr marL="0" lvl="0" indent="0" eaLnBrk="0" fontAlgn="base" hangingPunct="0">
+              <a:lnSpc>
+                <a:spcPct val="100000"/>
+              </a:lnSpc>
+              <a:spcBef>
+                <a:spcPct val="0"/>
+              </a:spcBef>
+              <a:spcAft>
+                <a:spcPct val="0"/>
+              </a:spcAft>
+              <a:buFontTx/>
+              <a:buChar char="•"/>
+            </a:pPr>
+            <a:r>
+              <a:rPr lang="en-US" altLang="en-US" dirty="0">
+                <a:latin typeface="Arial" panose="020B0604020202020204" pitchFamily="34" charset="0"/>
+              </a:rPr>
+              <a:t>CNN trích xuất </a:t>
+            </a:r>
+            <a:r>
+              <a:rPr lang="en-US" altLang="en-US" b="1" dirty="0">
+                <a:latin typeface="Arial" panose="020B0604020202020204" pitchFamily="34" charset="0"/>
+              </a:rPr>
+              <a:t>local temporal patterns</a:t>
+            </a:r>
+            <a:r>
+              <a:rPr lang="en-US" altLang="en-US" dirty="0">
+                <a:latin typeface="Arial" panose="020B0604020202020204" pitchFamily="34" charset="0"/>
+              </a:rPr>
+              <a:t>, Attention nhấn mạnh các thời điểm quan trọng.</a:t>
+            </a:r>
+          </a:p>
+          <a:p>
+            <a:pPr marL="0" lvl="0" indent="0" eaLnBrk="0" fontAlgn="base" hangingPunct="0">
+              <a:lnSpc>
+                <a:spcPct val="100000"/>
+              </a:lnSpc>
+              <a:spcBef>
+                <a:spcPct val="0"/>
+              </a:spcBef>
+              <a:spcAft>
+                <a:spcPct val="0"/>
+              </a:spcAft>
+              <a:buFontTx/>
+              <a:buChar char="•"/>
+            </a:pPr>
+            <a:r>
+              <a:rPr lang="en-US" altLang="en-US" dirty="0">
+                <a:latin typeface="Arial" panose="020B0604020202020204" pitchFamily="34" charset="0"/>
+              </a:rPr>
+              <a:t>LSTM mã hoá </a:t>
+            </a:r>
+            <a:r>
+              <a:rPr lang="en-US" altLang="en-US" b="1" dirty="0">
+                <a:latin typeface="Arial" panose="020B0604020202020204" pitchFamily="34" charset="0"/>
+              </a:rPr>
+              <a:t>quan hệ thời gian dài hạn</a:t>
+            </a:r>
+            <a:r>
+              <a:rPr lang="en-US" altLang="en-US" dirty="0">
+                <a:latin typeface="Arial" panose="020B0604020202020204" pitchFamily="34" charset="0"/>
+              </a:rPr>
+              <a:t> thành vector embedding cố định.</a:t>
+            </a:r>
+          </a:p>
+          <a:p>
+            <a:pPr marL="0" lvl="0" indent="0" eaLnBrk="0" fontAlgn="base" hangingPunct="0">
+              <a:lnSpc>
+                <a:spcPct val="100000"/>
+              </a:lnSpc>
+              <a:spcBef>
+                <a:spcPct val="0"/>
+              </a:spcBef>
+              <a:spcAft>
+                <a:spcPct val="0"/>
+              </a:spcAft>
+              <a:buFontTx/>
+              <a:buChar char="•"/>
+            </a:pPr>
+            <a:r>
+              <a:rPr lang="en-US" altLang="en-US" dirty="0">
+                <a:latin typeface="Arial" panose="020B0604020202020204" pitchFamily="34" charset="0"/>
+              </a:rPr>
+              <a:t>Embeddings được sinh </a:t>
+            </a:r>
+            <a:r>
+              <a:rPr lang="en-US" altLang="en-US" b="1" dirty="0">
+                <a:latin typeface="Arial" panose="020B0604020202020204" pitchFamily="34" charset="0"/>
+              </a:rPr>
+              <a:t>riêng cho từng backtest split</a:t>
+            </a:r>
+            <a:r>
+              <a:rPr lang="en-US" altLang="en-US" dirty="0">
+                <a:latin typeface="Arial" panose="020B0604020202020204" pitchFamily="34" charset="0"/>
+              </a:rPr>
+              <a:t>, không trộn dữ liệu giữa các giai đoạn.</a:t>
+            </a:r>
+          </a:p>
+          <a:p>
+            <a:pPr marL="0" lvl="0" indent="0" eaLnBrk="0" fontAlgn="base" hangingPunct="0">
+              <a:lnSpc>
+                <a:spcPct val="100000"/>
+              </a:lnSpc>
+              <a:spcBef>
+                <a:spcPct val="0"/>
+              </a:spcBef>
+              <a:spcAft>
+                <a:spcPct val="0"/>
+              </a:spcAft>
+              <a:buFontTx/>
+              <a:buChar char="•"/>
+            </a:pPr>
+            <a:r>
+              <a:rPr lang="en-US" altLang="en-US" dirty="0">
+                <a:latin typeface="Arial" panose="020B0604020202020204" pitchFamily="34" charset="0"/>
+              </a:rPr>
+              <a:t>Output embedding dùng làm </a:t>
+            </a:r>
+            <a:r>
+              <a:rPr lang="en-US" altLang="en-US" b="1" dirty="0">
+                <a:latin typeface="Arial" panose="020B0604020202020204" pitchFamily="34" charset="0"/>
+              </a:rPr>
+              <a:t>input cho tầng fusion / decision layer</a:t>
+            </a:r>
+            <a:r>
+              <a:rPr lang="en-US" altLang="en-US" dirty="0">
+                <a:latin typeface="Arial" panose="020B0604020202020204" pitchFamily="34" charset="0"/>
+              </a:rPr>
+              <a:t>, không trực tiếp sinh tín hiệu giao dịch.</a:t>
+            </a:r>
+          </a:p>
+        </p:txBody>
+      </p:sp>
+    </p:spTree>
+    <p:extLst>
+      <p:ext uri="{BB962C8B-B14F-4D97-AF65-F5344CB8AC3E}">
+        <p14:creationId xmlns:p14="http://schemas.microsoft.com/office/powerpoint/2010/main" val="222614460"/>
+      </p:ext>
+    </p:extLst>
+  </p:cSld>
+  <p:clrMapOvr>
+    <a:masterClrMapping/>
+  </p:clrMapOvr>
+  <p:timing>
+    <p:tnLst>
+      <p:par>
+        <p:cTn id="1" dur="indefinite" restart="never" nodeType="tmRoot"/>
+      </p:par>
+    </p:tnLst>
+  </p:timing>
+</p:sld>
+</file>
+
+<file path=ppt/slides/slide21.xml><?xml version="1.0" encoding="utf-8"?>
+<p:sld xmlns:a="http://schemas.openxmlformats.org/drawingml/2006/main" xmlns:r="http://schemas.openxmlformats.org/officeDocument/2006/relationships" xmlns:p="http://schemas.openxmlformats.org/presentationml/2006/main">
+  <p:cSld>
+    <p:spTree>
+      <p:nvGrpSpPr>
+        <p:cNvPr id="1" name=""/>
+        <p:cNvGrpSpPr/>
+        <p:nvPr/>
+      </p:nvGrpSpPr>
+      <p:grpSpPr>
+        <a:xfrm>
+          <a:off x="0" y="0"/>
+          <a:ext cx="0" cy="0"/>
+          <a:chOff x="0" y="0"/>
+          <a:chExt cx="0" cy="0"/>
+        </a:xfrm>
+      </p:grpSpPr>
+      <p:sp>
+        <p:nvSpPr>
+          <p:cNvPr id="2" name="Title 1"/>
+          <p:cNvSpPr>
+            <a:spLocks noGrp="1"/>
+          </p:cNvSpPr>
+          <p:nvPr>
+            <p:ph type="title"/>
+          </p:nvPr>
+        </p:nvSpPr>
+        <p:spPr/>
+        <p:txBody>
+          <a:bodyPr/>
+          <a:lstStyle/>
+          <a:p>
+            <a:r>
+              <a:rPr lang="en-US" dirty="0" smtClean="0"/>
+              <a:t>Backtest – transformer</a:t>
+            </a:r>
+            <a:endParaRPr lang="en-US" dirty="0"/>
+          </a:p>
+        </p:txBody>
+      </p:sp>
+      <p:sp>
+        <p:nvSpPr>
+          <p:cNvPr id="4" name="Rectangle 2"/>
+          <p:cNvSpPr>
+            <a:spLocks noGrp="1" noChangeArrowheads="1"/>
+          </p:cNvSpPr>
+          <p:nvPr>
+            <p:ph idx="1"/>
+          </p:nvPr>
+        </p:nvSpPr>
+        <p:spPr bwMode="auto">
+          <a:xfrm>
+            <a:off x="838201" y="1369805"/>
+            <a:ext cx="9467088" cy="5262979"/>
+          </a:xfrm>
+          <a:prstGeom prst="rect">
+            <a:avLst/>
+          </a:prstGeom>
+          <a:noFill/>
+          <a:ln>
+            <a:noFill/>
+          </a:ln>
+          <a:effectLst/>
+          <a:extLst>
+            <a:ext uri="{909E8E84-426E-40DD-AFC4-6F175D3DCCD1}">
+              <a14:hiddenFill xmlns:a14="http://schemas.microsoft.com/office/drawing/2010/main">
+                <a:solidFill>
+                  <a:schemeClr val="accent1"/>
+                </a:solidFill>
+              </a14:hiddenFill>
+            </a:ext>
+            <a:ext uri="{91240B29-F687-4F45-9708-019B960494DF}">
+              <a14:hiddenLine xmlns:a14="http://schemas.microsoft.com/office/drawing/2010/main" w="9525">
+                <a:solidFill>
+                  <a:schemeClr val="tx1"/>
+                </a:solidFill>
+                <a:miter lim="800000"/>
+                <a:headEnd/>
+                <a:tailEnd/>
+              </a14:hiddenLine>
+            </a:ext>
+            <a:ext uri="{AF507438-7753-43E0-B8FC-AC1667EBCBE1}">
+              <a14:hiddenEffects xmlns:a14="http://schemas.microsoft.com/office/drawing/2010/main">
+                <a:effectLst>
+                  <a:outerShdw dist="35921" dir="2700000" algn="ctr" rotWithShape="0">
+                    <a:schemeClr val="bg2"/>
+                  </a:outerShdw>
+                </a:effectLst>
+              </a14:hiddenEffects>
+            </a:ext>
+          </a:extLst>
+        </p:spPr>
+        <p:txBody>
+          <a:bodyPr vert="horz" wrap="square" lIns="91440" tIns="45720" rIns="91440" bIns="45720" numCol="1" anchor="ctr" anchorCtr="0" compatLnSpc="1">
+            <a:prstTxWarp prst="textNoShape">
+              <a:avLst/>
+            </a:prstTxWarp>
+            <a:spAutoFit/>
+          </a:bodyPr>
+          <a:lstStyle/>
+          <a:p>
+            <a:pPr marL="0" marR="0" lvl="0" indent="0" algn="l" defTabSz="914400" rtl="0" eaLnBrk="0" fontAlgn="base" latinLnBrk="0" hangingPunct="0">
+              <a:lnSpc>
+                <a:spcPct val="100000"/>
+              </a:lnSpc>
+              <a:spcBef>
+                <a:spcPct val="0"/>
+              </a:spcBef>
+              <a:spcAft>
+                <a:spcPct val="0"/>
+              </a:spcAft>
+              <a:buClrTx/>
+              <a:buSzTx/>
+              <a:buFontTx/>
+              <a:buChar char="•"/>
+              <a:tabLst/>
+            </a:pPr>
+            <a:r>
+              <a:rPr kumimoji="0" lang="en-US" altLang="en-US" b="0" i="0" u="none" strike="noStrike" cap="none" normalizeH="0" baseline="0" dirty="0" smtClean="0">
+                <a:ln>
+                  <a:noFill/>
+                </a:ln>
+                <a:solidFill>
+                  <a:schemeClr val="tx1"/>
+                </a:solidFill>
+                <a:effectLst/>
+                <a:latin typeface="Arial" panose="020B0604020202020204" pitchFamily="34" charset="0"/>
+              </a:rPr>
+              <a:t>Sử dụng </a:t>
+            </a:r>
+            <a:r>
+              <a:rPr kumimoji="0" lang="en-US" altLang="en-US" b="1" i="0" u="none" strike="noStrike" cap="none" normalizeH="0" baseline="0" dirty="0" smtClean="0">
+                <a:ln>
+                  <a:noFill/>
+                </a:ln>
+                <a:solidFill>
+                  <a:schemeClr val="tx1"/>
+                </a:solidFill>
+                <a:effectLst/>
+                <a:latin typeface="Arial" panose="020B0604020202020204" pitchFamily="34" charset="0"/>
+              </a:rPr>
+              <a:t>TimeSeries Transformer v3 đã huấn luyện</a:t>
+            </a:r>
+            <a:r>
+              <a:rPr kumimoji="0" lang="en-US" altLang="en-US" b="0" i="0" u="none" strike="noStrike" cap="none" normalizeH="0" baseline="0" dirty="0" smtClean="0">
+                <a:ln>
+                  <a:noFill/>
+                </a:ln>
+                <a:solidFill>
+                  <a:schemeClr val="tx1"/>
+                </a:solidFill>
+                <a:effectLst/>
+                <a:latin typeface="Arial" panose="020B0604020202020204" pitchFamily="34" charset="0"/>
+              </a:rPr>
+              <a:t>, chỉ chạy </a:t>
+            </a:r>
+            <a:r>
+              <a:rPr kumimoji="0" lang="en-US" altLang="en-US" b="1" i="0" u="none" strike="noStrike" cap="none" normalizeH="0" baseline="0" dirty="0" smtClean="0">
+                <a:ln>
+                  <a:noFill/>
+                </a:ln>
+                <a:solidFill>
+                  <a:schemeClr val="tx1"/>
+                </a:solidFill>
+                <a:effectLst/>
+                <a:latin typeface="Arial" panose="020B0604020202020204" pitchFamily="34" charset="0"/>
+              </a:rPr>
+              <a:t>inference</a:t>
+            </a:r>
+            <a:r>
+              <a:rPr kumimoji="0" lang="en-US" altLang="en-US" b="0" i="0" u="none" strike="noStrike" cap="none" normalizeH="0" baseline="0" dirty="0" smtClean="0">
+                <a:ln>
+                  <a:noFill/>
+                </a:ln>
+                <a:solidFill>
+                  <a:schemeClr val="tx1"/>
+                </a:solidFill>
+                <a:effectLst/>
+                <a:latin typeface="Arial" panose="020B0604020202020204" pitchFamily="34" charset="0"/>
+              </a:rPr>
+              <a:t> trong backtest.</a:t>
+            </a:r>
+          </a:p>
+          <a:p>
+            <a:pPr marL="0" marR="0" lvl="0" indent="0" algn="l" defTabSz="914400" rtl="0" eaLnBrk="0" fontAlgn="base" latinLnBrk="0" hangingPunct="0">
+              <a:lnSpc>
+                <a:spcPct val="100000"/>
+              </a:lnSpc>
+              <a:spcBef>
+                <a:spcPct val="0"/>
+              </a:spcBef>
+              <a:spcAft>
+                <a:spcPct val="0"/>
+              </a:spcAft>
+              <a:buClrTx/>
+              <a:buSzTx/>
+              <a:buFontTx/>
+              <a:buChar char="•"/>
+              <a:tabLst/>
+            </a:pPr>
+            <a:r>
+              <a:rPr kumimoji="0" lang="en-US" altLang="en-US" b="0" i="0" u="none" strike="noStrike" cap="none" normalizeH="0" baseline="0" dirty="0" smtClean="0">
+                <a:ln>
+                  <a:noFill/>
+                </a:ln>
+                <a:solidFill>
+                  <a:schemeClr val="tx1"/>
+                </a:solidFill>
+                <a:effectLst/>
+                <a:latin typeface="Arial" panose="020B0604020202020204" pitchFamily="34" charset="0"/>
+              </a:rPr>
+              <a:t>Chuỗi OHLCV + indicators được cắt theo </a:t>
+            </a:r>
+            <a:r>
+              <a:rPr kumimoji="0" lang="en-US" altLang="en-US" b="1" i="0" u="none" strike="noStrike" cap="none" normalizeH="0" baseline="0" dirty="0" smtClean="0">
+                <a:ln>
+                  <a:noFill/>
+                </a:ln>
+                <a:solidFill>
+                  <a:schemeClr val="tx1"/>
+                </a:solidFill>
+                <a:effectLst/>
+                <a:latin typeface="Arial" panose="020B0604020202020204" pitchFamily="34" charset="0"/>
+              </a:rPr>
+              <a:t>LOOKBACK = 60</a:t>
+            </a:r>
+            <a:r>
+              <a:rPr kumimoji="0" lang="en-US" altLang="en-US" b="0" i="0" u="none" strike="noStrike" cap="none" normalizeH="0" baseline="0" dirty="0" smtClean="0">
+                <a:ln>
+                  <a:noFill/>
+                </a:ln>
+                <a:solidFill>
+                  <a:schemeClr val="tx1"/>
+                </a:solidFill>
+                <a:effectLst/>
+                <a:latin typeface="Arial" panose="020B0604020202020204" pitchFamily="34" charset="0"/>
+              </a:rPr>
+              <a:t>, đảm bảo không dùng dữ liệu tương lai.</a:t>
+            </a:r>
+          </a:p>
+          <a:p>
+            <a:pPr marL="0" marR="0" lvl="0" indent="0" algn="l" defTabSz="914400" rtl="0" eaLnBrk="0" fontAlgn="base" latinLnBrk="0" hangingPunct="0">
+              <a:lnSpc>
+                <a:spcPct val="100000"/>
+              </a:lnSpc>
+              <a:spcBef>
+                <a:spcPct val="0"/>
+              </a:spcBef>
+              <a:spcAft>
+                <a:spcPct val="0"/>
+              </a:spcAft>
+              <a:buClrTx/>
+              <a:buSzTx/>
+              <a:buFontTx/>
+              <a:buChar char="•"/>
+              <a:tabLst/>
+            </a:pPr>
+            <a:r>
+              <a:rPr kumimoji="0" lang="en-US" altLang="en-US" b="0" i="0" u="none" strike="noStrike" cap="none" normalizeH="0" baseline="0" dirty="0" smtClean="0">
+                <a:ln>
+                  <a:noFill/>
+                </a:ln>
+                <a:solidFill>
+                  <a:schemeClr val="tx1"/>
+                </a:solidFill>
+                <a:effectLst/>
+                <a:latin typeface="Arial" panose="020B0604020202020204" pitchFamily="34" charset="0"/>
+              </a:rPr>
+              <a:t>Self-attention cho phép mô hình </a:t>
+            </a:r>
+            <a:r>
+              <a:rPr kumimoji="0" lang="en-US" altLang="en-US" b="1" i="0" u="none" strike="noStrike" cap="none" normalizeH="0" baseline="0" dirty="0" smtClean="0">
+                <a:ln>
+                  <a:noFill/>
+                </a:ln>
+                <a:solidFill>
+                  <a:schemeClr val="tx1"/>
+                </a:solidFill>
+                <a:effectLst/>
+                <a:latin typeface="Arial" panose="020B0604020202020204" pitchFamily="34" charset="0"/>
+              </a:rPr>
+              <a:t>nắm bắt quan hệ dài hạn và phi tuyến</a:t>
+            </a:r>
+            <a:r>
+              <a:rPr kumimoji="0" lang="en-US" altLang="en-US" b="0" i="0" u="none" strike="noStrike" cap="none" normalizeH="0" baseline="0" dirty="0" smtClean="0">
+                <a:ln>
+                  <a:noFill/>
+                </a:ln>
+                <a:solidFill>
+                  <a:schemeClr val="tx1"/>
+                </a:solidFill>
+                <a:effectLst/>
+                <a:latin typeface="Arial" panose="020B0604020202020204" pitchFamily="34" charset="0"/>
+              </a:rPr>
+              <a:t> trong chuỗi giá.</a:t>
+            </a:r>
+          </a:p>
+          <a:p>
+            <a:pPr marL="0" marR="0" lvl="0" indent="0" algn="l" defTabSz="914400" rtl="0" eaLnBrk="0" fontAlgn="base" latinLnBrk="0" hangingPunct="0">
+              <a:lnSpc>
+                <a:spcPct val="100000"/>
+              </a:lnSpc>
+              <a:spcBef>
+                <a:spcPct val="0"/>
+              </a:spcBef>
+              <a:spcAft>
+                <a:spcPct val="0"/>
+              </a:spcAft>
+              <a:buClrTx/>
+              <a:buSzTx/>
+              <a:buFontTx/>
+              <a:buChar char="•"/>
+              <a:tabLst/>
+            </a:pPr>
+            <a:r>
+              <a:rPr kumimoji="0" lang="en-US" altLang="en-US" b="0" i="0" u="none" strike="noStrike" cap="none" normalizeH="0" baseline="0" dirty="0" smtClean="0">
+                <a:ln>
+                  <a:noFill/>
+                </a:ln>
+                <a:solidFill>
+                  <a:schemeClr val="tx1"/>
+                </a:solidFill>
+                <a:effectLst/>
+                <a:latin typeface="Arial" panose="020B0604020202020204" pitchFamily="34" charset="0"/>
+              </a:rPr>
+              <a:t>Embedding đầu ra (256-dim) đại diện cho </a:t>
+            </a:r>
+            <a:r>
+              <a:rPr kumimoji="0" lang="en-US" altLang="en-US" b="1" i="0" u="none" strike="noStrike" cap="none" normalizeH="0" baseline="0" dirty="0" smtClean="0">
+                <a:ln>
+                  <a:noFill/>
+                </a:ln>
+                <a:solidFill>
+                  <a:schemeClr val="tx1"/>
+                </a:solidFill>
+                <a:effectLst/>
+                <a:latin typeface="Arial" panose="020B0604020202020204" pitchFamily="34" charset="0"/>
+              </a:rPr>
+              <a:t>trạng thái thị trường tại mỗi thời điểm</a:t>
+            </a:r>
+            <a:r>
+              <a:rPr kumimoji="0" lang="en-US" altLang="en-US" b="0" i="0" u="none" strike="noStrike" cap="none" normalizeH="0" baseline="0" dirty="0" smtClean="0">
+                <a:ln>
+                  <a:noFill/>
+                </a:ln>
+                <a:solidFill>
+                  <a:schemeClr val="tx1"/>
+                </a:solidFill>
+                <a:effectLst/>
+                <a:latin typeface="Arial" panose="020B0604020202020204" pitchFamily="34" charset="0"/>
+              </a:rPr>
+              <a:t>.</a:t>
+            </a:r>
+          </a:p>
+          <a:p>
+            <a:pPr marL="0" marR="0" lvl="0" indent="0" algn="l" defTabSz="914400" rtl="0" eaLnBrk="0" fontAlgn="base" latinLnBrk="0" hangingPunct="0">
+              <a:lnSpc>
+                <a:spcPct val="100000"/>
+              </a:lnSpc>
+              <a:spcBef>
+                <a:spcPct val="0"/>
+              </a:spcBef>
+              <a:spcAft>
+                <a:spcPct val="0"/>
+              </a:spcAft>
+              <a:buClrTx/>
+              <a:buSzTx/>
+              <a:buFontTx/>
+              <a:buChar char="•"/>
+              <a:tabLst/>
+            </a:pPr>
+            <a:r>
+              <a:rPr kumimoji="0" lang="en-US" altLang="en-US" b="0" i="0" u="none" strike="noStrike" cap="none" normalizeH="0" baseline="0" dirty="0" smtClean="0">
+                <a:ln>
+                  <a:noFill/>
+                </a:ln>
+                <a:solidFill>
+                  <a:schemeClr val="tx1"/>
+                </a:solidFill>
+                <a:effectLst/>
+                <a:latin typeface="Arial" panose="020B0604020202020204" pitchFamily="34" charset="0"/>
+              </a:rPr>
+              <a:t>Embeddings được sinh </a:t>
+            </a:r>
+            <a:r>
+              <a:rPr kumimoji="0" lang="en-US" altLang="en-US" b="1" i="0" u="none" strike="noStrike" cap="none" normalizeH="0" baseline="0" dirty="0" smtClean="0">
+                <a:ln>
+                  <a:noFill/>
+                </a:ln>
+                <a:solidFill>
+                  <a:schemeClr val="tx1"/>
+                </a:solidFill>
+                <a:effectLst/>
+                <a:latin typeface="Arial" panose="020B0604020202020204" pitchFamily="34" charset="0"/>
+              </a:rPr>
+              <a:t>riêng cho từng backtest split</a:t>
+            </a:r>
+            <a:r>
+              <a:rPr kumimoji="0" lang="en-US" altLang="en-US" b="0" i="0" u="none" strike="noStrike" cap="none" normalizeH="0" baseline="0" dirty="0" smtClean="0">
+                <a:ln>
+                  <a:noFill/>
+                </a:ln>
+                <a:solidFill>
+                  <a:schemeClr val="tx1"/>
+                </a:solidFill>
+                <a:effectLst/>
+                <a:latin typeface="Arial" panose="020B0604020202020204" pitchFamily="34" charset="0"/>
+              </a:rPr>
+              <a:t>, tránh leakage giữa các giai đoạn.</a:t>
+            </a:r>
+          </a:p>
+          <a:p>
+            <a:pPr marL="0" marR="0" lvl="0" indent="0" algn="l" defTabSz="914400" rtl="0" eaLnBrk="0" fontAlgn="base" latinLnBrk="0" hangingPunct="0">
+              <a:lnSpc>
+                <a:spcPct val="100000"/>
+              </a:lnSpc>
+              <a:spcBef>
+                <a:spcPct val="0"/>
+              </a:spcBef>
+              <a:spcAft>
+                <a:spcPct val="0"/>
+              </a:spcAft>
+              <a:buClrTx/>
+              <a:buSzTx/>
+              <a:buFontTx/>
+              <a:buChar char="•"/>
+              <a:tabLst/>
+            </a:pPr>
+            <a:r>
+              <a:rPr kumimoji="0" lang="en-US" altLang="en-US" b="0" i="0" u="none" strike="noStrike" cap="none" normalizeH="0" baseline="0" dirty="0" smtClean="0">
+                <a:ln>
+                  <a:noFill/>
+                </a:ln>
+                <a:solidFill>
+                  <a:schemeClr val="tx1"/>
+                </a:solidFill>
+                <a:effectLst/>
+                <a:latin typeface="Arial" panose="020B0604020202020204" pitchFamily="34" charset="0"/>
+              </a:rPr>
+              <a:t>Output chỉ đóng vai trò </a:t>
+            </a:r>
+            <a:r>
+              <a:rPr kumimoji="0" lang="en-US" altLang="en-US" b="1" i="0" u="none" strike="noStrike" cap="none" normalizeH="0" baseline="0" dirty="0" smtClean="0">
+                <a:ln>
+                  <a:noFill/>
+                </a:ln>
+                <a:solidFill>
+                  <a:schemeClr val="tx1"/>
+                </a:solidFill>
+                <a:effectLst/>
+                <a:latin typeface="Arial" panose="020B0604020202020204" pitchFamily="34" charset="0"/>
+              </a:rPr>
+              <a:t>feature cho tầng fusion / decision</a:t>
+            </a:r>
+            <a:r>
+              <a:rPr kumimoji="0" lang="en-US" altLang="en-US" b="0" i="0" u="none" strike="noStrike" cap="none" normalizeH="0" baseline="0" dirty="0" smtClean="0">
+                <a:ln>
+                  <a:noFill/>
+                </a:ln>
+                <a:solidFill>
+                  <a:schemeClr val="tx1"/>
+                </a:solidFill>
+                <a:effectLst/>
+                <a:latin typeface="Arial" panose="020B0604020202020204" pitchFamily="34" charset="0"/>
+              </a:rPr>
+              <a:t>, không trực tiếp tạo lệnh giao dịch.</a:t>
+            </a:r>
+          </a:p>
+        </p:txBody>
+      </p:sp>
+    </p:spTree>
+    <p:extLst>
+      <p:ext uri="{BB962C8B-B14F-4D97-AF65-F5344CB8AC3E}">
+        <p14:creationId xmlns:p14="http://schemas.microsoft.com/office/powerpoint/2010/main" val="1569121668"/>
+      </p:ext>
+    </p:extLst>
+  </p:cSld>
+  <p:clrMapOvr>
+    <a:masterClrMapping/>
+  </p:clrMapOvr>
+  <p:timing>
+    <p:tnLst>
+      <p:par>
+        <p:cTn id="1" dur="indefinite" restart="never" nodeType="tmRoot"/>
+      </p:par>
+    </p:tnLst>
+  </p:timing>
+</p:sld>
+</file>
+
+<file path=ppt/slides/slide22.xml><?xml version="1.0" encoding="utf-8"?>
+<p:sld xmlns:a="http://schemas.openxmlformats.org/drawingml/2006/main" xmlns:r="http://schemas.openxmlformats.org/officeDocument/2006/relationships" xmlns:p="http://schemas.openxmlformats.org/presentationml/2006/main">
+  <p:cSld>
+    <p:spTree>
+      <p:nvGrpSpPr>
+        <p:cNvPr id="1" name=""/>
+        <p:cNvGrpSpPr/>
+        <p:nvPr/>
+      </p:nvGrpSpPr>
+      <p:grpSpPr>
+        <a:xfrm>
+          <a:off x="0" y="0"/>
+          <a:ext cx="0" cy="0"/>
+          <a:chOff x="0" y="0"/>
+          <a:chExt cx="0" cy="0"/>
+        </a:xfrm>
+      </p:grpSpPr>
+      <p:sp>
+        <p:nvSpPr>
+          <p:cNvPr id="2" name="Title 1"/>
+          <p:cNvSpPr>
+            <a:spLocks noGrp="1"/>
+          </p:cNvSpPr>
+          <p:nvPr>
+            <p:ph type="title"/>
+          </p:nvPr>
+        </p:nvSpPr>
+        <p:spPr>
+          <a:xfrm>
+            <a:off x="838200" y="145317"/>
+            <a:ext cx="10515600" cy="1325563"/>
+          </a:xfrm>
+        </p:spPr>
+        <p:txBody>
+          <a:bodyPr/>
+          <a:lstStyle/>
+          <a:p>
+            <a:r>
+              <a:rPr lang="en-US" dirty="0" smtClean="0"/>
+              <a:t>Backtest – fusion</a:t>
+            </a:r>
+            <a:endParaRPr lang="en-US" dirty="0"/>
+          </a:p>
+        </p:txBody>
+      </p:sp>
+      <p:sp>
+        <p:nvSpPr>
+          <p:cNvPr id="4" name="Rectangle 2"/>
+          <p:cNvSpPr>
+            <a:spLocks noGrp="1" noChangeArrowheads="1"/>
+          </p:cNvSpPr>
+          <p:nvPr>
+            <p:ph idx="1"/>
+          </p:nvPr>
+        </p:nvSpPr>
+        <p:spPr bwMode="auto">
+          <a:xfrm>
+            <a:off x="838200" y="1092293"/>
+            <a:ext cx="10662137" cy="5818003"/>
+          </a:xfrm>
+          <a:prstGeom prst="rect">
+            <a:avLst/>
+          </a:prstGeom>
+          <a:noFill/>
+          <a:ln>
+            <a:noFill/>
+          </a:ln>
+          <a:effectLst/>
+          <a:extLst>
+            <a:ext uri="{909E8E84-426E-40DD-AFC4-6F175D3DCCD1}">
+              <a14:hiddenFill xmlns:a14="http://schemas.microsoft.com/office/drawing/2010/main">
+                <a:solidFill>
+                  <a:schemeClr val="accent1"/>
+                </a:solidFill>
+              </a14:hiddenFill>
+            </a:ext>
+            <a:ext uri="{91240B29-F687-4F45-9708-019B960494DF}">
+              <a14:hiddenLine xmlns:a14="http://schemas.microsoft.com/office/drawing/2010/main" w="9525">
+                <a:solidFill>
+                  <a:schemeClr val="tx1"/>
+                </a:solidFill>
+                <a:miter lim="800000"/>
+                <a:headEnd/>
+                <a:tailEnd/>
+              </a14:hiddenLine>
+            </a:ext>
+            <a:ext uri="{AF507438-7753-43E0-B8FC-AC1667EBCBE1}">
+              <a14:hiddenEffects xmlns:a14="http://schemas.microsoft.com/office/drawing/2010/main">
+                <a:effectLst>
+                  <a:outerShdw dist="35921" dir="2700000" algn="ctr" rotWithShape="0">
+                    <a:schemeClr val="bg2"/>
+                  </a:outerShdw>
+                </a:effectLst>
+              </a14:hiddenEffects>
+            </a:ext>
+          </a:extLst>
+        </p:spPr>
+        <p:txBody>
+          <a:bodyPr vert="horz" wrap="square" lIns="91440" tIns="45720" rIns="91440" bIns="45720" numCol="1" anchor="ctr" anchorCtr="0" compatLnSpc="1">
+            <a:prstTxWarp prst="textNoShape">
+              <a:avLst/>
+            </a:prstTxWarp>
+            <a:spAutoFit/>
+          </a:bodyPr>
+          <a:lstStyle/>
+          <a:p>
+            <a:r>
+              <a:rPr lang="vi-VN" dirty="0"/>
+              <a:t>Kết hợp </a:t>
+            </a:r>
+            <a:r>
+              <a:rPr lang="vi-VN" b="1" dirty="0"/>
+              <a:t>FinBERT, ATT-CNN-LSTM và Transformer embeddings</a:t>
+            </a:r>
+            <a:r>
+              <a:rPr lang="vi-VN" dirty="0"/>
+              <a:t> thành một vector thống nhất.</a:t>
+            </a:r>
+          </a:p>
+          <a:p>
+            <a:r>
+              <a:rPr lang="vi-VN" dirty="0"/>
+              <a:t>Sử dụng </a:t>
+            </a:r>
+            <a:r>
+              <a:rPr lang="vi-VN" b="1" dirty="0"/>
+              <a:t>Fusion MLP (autoencoder-style)</a:t>
+            </a:r>
+            <a:r>
+              <a:rPr lang="vi-VN" dirty="0"/>
+              <a:t> đã huấn luyện trước, chỉ chạy inference trong backtest.</a:t>
+            </a:r>
+          </a:p>
+          <a:p>
+            <a:r>
+              <a:rPr lang="vi-VN" dirty="0"/>
+              <a:t>Encoder học cách </a:t>
+            </a:r>
+            <a:r>
+              <a:rPr lang="vi-VN" b="1" dirty="0"/>
+              <a:t>nén thông tin đa mô hình</a:t>
+            </a:r>
+            <a:r>
+              <a:rPr lang="vi-VN" dirty="0"/>
+              <a:t> thành latent embedding gọn (fusion embedding).</a:t>
+            </a:r>
+          </a:p>
+          <a:p>
+            <a:r>
+              <a:rPr lang="vi-VN" dirty="0"/>
+              <a:t>Thực hiện </a:t>
+            </a:r>
+            <a:r>
+              <a:rPr lang="vi-VN" b="1" dirty="0"/>
+              <a:t>align theo độ dài ngắn nhất</a:t>
+            </a:r>
+            <a:r>
+              <a:rPr lang="vi-VN" dirty="0"/>
+              <a:t>, đảm bảo đồng bộ thời gian giữa các nguồn.</a:t>
+            </a:r>
+          </a:p>
+          <a:p>
+            <a:r>
+              <a:rPr lang="vi-VN" dirty="0"/>
+              <a:t>Sinh embedding </a:t>
+            </a:r>
+            <a:r>
+              <a:rPr lang="vi-VN" b="1" dirty="0"/>
+              <a:t>riêng cho từng backtest split</a:t>
+            </a:r>
+            <a:r>
+              <a:rPr lang="vi-VN" dirty="0"/>
+              <a:t>, không trộn dữ liệu giữa các giai đoạn.</a:t>
+            </a:r>
+          </a:p>
+          <a:p>
+            <a:r>
+              <a:rPr lang="vi-VN" dirty="0"/>
+              <a:t>Fusion embedding là </a:t>
+            </a:r>
+            <a:r>
+              <a:rPr lang="vi-VN" b="1" dirty="0"/>
+              <a:t>đầu vào cuối cùng cho decision layer (Bandit/RL)</a:t>
+            </a:r>
+            <a:r>
+              <a:rPr lang="vi-VN" dirty="0"/>
+              <a:t>, không trực tiếp tạo lệnh giao dịch.</a:t>
+            </a:r>
+          </a:p>
+          <a:p>
+            <a:pPr marL="0" marR="0" lvl="0" indent="0" algn="l" defTabSz="914400" rtl="0" eaLnBrk="0" fontAlgn="base" latinLnBrk="0" hangingPunct="0">
+              <a:lnSpc>
+                <a:spcPct val="100000"/>
+              </a:lnSpc>
+              <a:spcBef>
+                <a:spcPct val="0"/>
+              </a:spcBef>
+              <a:spcAft>
+                <a:spcPct val="0"/>
+              </a:spcAft>
+              <a:buClrTx/>
+              <a:buSzTx/>
+              <a:buNone/>
+              <a:tabLst/>
+            </a:pPr>
+            <a:endParaRPr kumimoji="0" lang="en-US" altLang="en-US" b="0" i="0" u="none" strike="noStrike" cap="none" normalizeH="0" baseline="0" dirty="0" smtClean="0">
+              <a:ln>
+                <a:noFill/>
+              </a:ln>
+              <a:solidFill>
+                <a:schemeClr val="tx1"/>
+              </a:solidFill>
+              <a:effectLst/>
+              <a:latin typeface="Arial" panose="020B0604020202020204" pitchFamily="34" charset="0"/>
+            </a:endParaRPr>
+          </a:p>
+        </p:txBody>
+      </p:sp>
+    </p:spTree>
+    <p:extLst>
+      <p:ext uri="{BB962C8B-B14F-4D97-AF65-F5344CB8AC3E}">
+        <p14:creationId xmlns:p14="http://schemas.microsoft.com/office/powerpoint/2010/main" val="1238119357"/>
+      </p:ext>
+    </p:extLst>
+  </p:cSld>
+  <p:clrMapOvr>
+    <a:masterClrMapping/>
+  </p:clrMapOvr>
+  <p:timing>
+    <p:tnLst>
+      <p:par>
+        <p:cTn id="1" dur="indefinite" restart="never" nodeType="tmRoot"/>
+      </p:par>
+    </p:tnLst>
+  </p:timing>
+</p:sld>
+</file>
+
+<file path=ppt/slides/slide23.xml><?xml version="1.0" encoding="utf-8"?>
+<p:sld xmlns:a="http://schemas.openxmlformats.org/drawingml/2006/main" xmlns:r="http://schemas.openxmlformats.org/officeDocument/2006/relationships" xmlns:p="http://schemas.openxmlformats.org/presentationml/2006/main">
+  <p:cSld>
+    <p:spTree>
+      <p:nvGrpSpPr>
+        <p:cNvPr id="1" name=""/>
+        <p:cNvGrpSpPr/>
+        <p:nvPr/>
+      </p:nvGrpSpPr>
+      <p:grpSpPr>
+        <a:xfrm>
+          <a:off x="0" y="0"/>
+          <a:ext cx="0" cy="0"/>
+          <a:chOff x="0" y="0"/>
+          <a:chExt cx="0" cy="0"/>
+        </a:xfrm>
+      </p:grpSpPr>
+      <p:sp>
+        <p:nvSpPr>
+          <p:cNvPr id="2" name="Title 1"/>
+          <p:cNvSpPr>
+            <a:spLocks noGrp="1"/>
+          </p:cNvSpPr>
+          <p:nvPr>
+            <p:ph type="title"/>
+          </p:nvPr>
+        </p:nvSpPr>
+        <p:spPr>
+          <a:xfrm>
+            <a:off x="838200" y="145317"/>
+            <a:ext cx="10515600" cy="1325563"/>
+          </a:xfrm>
+        </p:spPr>
+        <p:txBody>
+          <a:bodyPr/>
+          <a:lstStyle/>
+          <a:p>
+            <a:r>
+              <a:rPr lang="en-US" dirty="0" smtClean="0"/>
+              <a:t>Backtest – bandit Agent</a:t>
+            </a:r>
+            <a:endParaRPr lang="en-US" dirty="0"/>
+          </a:p>
+        </p:txBody>
+      </p:sp>
+      <p:sp>
+        <p:nvSpPr>
+          <p:cNvPr id="5" name="Rectangle 2"/>
+          <p:cNvSpPr>
+            <a:spLocks noGrp="1" noChangeArrowheads="1"/>
+          </p:cNvSpPr>
+          <p:nvPr>
+            <p:ph idx="1"/>
+          </p:nvPr>
+        </p:nvSpPr>
+        <p:spPr bwMode="auto">
+          <a:xfrm>
+            <a:off x="749808" y="1397237"/>
+            <a:ext cx="9777419" cy="5262979"/>
+          </a:xfrm>
+          <a:prstGeom prst="rect">
+            <a:avLst/>
+          </a:prstGeom>
+          <a:noFill/>
+          <a:ln>
+            <a:noFill/>
+          </a:ln>
+          <a:effectLst/>
+          <a:extLst>
+            <a:ext uri="{909E8E84-426E-40DD-AFC4-6F175D3DCCD1}">
+              <a14:hiddenFill xmlns:a14="http://schemas.microsoft.com/office/drawing/2010/main">
+                <a:solidFill>
+                  <a:schemeClr val="accent1"/>
+                </a:solidFill>
+              </a14:hiddenFill>
+            </a:ext>
+            <a:ext uri="{91240B29-F687-4F45-9708-019B960494DF}">
+              <a14:hiddenLine xmlns:a14="http://schemas.microsoft.com/office/drawing/2010/main" w="9525">
+                <a:solidFill>
+                  <a:schemeClr val="tx1"/>
+                </a:solidFill>
+                <a:miter lim="800000"/>
+                <a:headEnd/>
+                <a:tailEnd/>
+              </a14:hiddenLine>
+            </a:ext>
+            <a:ext uri="{AF507438-7753-43E0-B8FC-AC1667EBCBE1}">
+              <a14:hiddenEffects xmlns:a14="http://schemas.microsoft.com/office/drawing/2010/main">
+                <a:effectLst>
+                  <a:outerShdw dist="35921" dir="2700000" algn="ctr" rotWithShape="0">
+                    <a:schemeClr val="bg2"/>
+                  </a:outerShdw>
+                </a:effectLst>
+              </a14:hiddenEffects>
+            </a:ext>
+          </a:extLst>
+        </p:spPr>
+        <p:txBody>
+          <a:bodyPr vert="horz" wrap="square" lIns="91440" tIns="45720" rIns="91440" bIns="45720" numCol="1" anchor="ctr" anchorCtr="0" compatLnSpc="1">
+            <a:prstTxWarp prst="textNoShape">
+              <a:avLst/>
+            </a:prstTxWarp>
+            <a:spAutoFit/>
+          </a:bodyPr>
+          <a:lstStyle/>
+          <a:p>
+            <a:pPr marL="0" marR="0" lvl="0" indent="0" algn="l" defTabSz="914400" rtl="0" eaLnBrk="0" fontAlgn="base" latinLnBrk="0" hangingPunct="0">
+              <a:lnSpc>
+                <a:spcPct val="100000"/>
+              </a:lnSpc>
+              <a:spcBef>
+                <a:spcPct val="0"/>
+              </a:spcBef>
+              <a:spcAft>
+                <a:spcPct val="0"/>
+              </a:spcAft>
+              <a:buClrTx/>
+              <a:buSzTx/>
+              <a:buFontTx/>
+              <a:buChar char="•"/>
+              <a:tabLst/>
+            </a:pPr>
+            <a:r>
+              <a:rPr kumimoji="0" lang="en-US" altLang="en-US" b="0" i="0" u="none" strike="noStrike" cap="none" normalizeH="0" baseline="0" dirty="0" smtClean="0">
+                <a:ln>
+                  <a:noFill/>
+                </a:ln>
+                <a:solidFill>
+                  <a:schemeClr val="tx1"/>
+                </a:solidFill>
+                <a:effectLst/>
+                <a:latin typeface="Arial" panose="020B0604020202020204" pitchFamily="34" charset="0"/>
+              </a:rPr>
+              <a:t>Fusion embeddings được đưa vào </a:t>
+            </a:r>
+            <a:r>
+              <a:rPr kumimoji="0" lang="en-US" altLang="en-US" b="1" i="0" u="none" strike="noStrike" cap="none" normalizeH="0" baseline="0" dirty="0" smtClean="0">
+                <a:ln>
+                  <a:noFill/>
+                </a:ln>
+                <a:solidFill>
+                  <a:schemeClr val="tx1"/>
+                </a:solidFill>
+                <a:effectLst/>
+                <a:latin typeface="Arial" panose="020B0604020202020204" pitchFamily="34" charset="0"/>
+              </a:rPr>
+              <a:t>LinDiagUCB Bandit</a:t>
+            </a:r>
+            <a:r>
+              <a:rPr kumimoji="0" lang="en-US" altLang="en-US" b="0" i="0" u="none" strike="noStrike" cap="none" normalizeH="0" baseline="0" dirty="0" smtClean="0">
+                <a:ln>
+                  <a:noFill/>
+                </a:ln>
+                <a:solidFill>
+                  <a:schemeClr val="tx1"/>
+                </a:solidFill>
+                <a:effectLst/>
+                <a:latin typeface="Arial" panose="020B0604020202020204" pitchFamily="34" charset="0"/>
+              </a:rPr>
+              <a:t> làm tín hiệu quyết định hướng giao dịch.</a:t>
+            </a:r>
+          </a:p>
+          <a:p>
+            <a:pPr marL="0" marR="0" lvl="0" indent="0" algn="l" defTabSz="914400" rtl="0" eaLnBrk="0" fontAlgn="base" latinLnBrk="0" hangingPunct="0">
+              <a:lnSpc>
+                <a:spcPct val="100000"/>
+              </a:lnSpc>
+              <a:spcBef>
+                <a:spcPct val="0"/>
+              </a:spcBef>
+              <a:spcAft>
+                <a:spcPct val="0"/>
+              </a:spcAft>
+              <a:buClrTx/>
+              <a:buSzTx/>
+              <a:buFontTx/>
+              <a:buChar char="•"/>
+              <a:tabLst/>
+            </a:pPr>
+            <a:r>
+              <a:rPr kumimoji="0" lang="en-US" altLang="en-US" b="0" i="0" u="none" strike="noStrike" cap="none" normalizeH="0" baseline="0" dirty="0" smtClean="0">
+                <a:ln>
+                  <a:noFill/>
+                </a:ln>
+                <a:solidFill>
+                  <a:schemeClr val="tx1"/>
+                </a:solidFill>
+                <a:effectLst/>
+                <a:latin typeface="Arial" panose="020B0604020202020204" pitchFamily="34" charset="0"/>
+              </a:rPr>
+              <a:t>Agent </a:t>
+            </a:r>
+            <a:r>
+              <a:rPr kumimoji="0" lang="en-US" altLang="en-US" b="1" i="0" u="none" strike="noStrike" cap="none" normalizeH="0" baseline="0" dirty="0" smtClean="0">
+                <a:ln>
+                  <a:noFill/>
+                </a:ln>
+                <a:solidFill>
+                  <a:schemeClr val="tx1"/>
+                </a:solidFill>
+                <a:effectLst/>
+                <a:latin typeface="Arial" panose="020B0604020202020204" pitchFamily="34" charset="0"/>
+              </a:rPr>
+              <a:t>không học lại từ đầu</a:t>
+            </a:r>
+            <a:r>
+              <a:rPr kumimoji="0" lang="en-US" altLang="en-US" b="0" i="0" u="none" strike="noStrike" cap="none" normalizeH="0" baseline="0" dirty="0" smtClean="0">
+                <a:ln>
+                  <a:noFill/>
+                </a:ln>
+                <a:solidFill>
+                  <a:schemeClr val="tx1"/>
+                </a:solidFill>
+                <a:effectLst/>
+                <a:latin typeface="Arial" panose="020B0604020202020204" pitchFamily="34" charset="0"/>
+              </a:rPr>
+              <a:t>, chỉ </a:t>
+            </a:r>
+            <a:r>
+              <a:rPr kumimoji="0" lang="en-US" altLang="en-US" b="1" i="0" u="none" strike="noStrike" cap="none" normalizeH="0" baseline="0" dirty="0" smtClean="0">
+                <a:ln>
+                  <a:noFill/>
+                </a:ln>
+                <a:solidFill>
+                  <a:schemeClr val="tx1"/>
+                </a:solidFill>
+                <a:effectLst/>
+                <a:latin typeface="Arial" panose="020B0604020202020204" pitchFamily="34" charset="0"/>
+              </a:rPr>
+              <a:t>update online nhẹ</a:t>
+            </a:r>
+            <a:r>
+              <a:rPr kumimoji="0" lang="en-US" altLang="en-US" b="0" i="0" u="none" strike="noStrike" cap="none" normalizeH="0" baseline="0" dirty="0" smtClean="0">
+                <a:ln>
+                  <a:noFill/>
+                </a:ln>
+                <a:solidFill>
+                  <a:schemeClr val="tx1"/>
+                </a:solidFill>
+                <a:effectLst/>
+                <a:latin typeface="Arial" panose="020B0604020202020204" pitchFamily="34" charset="0"/>
+              </a:rPr>
+              <a:t> với hệ số quên (γ) trong backtest.</a:t>
+            </a:r>
+          </a:p>
+          <a:p>
+            <a:pPr marL="0" marR="0" lvl="0" indent="0" algn="l" defTabSz="914400" rtl="0" eaLnBrk="0" fontAlgn="base" latinLnBrk="0" hangingPunct="0">
+              <a:lnSpc>
+                <a:spcPct val="100000"/>
+              </a:lnSpc>
+              <a:spcBef>
+                <a:spcPct val="0"/>
+              </a:spcBef>
+              <a:spcAft>
+                <a:spcPct val="0"/>
+              </a:spcAft>
+              <a:buClrTx/>
+              <a:buSzTx/>
+              <a:buFontTx/>
+              <a:buChar char="•"/>
+              <a:tabLst/>
+            </a:pPr>
+            <a:r>
+              <a:rPr kumimoji="0" lang="en-US" altLang="en-US" b="0" i="0" u="none" strike="noStrike" cap="none" normalizeH="0" baseline="0" dirty="0" smtClean="0">
+                <a:ln>
+                  <a:noFill/>
+                </a:ln>
+                <a:solidFill>
+                  <a:schemeClr val="tx1"/>
+                </a:solidFill>
+                <a:effectLst/>
+                <a:latin typeface="Arial" panose="020B0604020202020204" pitchFamily="34" charset="0"/>
+              </a:rPr>
+              <a:t>Hành vi giao dịch bị ràng buộc bởi </a:t>
+            </a:r>
+            <a:r>
+              <a:rPr kumimoji="0" lang="en-US" altLang="en-US" b="1" i="0" u="none" strike="noStrike" cap="none" normalizeH="0" baseline="0" dirty="0" smtClean="0">
+                <a:ln>
+                  <a:noFill/>
+                </a:ln>
+                <a:solidFill>
+                  <a:schemeClr val="tx1"/>
+                </a:solidFill>
+                <a:effectLst/>
+                <a:latin typeface="Arial" panose="020B0604020202020204" pitchFamily="34" charset="0"/>
+              </a:rPr>
+              <a:t>execution rules cứng</a:t>
+            </a:r>
+            <a:r>
+              <a:rPr kumimoji="0" lang="en-US" altLang="en-US" b="0" i="0" u="none" strike="noStrike" cap="none" normalizeH="0" baseline="0" dirty="0" smtClean="0">
+                <a:ln>
+                  <a:noFill/>
+                </a:ln>
+                <a:solidFill>
+                  <a:schemeClr val="tx1"/>
+                </a:solidFill>
+                <a:effectLst/>
+                <a:latin typeface="Arial" panose="020B0604020202020204" pitchFamily="34" charset="0"/>
+              </a:rPr>
+              <a:t>: advantage gate, cooldown, max-hold, flip-to-flat.</a:t>
+            </a:r>
+          </a:p>
+          <a:p>
+            <a:pPr marL="0" marR="0" lvl="0" indent="0" algn="l" defTabSz="914400" rtl="0" eaLnBrk="0" fontAlgn="base" latinLnBrk="0" hangingPunct="0">
+              <a:lnSpc>
+                <a:spcPct val="100000"/>
+              </a:lnSpc>
+              <a:spcBef>
+                <a:spcPct val="0"/>
+              </a:spcBef>
+              <a:spcAft>
+                <a:spcPct val="0"/>
+              </a:spcAft>
+              <a:buClrTx/>
+              <a:buSzTx/>
+              <a:buFontTx/>
+              <a:buChar char="•"/>
+              <a:tabLst/>
+            </a:pPr>
+            <a:r>
+              <a:rPr kumimoji="0" lang="en-US" altLang="en-US" b="0" i="0" u="none" strike="noStrike" cap="none" normalizeH="0" baseline="0" dirty="0" smtClean="0">
+                <a:ln>
+                  <a:noFill/>
+                </a:ln>
+                <a:solidFill>
+                  <a:schemeClr val="tx1"/>
+                </a:solidFill>
+                <a:effectLst/>
+                <a:latin typeface="Arial" panose="020B0604020202020204" pitchFamily="34" charset="0"/>
+              </a:rPr>
+              <a:t>Equity được tính theo </a:t>
+            </a:r>
+            <a:r>
+              <a:rPr kumimoji="0" lang="en-US" altLang="en-US" b="1" i="0" u="none" strike="noStrike" cap="none" normalizeH="0" baseline="0" dirty="0" smtClean="0">
+                <a:ln>
+                  <a:noFill/>
+                </a:ln>
+                <a:solidFill>
+                  <a:schemeClr val="tx1"/>
+                </a:solidFill>
+                <a:effectLst/>
+                <a:latin typeface="Arial" panose="020B0604020202020204" pitchFamily="34" charset="0"/>
+              </a:rPr>
+              <a:t>log-return lagged execution</a:t>
+            </a:r>
+            <a:r>
+              <a:rPr kumimoji="0" lang="en-US" altLang="en-US" b="0" i="0" u="none" strike="noStrike" cap="none" normalizeH="0" baseline="0" dirty="0" smtClean="0">
+                <a:ln>
+                  <a:noFill/>
+                </a:ln>
+                <a:solidFill>
+                  <a:schemeClr val="tx1"/>
+                </a:solidFill>
+                <a:effectLst/>
+                <a:latin typeface="Arial" panose="020B0604020202020204" pitchFamily="34" charset="0"/>
+              </a:rPr>
+              <a:t>, tránh look-ahead bias.</a:t>
+            </a:r>
+          </a:p>
+          <a:p>
+            <a:pPr marL="0" marR="0" lvl="0" indent="0" algn="l" defTabSz="914400" rtl="0" eaLnBrk="0" fontAlgn="base" latinLnBrk="0" hangingPunct="0">
+              <a:lnSpc>
+                <a:spcPct val="100000"/>
+              </a:lnSpc>
+              <a:spcBef>
+                <a:spcPct val="0"/>
+              </a:spcBef>
+              <a:spcAft>
+                <a:spcPct val="0"/>
+              </a:spcAft>
+              <a:buClrTx/>
+              <a:buSzTx/>
+              <a:buFontTx/>
+              <a:buChar char="•"/>
+              <a:tabLst/>
+            </a:pPr>
+            <a:r>
+              <a:rPr kumimoji="0" lang="en-US" altLang="en-US" b="0" i="0" u="none" strike="noStrike" cap="none" normalizeH="0" baseline="0" dirty="0" smtClean="0">
+                <a:ln>
+                  <a:noFill/>
+                </a:ln>
+                <a:solidFill>
+                  <a:schemeClr val="tx1"/>
+                </a:solidFill>
+                <a:effectLst/>
+                <a:latin typeface="Arial" panose="020B0604020202020204" pitchFamily="34" charset="0"/>
+              </a:rPr>
+              <a:t>Reset prior giữa các split giúp </a:t>
+            </a:r>
+            <a:r>
+              <a:rPr kumimoji="0" lang="en-US" altLang="en-US" b="1" i="0" u="none" strike="noStrike" cap="none" normalizeH="0" baseline="0" dirty="0" smtClean="0">
+                <a:ln>
+                  <a:noFill/>
+                </a:ln>
+                <a:solidFill>
+                  <a:schemeClr val="tx1"/>
+                </a:solidFill>
+                <a:effectLst/>
+                <a:latin typeface="Arial" panose="020B0604020202020204" pitchFamily="34" charset="0"/>
+              </a:rPr>
+              <a:t>giảm overconfidence</a:t>
+            </a:r>
+            <a:r>
+              <a:rPr kumimoji="0" lang="en-US" altLang="en-US" b="0" i="0" u="none" strike="noStrike" cap="none" normalizeH="0" baseline="0" dirty="0" smtClean="0">
+                <a:ln>
+                  <a:noFill/>
+                </a:ln>
+                <a:solidFill>
+                  <a:schemeClr val="tx1"/>
+                </a:solidFill>
+                <a:effectLst/>
+                <a:latin typeface="Arial" panose="020B0604020202020204" pitchFamily="34" charset="0"/>
+              </a:rPr>
+              <a:t> và tăng tính ổn định.</a:t>
+            </a:r>
+          </a:p>
+          <a:p>
+            <a:pPr marL="0" marR="0" lvl="0" indent="0" algn="l" defTabSz="914400" rtl="0" eaLnBrk="0" fontAlgn="base" latinLnBrk="0" hangingPunct="0">
+              <a:lnSpc>
+                <a:spcPct val="100000"/>
+              </a:lnSpc>
+              <a:spcBef>
+                <a:spcPct val="0"/>
+              </a:spcBef>
+              <a:spcAft>
+                <a:spcPct val="0"/>
+              </a:spcAft>
+              <a:buClrTx/>
+              <a:buSzTx/>
+              <a:buFontTx/>
+              <a:buChar char="•"/>
+              <a:tabLst/>
+            </a:pPr>
+            <a:r>
+              <a:rPr kumimoji="0" lang="en-US" altLang="en-US" b="0" i="0" u="none" strike="noStrike" cap="none" normalizeH="0" baseline="0" dirty="0" smtClean="0">
+                <a:ln>
+                  <a:noFill/>
+                </a:ln>
+                <a:solidFill>
+                  <a:schemeClr val="tx1"/>
+                </a:solidFill>
+                <a:effectLst/>
+                <a:latin typeface="Arial" panose="020B0604020202020204" pitchFamily="34" charset="0"/>
+              </a:rPr>
+              <a:t>Backtest phản ánh </a:t>
+            </a:r>
+            <a:r>
+              <a:rPr kumimoji="0" lang="en-US" altLang="en-US" b="1" i="0" u="none" strike="noStrike" cap="none" normalizeH="0" baseline="0" dirty="0" smtClean="0">
+                <a:ln>
+                  <a:noFill/>
+                </a:ln>
+                <a:solidFill>
+                  <a:schemeClr val="tx1"/>
+                </a:solidFill>
+                <a:effectLst/>
+                <a:latin typeface="Arial" panose="020B0604020202020204" pitchFamily="34" charset="0"/>
+              </a:rPr>
+              <a:t>hiệu quả thực dụng của pipeline</a:t>
+            </a:r>
+            <a:r>
+              <a:rPr kumimoji="0" lang="en-US" altLang="en-US" b="0" i="0" u="none" strike="noStrike" cap="none" normalizeH="0" baseline="0" dirty="0" smtClean="0">
+                <a:ln>
+                  <a:noFill/>
+                </a:ln>
+                <a:solidFill>
+                  <a:schemeClr val="tx1"/>
+                </a:solidFill>
+                <a:effectLst/>
+                <a:latin typeface="Arial" panose="020B0604020202020204" pitchFamily="34" charset="0"/>
+              </a:rPr>
+              <a:t>, không phải năng lực học thuần của agent.</a:t>
+            </a:r>
+          </a:p>
+        </p:txBody>
+      </p:sp>
+    </p:spTree>
+    <p:extLst>
+      <p:ext uri="{BB962C8B-B14F-4D97-AF65-F5344CB8AC3E}">
+        <p14:creationId xmlns:p14="http://schemas.microsoft.com/office/powerpoint/2010/main" val="1446483530"/>
+      </p:ext>
+    </p:extLst>
+  </p:cSld>
+  <p:clrMapOvr>
+    <a:masterClrMapping/>
+  </p:clrMapOvr>
+  <p:timing>
+    <p:tnLst>
+      <p:par>
+        <p:cTn id="1" dur="indefinite" restart="never" nodeType="tmRoot"/>
+      </p:par>
+    </p:tnLst>
+  </p:timing>
+</p:sld>
+</file>
+
+<file path=ppt/slides/slide24.xml><?xml version="1.0" encoding="utf-8"?>
+<p:sld xmlns:a="http://schemas.openxmlformats.org/drawingml/2006/main" xmlns:r="http://schemas.openxmlformats.org/officeDocument/2006/relationships" xmlns:p="http://schemas.openxmlformats.org/presentationml/2006/main">
+  <p:cSld>
+    <p:spTree>
+      <p:nvGrpSpPr>
+        <p:cNvPr id="1" name=""/>
+        <p:cNvGrpSpPr/>
+        <p:nvPr/>
+      </p:nvGrpSpPr>
+      <p:grpSpPr>
+        <a:xfrm>
+          <a:off x="0" y="0"/>
+          <a:ext cx="0" cy="0"/>
+          <a:chOff x="0" y="0"/>
+          <a:chExt cx="0" cy="0"/>
+        </a:xfrm>
+      </p:grpSpPr>
+      <p:sp>
+        <p:nvSpPr>
+          <p:cNvPr id="2" name="Title 1"/>
+          <p:cNvSpPr>
+            <a:spLocks noGrp="1"/>
+          </p:cNvSpPr>
+          <p:nvPr>
+            <p:ph type="title"/>
+          </p:nvPr>
+        </p:nvSpPr>
+        <p:spPr>
+          <a:xfrm>
+            <a:off x="838200" y="145317"/>
+            <a:ext cx="10515600" cy="1325563"/>
+          </a:xfrm>
+        </p:spPr>
+        <p:txBody>
+          <a:bodyPr/>
+          <a:lstStyle/>
+          <a:p>
+            <a:r>
+              <a:rPr lang="en-US" dirty="0" smtClean="0"/>
+              <a:t>Backtest – bandit Agent – KẾT QUẢ</a:t>
+            </a:r>
+            <a:endParaRPr lang="en-US" dirty="0"/>
+          </a:p>
+        </p:txBody>
+      </p:sp>
+      <p:pic>
+        <p:nvPicPr>
+          <p:cNvPr id="3" name="Picture 2"/>
+          <p:cNvPicPr>
+            <a:picLocks noChangeAspect="1"/>
+          </p:cNvPicPr>
+          <p:nvPr/>
+        </p:nvPicPr>
+        <p:blipFill>
+          <a:blip r:embed="rId2"/>
+          <a:stretch>
+            <a:fillRect/>
+          </a:stretch>
+        </p:blipFill>
+        <p:spPr>
+          <a:xfrm>
+            <a:off x="5927884" y="1234698"/>
+            <a:ext cx="5970890" cy="5588055"/>
+          </a:xfrm>
+          <a:prstGeom prst="rect">
+            <a:avLst/>
+          </a:prstGeom>
+        </p:spPr>
+      </p:pic>
+      <p:sp>
+        <p:nvSpPr>
+          <p:cNvPr id="4" name="Rectangle 1"/>
+          <p:cNvSpPr>
+            <a:spLocks noGrp="1" noChangeArrowheads="1"/>
+          </p:cNvSpPr>
+          <p:nvPr>
+            <p:ph idx="1"/>
+          </p:nvPr>
+        </p:nvSpPr>
+        <p:spPr bwMode="auto">
+          <a:xfrm flipH="1">
+            <a:off x="293224" y="1888703"/>
+            <a:ext cx="5251047" cy="3785652"/>
+          </a:xfrm>
+          <a:prstGeom prst="rect">
+            <a:avLst/>
+          </a:prstGeom>
+          <a:noFill/>
+          <a:ln>
+            <a:noFill/>
+          </a:ln>
+          <a:effectLst/>
+          <a:extLst>
+            <a:ext uri="{909E8E84-426E-40DD-AFC4-6F175D3DCCD1}">
+              <a14:hiddenFill xmlns:a14="http://schemas.microsoft.com/office/drawing/2010/main">
+                <a:solidFill>
+                  <a:schemeClr val="accent1"/>
+                </a:solidFill>
+              </a14:hiddenFill>
+            </a:ext>
+            <a:ext uri="{91240B29-F687-4F45-9708-019B960494DF}">
+              <a14:hiddenLine xmlns:a14="http://schemas.microsoft.com/office/drawing/2010/main" w="9525">
+                <a:solidFill>
+                  <a:schemeClr val="tx1"/>
+                </a:solidFill>
+                <a:miter lim="800000"/>
+                <a:headEnd/>
+                <a:tailEnd/>
+              </a14:hiddenLine>
+            </a:ext>
+            <a:ext uri="{AF507438-7753-43E0-B8FC-AC1667EBCBE1}">
+              <a14:hiddenEffects xmlns:a14="http://schemas.microsoft.com/office/drawing/2010/main">
+                <a:effectLst>
+                  <a:outerShdw dist="35921" dir="2700000" algn="ctr" rotWithShape="0">
+                    <a:schemeClr val="bg2"/>
+                  </a:outerShdw>
+                </a:effectLst>
+              </a14:hiddenEffects>
+            </a:ext>
+          </a:extLst>
+        </p:spPr>
+        <p:txBody>
+          <a:bodyPr vert="horz" wrap="square" lIns="91440" tIns="45720" rIns="91440" bIns="45720" numCol="1" anchor="ctr" anchorCtr="0" compatLnSpc="1">
+            <a:prstTxWarp prst="textNoShape">
+              <a:avLst/>
+            </a:prstTxWarp>
+            <a:spAutoFit/>
+          </a:bodyPr>
+          <a:lstStyle/>
+          <a:p>
+            <a:pPr marL="0" marR="0" lvl="0" indent="0" algn="l" defTabSz="914400" rtl="0" eaLnBrk="0" fontAlgn="base" latinLnBrk="0" hangingPunct="0">
+              <a:lnSpc>
+                <a:spcPct val="100000"/>
+              </a:lnSpc>
+              <a:spcBef>
+                <a:spcPct val="0"/>
+              </a:spcBef>
+              <a:spcAft>
+                <a:spcPct val="0"/>
+              </a:spcAft>
+              <a:buClrTx/>
+              <a:buSzTx/>
+              <a:buFontTx/>
+              <a:buChar char="•"/>
+              <a:tabLst/>
+            </a:pPr>
+            <a:r>
+              <a:rPr kumimoji="0" lang="en-US" altLang="en-US" sz="2400" b="0" i="0" u="none" strike="noStrike" cap="none" normalizeH="0" baseline="0" dirty="0" smtClean="0">
+                <a:ln>
+                  <a:noFill/>
+                </a:ln>
+                <a:solidFill>
+                  <a:schemeClr val="tx1"/>
+                </a:solidFill>
+                <a:effectLst/>
+                <a:latin typeface="Arial" panose="020B0604020202020204" pitchFamily="34" charset="0"/>
+              </a:rPr>
+              <a:t>Agent đạt </a:t>
+            </a:r>
+            <a:r>
+              <a:rPr kumimoji="0" lang="en-US" altLang="en-US" sz="2400" b="1" i="0" u="none" strike="noStrike" cap="none" normalizeH="0" baseline="0" dirty="0" smtClean="0">
+                <a:ln>
+                  <a:noFill/>
+                </a:ln>
+                <a:solidFill>
+                  <a:schemeClr val="tx1"/>
+                </a:solidFill>
+                <a:effectLst/>
+                <a:latin typeface="Arial" panose="020B0604020202020204" pitchFamily="34" charset="0"/>
+              </a:rPr>
+              <a:t>lợi nhuận dương và ổn định trên cả 3 giai đoạn</a:t>
+            </a:r>
+            <a:r>
+              <a:rPr kumimoji="0" lang="en-US" altLang="en-US" sz="2400" b="0" i="0" u="none" strike="noStrike" cap="none" normalizeH="0" baseline="0" dirty="0" smtClean="0">
+                <a:ln>
+                  <a:noFill/>
+                </a:ln>
+                <a:solidFill>
+                  <a:schemeClr val="tx1"/>
+                </a:solidFill>
+                <a:effectLst/>
+                <a:latin typeface="Arial" panose="020B0604020202020204" pitchFamily="34" charset="0"/>
+              </a:rPr>
+              <a:t>, không phụ thuộc vào một regime duy nhất.</a:t>
+            </a:r>
+          </a:p>
+          <a:p>
+            <a:pPr marL="0" marR="0" lvl="0" indent="0" algn="l" defTabSz="914400" rtl="0" eaLnBrk="0" fontAlgn="base" latinLnBrk="0" hangingPunct="0">
+              <a:lnSpc>
+                <a:spcPct val="100000"/>
+              </a:lnSpc>
+              <a:spcBef>
+                <a:spcPct val="0"/>
+              </a:spcBef>
+              <a:spcAft>
+                <a:spcPct val="0"/>
+              </a:spcAft>
+              <a:buClrTx/>
+              <a:buSzTx/>
+              <a:buFontTx/>
+              <a:buChar char="•"/>
+              <a:tabLst/>
+            </a:pPr>
+            <a:r>
+              <a:rPr kumimoji="0" lang="en-US" altLang="en-US" sz="2400" b="0" i="0" u="none" strike="noStrike" cap="none" normalizeH="0" baseline="0" dirty="0" smtClean="0">
+                <a:ln>
+                  <a:noFill/>
+                </a:ln>
+                <a:solidFill>
+                  <a:schemeClr val="tx1"/>
+                </a:solidFill>
+                <a:effectLst/>
+                <a:latin typeface="Arial" panose="020B0604020202020204" pitchFamily="34" charset="0"/>
+              </a:rPr>
+              <a:t>Đường balance tăng theo </a:t>
+            </a:r>
+            <a:r>
+              <a:rPr kumimoji="0" lang="en-US" altLang="en-US" sz="2400" b="1" i="0" u="none" strike="noStrike" cap="none" normalizeH="0" baseline="0" dirty="0" smtClean="0">
+                <a:ln>
+                  <a:noFill/>
+                </a:ln>
+                <a:solidFill>
+                  <a:schemeClr val="tx1"/>
+                </a:solidFill>
+                <a:effectLst/>
+                <a:latin typeface="Arial" panose="020B0604020202020204" pitchFamily="34" charset="0"/>
+              </a:rPr>
+              <a:t>các nhịp rõ ràng</a:t>
+            </a:r>
+            <a:r>
+              <a:rPr kumimoji="0" lang="en-US" altLang="en-US" sz="2400" b="0" i="0" u="none" strike="noStrike" cap="none" normalizeH="0" baseline="0" dirty="0" smtClean="0">
+                <a:ln>
+                  <a:noFill/>
+                </a:ln>
+                <a:solidFill>
+                  <a:schemeClr val="tx1"/>
+                </a:solidFill>
+                <a:effectLst/>
+                <a:latin typeface="Arial" panose="020B0604020202020204" pitchFamily="34" charset="0"/>
+              </a:rPr>
+              <a:t>, không có hiện tượng spike bất thường → không bị look-ahead hay overfitting rõ rệt.</a:t>
+            </a:r>
+          </a:p>
+          <a:p>
+            <a:pPr marL="0" marR="0" lvl="0" indent="0" algn="l" defTabSz="914400" rtl="0" eaLnBrk="0" fontAlgn="base" latinLnBrk="0" hangingPunct="0">
+              <a:lnSpc>
+                <a:spcPct val="100000"/>
+              </a:lnSpc>
+              <a:spcBef>
+                <a:spcPct val="0"/>
+              </a:spcBef>
+              <a:spcAft>
+                <a:spcPct val="0"/>
+              </a:spcAft>
+              <a:buClrTx/>
+              <a:buSzTx/>
+              <a:buFontTx/>
+              <a:buChar char="•"/>
+              <a:tabLst/>
+            </a:pPr>
+            <a:r>
+              <a:rPr kumimoji="0" lang="en-US" altLang="en-US" sz="2400" b="0" i="0" u="none" strike="noStrike" cap="none" normalizeH="0" baseline="0" dirty="0" smtClean="0">
+                <a:ln>
+                  <a:noFill/>
+                </a:ln>
+                <a:solidFill>
+                  <a:schemeClr val="tx1"/>
+                </a:solidFill>
+                <a:effectLst/>
+                <a:latin typeface="Arial" panose="020B0604020202020204" pitchFamily="34" charset="0"/>
+              </a:rPr>
+              <a:t>Số điểm vào lệnh ít, phân bố hợp lý → chiến lược mang tính </a:t>
+            </a:r>
+            <a:r>
+              <a:rPr kumimoji="0" lang="en-US" altLang="en-US" sz="2400" b="1" i="0" u="none" strike="noStrike" cap="none" normalizeH="0" baseline="0" dirty="0" smtClean="0">
+                <a:ln>
+                  <a:noFill/>
+                </a:ln>
+                <a:solidFill>
+                  <a:schemeClr val="tx1"/>
+                </a:solidFill>
+                <a:effectLst/>
+                <a:latin typeface="Arial" panose="020B0604020202020204" pitchFamily="34" charset="0"/>
+              </a:rPr>
+              <a:t>selective trading</a:t>
+            </a:r>
+            <a:r>
+              <a:rPr kumimoji="0" lang="en-US" altLang="en-US" sz="2400" b="0" i="0" u="none" strike="noStrike" cap="none" normalizeH="0" baseline="0" dirty="0" smtClean="0">
+                <a:ln>
+                  <a:noFill/>
+                </a:ln>
+                <a:solidFill>
+                  <a:schemeClr val="tx1"/>
+                </a:solidFill>
+                <a:effectLst/>
+                <a:latin typeface="Arial" panose="020B0604020202020204" pitchFamily="34" charset="0"/>
+              </a:rPr>
+              <a:t>, không overtrade.</a:t>
+            </a:r>
+          </a:p>
+        </p:txBody>
+      </p:sp>
+    </p:spTree>
+    <p:extLst>
+      <p:ext uri="{BB962C8B-B14F-4D97-AF65-F5344CB8AC3E}">
+        <p14:creationId xmlns:p14="http://schemas.microsoft.com/office/powerpoint/2010/main" val="2520701243"/>
+      </p:ext>
+    </p:extLst>
+  </p:cSld>
+  <p:clrMapOvr>
+    <a:masterClrMapping/>
+  </p:clrMapOvr>
+  <p:timing>
+    <p:tnLst>
+      <p:par>
+        <p:cTn id="1" dur="indefinite" restart="never" nodeType="tmRoot"/>
+      </p:par>
+    </p:tnLst>
+  </p:timing>
+</p:sld>
+</file>
+
+<file path=ppt/slides/slide25.xml><?xml version="1.0" encoding="utf-8"?>
+<p:sld xmlns:a="http://schemas.openxmlformats.org/drawingml/2006/main" xmlns:r="http://schemas.openxmlformats.org/officeDocument/2006/relationships" xmlns:p="http://schemas.openxmlformats.org/presentationml/2006/main">
+  <p:cSld>
+    <p:spTree>
+      <p:nvGrpSpPr>
+        <p:cNvPr id="1" name=""/>
+        <p:cNvGrpSpPr/>
+        <p:nvPr/>
+      </p:nvGrpSpPr>
+      <p:grpSpPr>
+        <a:xfrm>
+          <a:off x="0" y="0"/>
+          <a:ext cx="0" cy="0"/>
+          <a:chOff x="0" y="0"/>
+          <a:chExt cx="0" cy="0"/>
+        </a:xfrm>
+      </p:grpSpPr>
+      <p:sp>
+        <p:nvSpPr>
+          <p:cNvPr id="2" name="Title 1"/>
+          <p:cNvSpPr>
+            <a:spLocks noGrp="1"/>
+          </p:cNvSpPr>
+          <p:nvPr>
+            <p:ph type="title"/>
+          </p:nvPr>
+        </p:nvSpPr>
+        <p:spPr>
+          <a:xfrm>
+            <a:off x="838200" y="145317"/>
+            <a:ext cx="10515600" cy="1325563"/>
+          </a:xfrm>
+        </p:spPr>
+        <p:txBody>
+          <a:bodyPr/>
+          <a:lstStyle/>
+          <a:p>
+            <a:r>
+              <a:rPr lang="en-US" dirty="0" smtClean="0"/>
+              <a:t>Backtest – bandit Agent – KẾT QUẢ</a:t>
+            </a:r>
+            <a:endParaRPr lang="en-US" dirty="0"/>
+          </a:p>
+        </p:txBody>
+      </p:sp>
+      <p:pic>
+        <p:nvPicPr>
+          <p:cNvPr id="3" name="Picture 2"/>
+          <p:cNvPicPr>
+            <a:picLocks noChangeAspect="1"/>
+          </p:cNvPicPr>
+          <p:nvPr/>
+        </p:nvPicPr>
+        <p:blipFill>
+          <a:blip r:embed="rId2"/>
+          <a:stretch>
+            <a:fillRect/>
+          </a:stretch>
+        </p:blipFill>
+        <p:spPr>
+          <a:xfrm>
+            <a:off x="5927884" y="1234698"/>
+            <a:ext cx="5970890" cy="5588055"/>
+          </a:xfrm>
+          <a:prstGeom prst="rect">
+            <a:avLst/>
+          </a:prstGeom>
+        </p:spPr>
+      </p:pic>
+      <p:sp>
+        <p:nvSpPr>
+          <p:cNvPr id="4" name="Rectangle 1"/>
+          <p:cNvSpPr>
+            <a:spLocks noGrp="1" noChangeArrowheads="1"/>
+          </p:cNvSpPr>
+          <p:nvPr>
+            <p:ph idx="1"/>
+          </p:nvPr>
+        </p:nvSpPr>
+        <p:spPr bwMode="auto">
+          <a:xfrm flipH="1">
+            <a:off x="293224" y="2111328"/>
+            <a:ext cx="5251047" cy="3340402"/>
+          </a:xfrm>
+          <a:prstGeom prst="rect">
+            <a:avLst/>
+          </a:prstGeom>
+          <a:noFill/>
+          <a:ln>
+            <a:noFill/>
+          </a:ln>
+          <a:effectLst/>
+          <a:extLst>
+            <a:ext uri="{909E8E84-426E-40DD-AFC4-6F175D3DCCD1}">
+              <a14:hiddenFill xmlns:a14="http://schemas.microsoft.com/office/drawing/2010/main">
+                <a:solidFill>
+                  <a:schemeClr val="accent1"/>
+                </a:solidFill>
+              </a14:hiddenFill>
+            </a:ext>
+            <a:ext uri="{91240B29-F687-4F45-9708-019B960494DF}">
+              <a14:hiddenLine xmlns:a14="http://schemas.microsoft.com/office/drawing/2010/main" w="9525">
+                <a:solidFill>
+                  <a:schemeClr val="tx1"/>
+                </a:solidFill>
+                <a:miter lim="800000"/>
+                <a:headEnd/>
+                <a:tailEnd/>
+              </a14:hiddenLine>
+            </a:ext>
+            <a:ext uri="{AF507438-7753-43E0-B8FC-AC1667EBCBE1}">
+              <a14:hiddenEffects xmlns:a14="http://schemas.microsoft.com/office/drawing/2010/main">
+                <a:effectLst>
+                  <a:outerShdw dist="35921" dir="2700000" algn="ctr" rotWithShape="0">
+                    <a:schemeClr val="bg2"/>
+                  </a:outerShdw>
+                </a:effectLst>
+              </a14:hiddenEffects>
+            </a:ext>
+          </a:extLst>
+        </p:spPr>
+        <p:txBody>
+          <a:bodyPr vert="horz" wrap="square" lIns="91440" tIns="45720" rIns="91440" bIns="45720" numCol="1" anchor="ctr" anchorCtr="0" compatLnSpc="1">
+            <a:prstTxWarp prst="textNoShape">
+              <a:avLst/>
+            </a:prstTxWarp>
+            <a:spAutoFit/>
+          </a:bodyPr>
+          <a:lstStyle/>
+          <a:p>
+            <a:r>
+              <a:rPr lang="vi-VN" sz="2400" dirty="0"/>
+              <a:t>Drawdown được </a:t>
+            </a:r>
+            <a:r>
+              <a:rPr lang="vi-VN" sz="2400" b="1" dirty="0"/>
+              <a:t>kiểm soát tốt</a:t>
+            </a:r>
+            <a:r>
+              <a:rPr lang="vi-VN" sz="2400" dirty="0"/>
+              <a:t> (≈ 3%–9% tuỳ giai đoạn), thấp so với mức ROI đạt được.</a:t>
+            </a:r>
+          </a:p>
+          <a:p>
+            <a:r>
+              <a:rPr lang="vi-VN" sz="2400" dirty="0"/>
+              <a:t>Không xuất hiện drawdown kéo dài liên tục → agent có khả năng </a:t>
+            </a:r>
+            <a:r>
+              <a:rPr lang="vi-VN" sz="2400" b="1" dirty="0"/>
+              <a:t>thoát vị thế khi điều kiện xấu</a:t>
+            </a:r>
+            <a:r>
+              <a:rPr lang="vi-VN" sz="2400" dirty="0"/>
+              <a:t>.</a:t>
+            </a:r>
+          </a:p>
+          <a:p>
+            <a:r>
+              <a:rPr lang="vi-VN" sz="2400" dirty="0"/>
+              <a:t>Các pha drawdown thường gắn với </a:t>
+            </a:r>
+            <a:r>
+              <a:rPr lang="vi-VN" sz="2400" b="1" dirty="0"/>
+              <a:t>regime sideway hoặc đảo chiều mạnh</a:t>
+            </a:r>
+            <a:r>
+              <a:rPr lang="vi-VN" sz="2400" dirty="0"/>
+              <a:t>, không phải do lỗi hệ thống.</a:t>
+            </a:r>
+          </a:p>
+        </p:txBody>
+      </p:sp>
+    </p:spTree>
+    <p:extLst>
+      <p:ext uri="{BB962C8B-B14F-4D97-AF65-F5344CB8AC3E}">
+        <p14:creationId xmlns:p14="http://schemas.microsoft.com/office/powerpoint/2010/main" val="533500652"/>
+      </p:ext>
+    </p:extLst>
+  </p:cSld>
+  <p:clrMapOvr>
+    <a:masterClrMapping/>
+  </p:clrMapOvr>
+  <p:timing>
+    <p:tnLst>
+      <p:par>
+        <p:cTn id="1" dur="indefinite" restart="never" nodeType="tmRoot"/>
+      </p:par>
+    </p:tnLst>
+  </p:timing>
+</p:sld>
+</file>
+
+<file path=ppt/slides/slide26.xml><?xml version="1.0" encoding="utf-8"?>
+<p:sld xmlns:a="http://schemas.openxmlformats.org/drawingml/2006/main" xmlns:r="http://schemas.openxmlformats.org/officeDocument/2006/relationships" xmlns:p="http://schemas.openxmlformats.org/presentationml/2006/main">
+  <p:cSld>
+    <p:spTree>
+      <p:nvGrpSpPr>
+        <p:cNvPr id="1" name=""/>
+        <p:cNvGrpSpPr/>
+        <p:nvPr/>
+      </p:nvGrpSpPr>
+      <p:grpSpPr>
+        <a:xfrm>
+          <a:off x="0" y="0"/>
+          <a:ext cx="0" cy="0"/>
+          <a:chOff x="0" y="0"/>
+          <a:chExt cx="0" cy="0"/>
+        </a:xfrm>
+      </p:grpSpPr>
+      <p:sp>
+        <p:nvSpPr>
+          <p:cNvPr id="2" name="Title 1"/>
+          <p:cNvSpPr>
+            <a:spLocks noGrp="1"/>
+          </p:cNvSpPr>
+          <p:nvPr>
+            <p:ph type="title"/>
+          </p:nvPr>
+        </p:nvSpPr>
+        <p:spPr>
+          <a:xfrm>
+            <a:off x="838200" y="145317"/>
+            <a:ext cx="10515600" cy="1325563"/>
+          </a:xfrm>
+        </p:spPr>
+        <p:txBody>
+          <a:bodyPr/>
+          <a:lstStyle/>
+          <a:p>
+            <a:r>
+              <a:rPr lang="en-US" dirty="0" smtClean="0"/>
+              <a:t>Backtest – bandit Agent – KẾT QUẢ</a:t>
+            </a:r>
+            <a:endParaRPr lang="en-US" dirty="0"/>
+          </a:p>
+        </p:txBody>
+      </p:sp>
+      <p:pic>
+        <p:nvPicPr>
+          <p:cNvPr id="3" name="Picture 2"/>
+          <p:cNvPicPr>
+            <a:picLocks noChangeAspect="1"/>
+          </p:cNvPicPr>
+          <p:nvPr/>
+        </p:nvPicPr>
+        <p:blipFill>
+          <a:blip r:embed="rId2"/>
+          <a:stretch>
+            <a:fillRect/>
+          </a:stretch>
+        </p:blipFill>
+        <p:spPr>
+          <a:xfrm>
+            <a:off x="5927884" y="1234698"/>
+            <a:ext cx="5970890" cy="5588055"/>
+          </a:xfrm>
+          <a:prstGeom prst="rect">
+            <a:avLst/>
+          </a:prstGeom>
+        </p:spPr>
+      </p:pic>
+      <p:sp>
+        <p:nvSpPr>
+          <p:cNvPr id="6" name="Rectangle 2"/>
+          <p:cNvSpPr>
+            <a:spLocks noGrp="1" noChangeArrowheads="1"/>
+          </p:cNvSpPr>
+          <p:nvPr>
+            <p:ph idx="1"/>
+          </p:nvPr>
+        </p:nvSpPr>
+        <p:spPr bwMode="auto">
+          <a:xfrm flipH="1">
+            <a:off x="433754" y="1888599"/>
+            <a:ext cx="5275384" cy="3785652"/>
+          </a:xfrm>
+          <a:prstGeom prst="rect">
+            <a:avLst/>
+          </a:prstGeom>
+          <a:noFill/>
+          <a:ln>
+            <a:noFill/>
+          </a:ln>
+          <a:effectLst/>
+          <a:extLst>
+            <a:ext uri="{909E8E84-426E-40DD-AFC4-6F175D3DCCD1}">
+              <a14:hiddenFill xmlns:a14="http://schemas.microsoft.com/office/drawing/2010/main">
+                <a:solidFill>
+                  <a:schemeClr val="accent1"/>
+                </a:solidFill>
+              </a14:hiddenFill>
+            </a:ext>
+            <a:ext uri="{91240B29-F687-4F45-9708-019B960494DF}">
+              <a14:hiddenLine xmlns:a14="http://schemas.microsoft.com/office/drawing/2010/main" w="9525">
+                <a:solidFill>
+                  <a:schemeClr val="tx1"/>
+                </a:solidFill>
+                <a:miter lim="800000"/>
+                <a:headEnd/>
+                <a:tailEnd/>
+              </a14:hiddenLine>
+            </a:ext>
+            <a:ext uri="{AF507438-7753-43E0-B8FC-AC1667EBCBE1}">
+              <a14:hiddenEffects xmlns:a14="http://schemas.microsoft.com/office/drawing/2010/main">
+                <a:effectLst>
+                  <a:outerShdw dist="35921" dir="2700000" algn="ctr" rotWithShape="0">
+                    <a:schemeClr val="bg2"/>
+                  </a:outerShdw>
+                </a:effectLst>
+              </a14:hiddenEffects>
+            </a:ext>
+          </a:extLst>
+        </p:spPr>
+        <p:txBody>
+          <a:bodyPr vert="horz" wrap="square" lIns="91440" tIns="45720" rIns="91440" bIns="45720" numCol="1" anchor="ctr" anchorCtr="0" compatLnSpc="1">
+            <a:prstTxWarp prst="textNoShape">
+              <a:avLst/>
+            </a:prstTxWarp>
+            <a:spAutoFit/>
+          </a:bodyPr>
+          <a:lstStyle/>
+          <a:p>
+            <a:pPr marL="0" marR="0" lvl="0" indent="0" algn="l" defTabSz="914400" rtl="0" eaLnBrk="0" fontAlgn="base" latinLnBrk="0" hangingPunct="0">
+              <a:lnSpc>
+                <a:spcPct val="100000"/>
+              </a:lnSpc>
+              <a:spcBef>
+                <a:spcPct val="0"/>
+              </a:spcBef>
+              <a:spcAft>
+                <a:spcPct val="0"/>
+              </a:spcAft>
+              <a:buClrTx/>
+              <a:buSzTx/>
+              <a:buFontTx/>
+              <a:buChar char="•"/>
+              <a:tabLst/>
+            </a:pPr>
+            <a:r>
+              <a:rPr kumimoji="0" lang="en-US" altLang="en-US" sz="2400" b="0" i="0" u="none" strike="noStrike" cap="none" normalizeH="0" baseline="0" dirty="0" smtClean="0">
+                <a:ln>
+                  <a:noFill/>
+                </a:ln>
+                <a:solidFill>
+                  <a:schemeClr val="tx1"/>
+                </a:solidFill>
+                <a:effectLst/>
+                <a:latin typeface="Arial" panose="020B0604020202020204" pitchFamily="34" charset="0"/>
+              </a:rPr>
+              <a:t>Entry LONG/SHORT thường xuất hiện </a:t>
+            </a:r>
+            <a:r>
+              <a:rPr kumimoji="0" lang="en-US" altLang="en-US" sz="2400" b="1" i="0" u="none" strike="noStrike" cap="none" normalizeH="0" baseline="0" dirty="0" smtClean="0">
+                <a:ln>
+                  <a:noFill/>
+                </a:ln>
+                <a:solidFill>
+                  <a:schemeClr val="tx1"/>
+                </a:solidFill>
+                <a:effectLst/>
+                <a:latin typeface="Arial" panose="020B0604020202020204" pitchFamily="34" charset="0"/>
+              </a:rPr>
+              <a:t>sau khi giá hình thành xu hướng ngắn hạn</a:t>
+            </a:r>
+            <a:r>
+              <a:rPr kumimoji="0" lang="en-US" altLang="en-US" sz="2400" b="0" i="0" u="none" strike="noStrike" cap="none" normalizeH="0" baseline="0" dirty="0" smtClean="0">
+                <a:ln>
+                  <a:noFill/>
+                </a:ln>
+                <a:solidFill>
+                  <a:schemeClr val="tx1"/>
+                </a:solidFill>
+                <a:effectLst/>
+                <a:latin typeface="Arial" panose="020B0604020202020204" pitchFamily="34" charset="0"/>
+              </a:rPr>
+              <a:t>, không bắt đáy/đỉnh cực đoan.</a:t>
+            </a:r>
+          </a:p>
+          <a:p>
+            <a:pPr marL="0" marR="0" lvl="0" indent="0" algn="l" defTabSz="914400" rtl="0" eaLnBrk="0" fontAlgn="base" latinLnBrk="0" hangingPunct="0">
+              <a:lnSpc>
+                <a:spcPct val="100000"/>
+              </a:lnSpc>
+              <a:spcBef>
+                <a:spcPct val="0"/>
+              </a:spcBef>
+              <a:spcAft>
+                <a:spcPct val="0"/>
+              </a:spcAft>
+              <a:buClrTx/>
+              <a:buSzTx/>
+              <a:buFontTx/>
+              <a:buChar char="•"/>
+              <a:tabLst/>
+            </a:pPr>
+            <a:r>
+              <a:rPr kumimoji="0" lang="en-US" altLang="en-US" sz="2400" b="0" i="0" u="none" strike="noStrike" cap="none" normalizeH="0" baseline="0" dirty="0" smtClean="0">
+                <a:ln>
+                  <a:noFill/>
+                </a:ln>
+                <a:solidFill>
+                  <a:schemeClr val="tx1"/>
+                </a:solidFill>
+                <a:effectLst/>
+                <a:latin typeface="Arial" panose="020B0604020202020204" pitchFamily="34" charset="0"/>
+              </a:rPr>
+              <a:t>Flip trực tiếp LONG ↔ SHORT rất hiếm → rule </a:t>
+            </a:r>
+            <a:r>
+              <a:rPr kumimoji="0" lang="en-US" altLang="en-US" sz="2400" b="0" i="1" u="none" strike="noStrike" cap="none" normalizeH="0" baseline="0" dirty="0" smtClean="0">
+                <a:ln>
+                  <a:noFill/>
+                </a:ln>
+                <a:solidFill>
+                  <a:schemeClr val="tx1"/>
+                </a:solidFill>
+                <a:effectLst/>
+                <a:latin typeface="Arial" panose="020B0604020202020204" pitchFamily="34" charset="0"/>
+              </a:rPr>
+              <a:t>flip-to-flat</a:t>
+            </a:r>
+            <a:r>
+              <a:rPr kumimoji="0" lang="en-US" altLang="en-US" sz="2400" b="0" i="0" u="none" strike="noStrike" cap="none" normalizeH="0" baseline="0" dirty="0" smtClean="0">
+                <a:ln>
+                  <a:noFill/>
+                </a:ln>
+                <a:solidFill>
+                  <a:schemeClr val="tx1"/>
+                </a:solidFill>
+                <a:effectLst/>
+                <a:latin typeface="Arial" panose="020B0604020202020204" pitchFamily="34" charset="0"/>
+              </a:rPr>
+              <a:t> hoạt động đúng mục đích.</a:t>
+            </a:r>
+          </a:p>
+          <a:p>
+            <a:pPr marL="0" marR="0" lvl="0" indent="0" algn="l" defTabSz="914400" rtl="0" eaLnBrk="0" fontAlgn="base" latinLnBrk="0" hangingPunct="0">
+              <a:lnSpc>
+                <a:spcPct val="100000"/>
+              </a:lnSpc>
+              <a:spcBef>
+                <a:spcPct val="0"/>
+              </a:spcBef>
+              <a:spcAft>
+                <a:spcPct val="0"/>
+              </a:spcAft>
+              <a:buClrTx/>
+              <a:buSzTx/>
+              <a:buFontTx/>
+              <a:buChar char="•"/>
+              <a:tabLst/>
+            </a:pPr>
+            <a:r>
+              <a:rPr kumimoji="0" lang="en-US" altLang="en-US" sz="2400" b="0" i="0" u="none" strike="noStrike" cap="none" normalizeH="0" baseline="0" dirty="0" smtClean="0">
+                <a:ln>
+                  <a:noFill/>
+                </a:ln>
+                <a:solidFill>
+                  <a:schemeClr val="tx1"/>
+                </a:solidFill>
+                <a:effectLst/>
+                <a:latin typeface="Arial" panose="020B0604020202020204" pitchFamily="34" charset="0"/>
+              </a:rPr>
+              <a:t>Agent </a:t>
+            </a:r>
+            <a:r>
+              <a:rPr kumimoji="0" lang="en-US" altLang="en-US" sz="2400" b="1" i="0" u="none" strike="noStrike" cap="none" normalizeH="0" baseline="0" dirty="0" smtClean="0">
+                <a:ln>
+                  <a:noFill/>
+                </a:ln>
+                <a:solidFill>
+                  <a:schemeClr val="tx1"/>
+                </a:solidFill>
+                <a:effectLst/>
+                <a:latin typeface="Arial" panose="020B0604020202020204" pitchFamily="34" charset="0"/>
+              </a:rPr>
+              <a:t>ưu tiên giữ vị thế hơn là liên tục đảo chiều</a:t>
+            </a:r>
+            <a:r>
+              <a:rPr kumimoji="0" lang="en-US" altLang="en-US" sz="2400" b="0" i="0" u="none" strike="noStrike" cap="none" normalizeH="0" baseline="0" dirty="0" smtClean="0">
+                <a:ln>
+                  <a:noFill/>
+                </a:ln>
+                <a:solidFill>
+                  <a:schemeClr val="tx1"/>
+                </a:solidFill>
+                <a:effectLst/>
+                <a:latin typeface="Arial" panose="020B0604020202020204" pitchFamily="34" charset="0"/>
+              </a:rPr>
+              <a:t>, phù hợp với trading chi phí thấp.</a:t>
+            </a:r>
+          </a:p>
+        </p:txBody>
+      </p:sp>
+    </p:spTree>
+    <p:extLst>
+      <p:ext uri="{BB962C8B-B14F-4D97-AF65-F5344CB8AC3E}">
+        <p14:creationId xmlns:p14="http://schemas.microsoft.com/office/powerpoint/2010/main" val="2713203062"/>
+      </p:ext>
+    </p:extLst>
+  </p:cSld>
+  <p:clrMapOvr>
+    <a:masterClrMapping/>
+  </p:clrMapOvr>
+  <p:timing>
+    <p:tnLst>
+      <p:par>
+        <p:cTn id="1" dur="indefinite" restart="never" nodeType="tmRoot"/>
+      </p:par>
+    </p:tnLst>
+  </p:timing>
+</p:sld>
+</file>
+
+<file path=ppt/slides/slide27.xml><?xml version="1.0" encoding="utf-8"?>
+<p:sld xmlns:a="http://schemas.openxmlformats.org/drawingml/2006/main" xmlns:r="http://schemas.openxmlformats.org/officeDocument/2006/relationships" xmlns:p="http://schemas.openxmlformats.org/presentationml/2006/main">
+  <p:cSld>
+    <p:spTree>
+      <p:nvGrpSpPr>
+        <p:cNvPr id="1" name=""/>
+        <p:cNvGrpSpPr/>
+        <p:nvPr/>
+      </p:nvGrpSpPr>
+      <p:grpSpPr>
+        <a:xfrm>
+          <a:off x="0" y="0"/>
+          <a:ext cx="0" cy="0"/>
+          <a:chOff x="0" y="0"/>
+          <a:chExt cx="0" cy="0"/>
+        </a:xfrm>
+      </p:grpSpPr>
+      <p:sp>
+        <p:nvSpPr>
+          <p:cNvPr id="2" name="Title 1"/>
+          <p:cNvSpPr>
+            <a:spLocks noGrp="1"/>
+          </p:cNvSpPr>
+          <p:nvPr>
+            <p:ph type="title"/>
+          </p:nvPr>
+        </p:nvSpPr>
+        <p:spPr>
+          <a:xfrm>
+            <a:off x="838200" y="145317"/>
+            <a:ext cx="10515600" cy="1325563"/>
+          </a:xfrm>
+        </p:spPr>
+        <p:txBody>
+          <a:bodyPr/>
+          <a:lstStyle/>
+          <a:p>
+            <a:r>
+              <a:rPr lang="en-US" dirty="0" smtClean="0"/>
+              <a:t>Backtest – bandit Agent</a:t>
+            </a:r>
+            <a:endParaRPr lang="en-US" dirty="0"/>
+          </a:p>
+        </p:txBody>
+      </p:sp>
+      <p:sp>
+        <p:nvSpPr>
+          <p:cNvPr id="5" name="Rectangle 2"/>
+          <p:cNvSpPr>
+            <a:spLocks noGrp="1" noChangeArrowheads="1"/>
+          </p:cNvSpPr>
+          <p:nvPr>
+            <p:ph idx="1"/>
+          </p:nvPr>
+        </p:nvSpPr>
+        <p:spPr bwMode="auto">
+          <a:xfrm>
+            <a:off x="688262" y="1470880"/>
+            <a:ext cx="9777419" cy="523220"/>
+          </a:xfrm>
+          <a:prstGeom prst="rect">
+            <a:avLst/>
+          </a:prstGeom>
+          <a:noFill/>
+          <a:ln>
+            <a:noFill/>
+          </a:ln>
+          <a:effectLst/>
+          <a:extLst>
+            <a:ext uri="{909E8E84-426E-40DD-AFC4-6F175D3DCCD1}">
+              <a14:hiddenFill xmlns:a14="http://schemas.microsoft.com/office/drawing/2010/main">
+                <a:solidFill>
+                  <a:schemeClr val="accent1"/>
+                </a:solidFill>
+              </a14:hiddenFill>
+            </a:ext>
+            <a:ext uri="{91240B29-F687-4F45-9708-019B960494DF}">
+              <a14:hiddenLine xmlns:a14="http://schemas.microsoft.com/office/drawing/2010/main" w="9525">
+                <a:solidFill>
+                  <a:schemeClr val="tx1"/>
+                </a:solidFill>
+                <a:miter lim="800000"/>
+                <a:headEnd/>
+                <a:tailEnd/>
+              </a14:hiddenLine>
+            </a:ext>
+            <a:ext uri="{AF507438-7753-43E0-B8FC-AC1667EBCBE1}">
+              <a14:hiddenEffects xmlns:a14="http://schemas.microsoft.com/office/drawing/2010/main">
+                <a:effectLst>
+                  <a:outerShdw dist="35921" dir="2700000" algn="ctr" rotWithShape="0">
+                    <a:schemeClr val="bg2"/>
+                  </a:outerShdw>
+                </a:effectLst>
+              </a14:hiddenEffects>
+            </a:ext>
+          </a:extLst>
+        </p:spPr>
+        <p:txBody>
+          <a:bodyPr vert="horz" wrap="square" lIns="91440" tIns="45720" rIns="91440" bIns="45720" numCol="1" anchor="ctr" anchorCtr="0" compatLnSpc="1">
+            <a:prstTxWarp prst="textNoShape">
+              <a:avLst/>
+            </a:prstTxWarp>
+            <a:spAutoFit/>
+          </a:bodyPr>
+          <a:lstStyle/>
+          <a:p>
+            <a:pPr marL="0" marR="0" lvl="0" indent="0" algn="l" defTabSz="914400" rtl="0" eaLnBrk="0" fontAlgn="base" latinLnBrk="0" hangingPunct="0">
+              <a:lnSpc>
+                <a:spcPct val="100000"/>
+              </a:lnSpc>
+              <a:spcBef>
+                <a:spcPct val="0"/>
+              </a:spcBef>
+              <a:spcAft>
+                <a:spcPct val="0"/>
+              </a:spcAft>
+              <a:buClrTx/>
+              <a:buSzTx/>
+              <a:buNone/>
+              <a:tabLst/>
+            </a:pPr>
+            <a:r>
+              <a:rPr kumimoji="0" lang="en-US" altLang="en-US" b="0" i="0" u="none" strike="noStrike" cap="none" normalizeH="0" baseline="0" dirty="0" smtClean="0">
+                <a:ln>
+                  <a:noFill/>
+                </a:ln>
+                <a:solidFill>
+                  <a:schemeClr val="tx1"/>
+                </a:solidFill>
+                <a:effectLst/>
+                <a:latin typeface="Arial" panose="020B0604020202020204" pitchFamily="34" charset="0"/>
+              </a:rPr>
+              <a:t>Kết quả trading</a:t>
+            </a:r>
+            <a:r>
+              <a:rPr kumimoji="0" lang="en-US" altLang="en-US" b="0" i="0" u="none" strike="noStrike" cap="none" normalizeH="0" dirty="0" smtClean="0">
+                <a:ln>
+                  <a:noFill/>
+                </a:ln>
+                <a:solidFill>
+                  <a:schemeClr val="tx1"/>
+                </a:solidFill>
+                <a:effectLst/>
+                <a:latin typeface="Arial" panose="020B0604020202020204" pitchFamily="34" charset="0"/>
+              </a:rPr>
+              <a:t> part1</a:t>
+            </a:r>
+            <a:endParaRPr kumimoji="0" lang="en-US" altLang="en-US" b="0" i="0" u="none" strike="noStrike" cap="none" normalizeH="0" baseline="0" dirty="0" smtClean="0">
+              <a:ln>
+                <a:noFill/>
+              </a:ln>
+              <a:solidFill>
+                <a:schemeClr val="tx1"/>
+              </a:solidFill>
+              <a:effectLst/>
+              <a:latin typeface="Arial" panose="020B0604020202020204" pitchFamily="34" charset="0"/>
+            </a:endParaRPr>
+          </a:p>
+        </p:txBody>
+      </p:sp>
+      <p:pic>
+        <p:nvPicPr>
+          <p:cNvPr id="3" name="Picture 2"/>
+          <p:cNvPicPr>
+            <a:picLocks noChangeAspect="1"/>
+          </p:cNvPicPr>
+          <p:nvPr/>
+        </p:nvPicPr>
+        <p:blipFill>
+          <a:blip r:embed="rId2"/>
+          <a:stretch>
+            <a:fillRect/>
+          </a:stretch>
+        </p:blipFill>
+        <p:spPr>
+          <a:xfrm>
+            <a:off x="838200" y="2455618"/>
+            <a:ext cx="10515600" cy="3710720"/>
+          </a:xfrm>
+          <a:prstGeom prst="rect">
+            <a:avLst/>
+          </a:prstGeom>
+        </p:spPr>
+      </p:pic>
+    </p:spTree>
+    <p:extLst>
+      <p:ext uri="{BB962C8B-B14F-4D97-AF65-F5344CB8AC3E}">
+        <p14:creationId xmlns:p14="http://schemas.microsoft.com/office/powerpoint/2010/main" val="539096078"/>
+      </p:ext>
+    </p:extLst>
+  </p:cSld>
+  <p:clrMapOvr>
+    <a:masterClrMapping/>
+  </p:clrMapOvr>
+  <p:timing>
+    <p:tnLst>
+      <p:par>
+        <p:cTn id="1" dur="indefinite" restart="never" nodeType="tmRoot"/>
+      </p:par>
+    </p:tnLst>
+  </p:timing>
+</p:sld>
+</file>
+
+<file path=ppt/slides/slide28.xml><?xml version="1.0" encoding="utf-8"?>
+<p:sld xmlns:a="http://schemas.openxmlformats.org/drawingml/2006/main" xmlns:r="http://schemas.openxmlformats.org/officeDocument/2006/relationships" xmlns:p="http://schemas.openxmlformats.org/presentationml/2006/main">
+  <p:cSld>
+    <p:spTree>
+      <p:nvGrpSpPr>
+        <p:cNvPr id="1" name=""/>
+        <p:cNvGrpSpPr/>
+        <p:nvPr/>
+      </p:nvGrpSpPr>
+      <p:grpSpPr>
+        <a:xfrm>
+          <a:off x="0" y="0"/>
+          <a:ext cx="0" cy="0"/>
+          <a:chOff x="0" y="0"/>
+          <a:chExt cx="0" cy="0"/>
+        </a:xfrm>
+      </p:grpSpPr>
+      <p:sp>
+        <p:nvSpPr>
+          <p:cNvPr id="2" name="Title 1"/>
+          <p:cNvSpPr>
+            <a:spLocks noGrp="1"/>
+          </p:cNvSpPr>
+          <p:nvPr>
+            <p:ph type="title"/>
+          </p:nvPr>
+        </p:nvSpPr>
+        <p:spPr>
+          <a:xfrm>
+            <a:off x="838200" y="145317"/>
+            <a:ext cx="10515600" cy="1325563"/>
+          </a:xfrm>
+        </p:spPr>
+        <p:txBody>
+          <a:bodyPr/>
+          <a:lstStyle/>
+          <a:p>
+            <a:r>
+              <a:rPr lang="en-US" dirty="0" smtClean="0"/>
+              <a:t>Backtest – bandit Agent</a:t>
+            </a:r>
+            <a:endParaRPr lang="en-US" dirty="0"/>
+          </a:p>
+        </p:txBody>
+      </p:sp>
+      <p:sp>
+        <p:nvSpPr>
+          <p:cNvPr id="5" name="Rectangle 2"/>
+          <p:cNvSpPr>
+            <a:spLocks noGrp="1" noChangeArrowheads="1"/>
+          </p:cNvSpPr>
+          <p:nvPr>
+            <p:ph idx="1"/>
+          </p:nvPr>
+        </p:nvSpPr>
+        <p:spPr bwMode="auto">
+          <a:xfrm>
+            <a:off x="688262" y="1470880"/>
+            <a:ext cx="9777419" cy="523220"/>
+          </a:xfrm>
+          <a:prstGeom prst="rect">
+            <a:avLst/>
+          </a:prstGeom>
+          <a:noFill/>
+          <a:ln>
+            <a:noFill/>
+          </a:ln>
+          <a:effectLst/>
+          <a:extLst>
+            <a:ext uri="{909E8E84-426E-40DD-AFC4-6F175D3DCCD1}">
+              <a14:hiddenFill xmlns:a14="http://schemas.microsoft.com/office/drawing/2010/main">
+                <a:solidFill>
+                  <a:schemeClr val="accent1"/>
+                </a:solidFill>
+              </a14:hiddenFill>
+            </a:ext>
+            <a:ext uri="{91240B29-F687-4F45-9708-019B960494DF}">
+              <a14:hiddenLine xmlns:a14="http://schemas.microsoft.com/office/drawing/2010/main" w="9525">
+                <a:solidFill>
+                  <a:schemeClr val="tx1"/>
+                </a:solidFill>
+                <a:miter lim="800000"/>
+                <a:headEnd/>
+                <a:tailEnd/>
+              </a14:hiddenLine>
+            </a:ext>
+            <a:ext uri="{AF507438-7753-43E0-B8FC-AC1667EBCBE1}">
+              <a14:hiddenEffects xmlns:a14="http://schemas.microsoft.com/office/drawing/2010/main">
+                <a:effectLst>
+                  <a:outerShdw dist="35921" dir="2700000" algn="ctr" rotWithShape="0">
+                    <a:schemeClr val="bg2"/>
+                  </a:outerShdw>
+                </a:effectLst>
+              </a14:hiddenEffects>
+            </a:ext>
+          </a:extLst>
+        </p:spPr>
+        <p:txBody>
+          <a:bodyPr vert="horz" wrap="square" lIns="91440" tIns="45720" rIns="91440" bIns="45720" numCol="1" anchor="ctr" anchorCtr="0" compatLnSpc="1">
+            <a:prstTxWarp prst="textNoShape">
+              <a:avLst/>
+            </a:prstTxWarp>
+            <a:spAutoFit/>
+          </a:bodyPr>
+          <a:lstStyle/>
+          <a:p>
+            <a:pPr marL="0" marR="0" lvl="0" indent="0" algn="l" defTabSz="914400" rtl="0" eaLnBrk="0" fontAlgn="base" latinLnBrk="0" hangingPunct="0">
+              <a:lnSpc>
+                <a:spcPct val="100000"/>
+              </a:lnSpc>
+              <a:spcBef>
+                <a:spcPct val="0"/>
+              </a:spcBef>
+              <a:spcAft>
+                <a:spcPct val="0"/>
+              </a:spcAft>
+              <a:buClrTx/>
+              <a:buSzTx/>
+              <a:buNone/>
+              <a:tabLst/>
+            </a:pPr>
+            <a:r>
+              <a:rPr kumimoji="0" lang="en-US" altLang="en-US" b="0" i="0" u="none" strike="noStrike" cap="none" normalizeH="0" baseline="0" dirty="0" smtClean="0">
+                <a:ln>
+                  <a:noFill/>
+                </a:ln>
+                <a:solidFill>
+                  <a:schemeClr val="tx1"/>
+                </a:solidFill>
+                <a:effectLst/>
+                <a:latin typeface="Arial" panose="020B0604020202020204" pitchFamily="34" charset="0"/>
+              </a:rPr>
+              <a:t>Kết quả trading</a:t>
+            </a:r>
+            <a:r>
+              <a:rPr kumimoji="0" lang="en-US" altLang="en-US" b="0" i="0" u="none" strike="noStrike" cap="none" normalizeH="0" dirty="0" smtClean="0">
+                <a:ln>
+                  <a:noFill/>
+                </a:ln>
+                <a:solidFill>
+                  <a:schemeClr val="tx1"/>
+                </a:solidFill>
+                <a:effectLst/>
+                <a:latin typeface="Arial" panose="020B0604020202020204" pitchFamily="34" charset="0"/>
+              </a:rPr>
+              <a:t> part2</a:t>
+            </a:r>
+            <a:endParaRPr kumimoji="0" lang="en-US" altLang="en-US" b="0" i="0" u="none" strike="noStrike" cap="none" normalizeH="0" baseline="0" dirty="0" smtClean="0">
+              <a:ln>
+                <a:noFill/>
+              </a:ln>
+              <a:solidFill>
+                <a:schemeClr val="tx1"/>
+              </a:solidFill>
+              <a:effectLst/>
+              <a:latin typeface="Arial" panose="020B0604020202020204" pitchFamily="34" charset="0"/>
+            </a:endParaRPr>
+          </a:p>
+        </p:txBody>
+      </p:sp>
+      <p:pic>
+        <p:nvPicPr>
+          <p:cNvPr id="4" name="Picture 3"/>
+          <p:cNvPicPr>
+            <a:picLocks noChangeAspect="1"/>
+          </p:cNvPicPr>
+          <p:nvPr/>
+        </p:nvPicPr>
+        <p:blipFill>
+          <a:blip r:embed="rId2"/>
+          <a:stretch>
+            <a:fillRect/>
+          </a:stretch>
+        </p:blipFill>
+        <p:spPr>
+          <a:xfrm>
+            <a:off x="634805" y="2143155"/>
+            <a:ext cx="10266875" cy="3593406"/>
+          </a:xfrm>
+          <a:prstGeom prst="rect">
+            <a:avLst/>
+          </a:prstGeom>
+        </p:spPr>
+      </p:pic>
+    </p:spTree>
+    <p:extLst>
+      <p:ext uri="{BB962C8B-B14F-4D97-AF65-F5344CB8AC3E}">
+        <p14:creationId xmlns:p14="http://schemas.microsoft.com/office/powerpoint/2010/main" val="2010718005"/>
+      </p:ext>
+    </p:extLst>
+  </p:cSld>
+  <p:clrMapOvr>
+    <a:masterClrMapping/>
+  </p:clrMapOvr>
+  <p:timing>
+    <p:tnLst>
+      <p:par>
+        <p:cTn id="1" dur="indefinite" restart="never" nodeType="tmRoot"/>
+      </p:par>
+    </p:tnLst>
+  </p:timing>
+</p:sld>
+</file>
+
+<file path=ppt/slides/slide29.xml><?xml version="1.0" encoding="utf-8"?>
+<p:sld xmlns:a="http://schemas.openxmlformats.org/drawingml/2006/main" xmlns:r="http://schemas.openxmlformats.org/officeDocument/2006/relationships" xmlns:p="http://schemas.openxmlformats.org/presentationml/2006/main">
+  <p:cSld>
+    <p:spTree>
+      <p:nvGrpSpPr>
+        <p:cNvPr id="1" name=""/>
+        <p:cNvGrpSpPr/>
+        <p:nvPr/>
+      </p:nvGrpSpPr>
+      <p:grpSpPr>
+        <a:xfrm>
+          <a:off x="0" y="0"/>
+          <a:ext cx="0" cy="0"/>
+          <a:chOff x="0" y="0"/>
+          <a:chExt cx="0" cy="0"/>
+        </a:xfrm>
+      </p:grpSpPr>
+      <p:sp>
+        <p:nvSpPr>
+          <p:cNvPr id="2" name="Title 1"/>
+          <p:cNvSpPr>
+            <a:spLocks noGrp="1"/>
+          </p:cNvSpPr>
+          <p:nvPr>
+            <p:ph type="title"/>
+          </p:nvPr>
+        </p:nvSpPr>
+        <p:spPr>
+          <a:xfrm>
+            <a:off x="838200" y="145317"/>
+            <a:ext cx="10515600" cy="1325563"/>
+          </a:xfrm>
+        </p:spPr>
+        <p:txBody>
+          <a:bodyPr/>
+          <a:lstStyle/>
+          <a:p>
+            <a:r>
+              <a:rPr lang="en-US" dirty="0" smtClean="0"/>
+              <a:t>Backtest – bandit Agent</a:t>
+            </a:r>
+            <a:endParaRPr lang="en-US" dirty="0"/>
+          </a:p>
+        </p:txBody>
+      </p:sp>
+      <p:sp>
+        <p:nvSpPr>
+          <p:cNvPr id="5" name="Rectangle 2"/>
+          <p:cNvSpPr>
+            <a:spLocks noGrp="1" noChangeArrowheads="1"/>
+          </p:cNvSpPr>
+          <p:nvPr>
+            <p:ph idx="1"/>
+          </p:nvPr>
+        </p:nvSpPr>
+        <p:spPr bwMode="auto">
+          <a:xfrm>
+            <a:off x="688262" y="1470880"/>
+            <a:ext cx="9777419" cy="523220"/>
+          </a:xfrm>
+          <a:prstGeom prst="rect">
+            <a:avLst/>
+          </a:prstGeom>
+          <a:noFill/>
+          <a:ln>
+            <a:noFill/>
+          </a:ln>
+          <a:effectLst/>
+          <a:extLst>
+            <a:ext uri="{909E8E84-426E-40DD-AFC4-6F175D3DCCD1}">
+              <a14:hiddenFill xmlns:a14="http://schemas.microsoft.com/office/drawing/2010/main">
+                <a:solidFill>
+                  <a:schemeClr val="accent1"/>
+                </a:solidFill>
+              </a14:hiddenFill>
+            </a:ext>
+            <a:ext uri="{91240B29-F687-4F45-9708-019B960494DF}">
+              <a14:hiddenLine xmlns:a14="http://schemas.microsoft.com/office/drawing/2010/main" w="9525">
+                <a:solidFill>
+                  <a:schemeClr val="tx1"/>
+                </a:solidFill>
+                <a:miter lim="800000"/>
+                <a:headEnd/>
+                <a:tailEnd/>
+              </a14:hiddenLine>
+            </a:ext>
+            <a:ext uri="{AF507438-7753-43E0-B8FC-AC1667EBCBE1}">
+              <a14:hiddenEffects xmlns:a14="http://schemas.microsoft.com/office/drawing/2010/main">
+                <a:effectLst>
+                  <a:outerShdw dist="35921" dir="2700000" algn="ctr" rotWithShape="0">
+                    <a:schemeClr val="bg2"/>
+                  </a:outerShdw>
+                </a:effectLst>
+              </a14:hiddenEffects>
+            </a:ext>
+          </a:extLst>
+        </p:spPr>
+        <p:txBody>
+          <a:bodyPr vert="horz" wrap="square" lIns="91440" tIns="45720" rIns="91440" bIns="45720" numCol="1" anchor="ctr" anchorCtr="0" compatLnSpc="1">
+            <a:prstTxWarp prst="textNoShape">
+              <a:avLst/>
+            </a:prstTxWarp>
+            <a:spAutoFit/>
+          </a:bodyPr>
+          <a:lstStyle/>
+          <a:p>
+            <a:pPr marL="0" marR="0" lvl="0" indent="0" algn="l" defTabSz="914400" rtl="0" eaLnBrk="0" fontAlgn="base" latinLnBrk="0" hangingPunct="0">
+              <a:lnSpc>
+                <a:spcPct val="100000"/>
+              </a:lnSpc>
+              <a:spcBef>
+                <a:spcPct val="0"/>
+              </a:spcBef>
+              <a:spcAft>
+                <a:spcPct val="0"/>
+              </a:spcAft>
+              <a:buClrTx/>
+              <a:buSzTx/>
+              <a:buNone/>
+              <a:tabLst/>
+            </a:pPr>
+            <a:r>
+              <a:rPr kumimoji="0" lang="en-US" altLang="en-US" b="0" i="0" u="none" strike="noStrike" cap="none" normalizeH="0" baseline="0" dirty="0" smtClean="0">
+                <a:ln>
+                  <a:noFill/>
+                </a:ln>
+                <a:solidFill>
+                  <a:schemeClr val="tx1"/>
+                </a:solidFill>
+                <a:effectLst/>
+                <a:latin typeface="Arial" panose="020B0604020202020204" pitchFamily="34" charset="0"/>
+              </a:rPr>
+              <a:t>Kết quả trading</a:t>
+            </a:r>
+            <a:r>
+              <a:rPr kumimoji="0" lang="en-US" altLang="en-US" b="0" i="0" u="none" strike="noStrike" cap="none" normalizeH="0" dirty="0" smtClean="0">
+                <a:ln>
+                  <a:noFill/>
+                </a:ln>
+                <a:solidFill>
+                  <a:schemeClr val="tx1"/>
+                </a:solidFill>
+                <a:effectLst/>
+                <a:latin typeface="Arial" panose="020B0604020202020204" pitchFamily="34" charset="0"/>
+              </a:rPr>
+              <a:t> part3</a:t>
+            </a:r>
+            <a:endParaRPr kumimoji="0" lang="en-US" altLang="en-US" b="0" i="0" u="none" strike="noStrike" cap="none" normalizeH="0" baseline="0" dirty="0" smtClean="0">
+              <a:ln>
+                <a:noFill/>
+              </a:ln>
+              <a:solidFill>
+                <a:schemeClr val="tx1"/>
+              </a:solidFill>
+              <a:effectLst/>
+              <a:latin typeface="Arial" panose="020B0604020202020204" pitchFamily="34" charset="0"/>
+            </a:endParaRPr>
+          </a:p>
+        </p:txBody>
+      </p:sp>
+      <p:pic>
+        <p:nvPicPr>
+          <p:cNvPr id="4" name="Picture 3"/>
+          <p:cNvPicPr>
+            <a:picLocks noChangeAspect="1"/>
+          </p:cNvPicPr>
+          <p:nvPr/>
+        </p:nvPicPr>
+        <p:blipFill>
+          <a:blip r:embed="rId2"/>
+          <a:stretch>
+            <a:fillRect/>
+          </a:stretch>
+        </p:blipFill>
+        <p:spPr>
+          <a:xfrm>
+            <a:off x="209550" y="2078140"/>
+            <a:ext cx="11772900" cy="4120515"/>
+          </a:xfrm>
+          <a:prstGeom prst="rect">
+            <a:avLst/>
+          </a:prstGeom>
+        </p:spPr>
+      </p:pic>
+    </p:spTree>
+    <p:extLst>
+      <p:ext uri="{BB962C8B-B14F-4D97-AF65-F5344CB8AC3E}">
+        <p14:creationId xmlns:p14="http://schemas.microsoft.com/office/powerpoint/2010/main" val="1081816414"/>
+      </p:ext>
+    </p:extLst>
+  </p:cSld>
+  <p:clrMapOvr>
+    <a:masterClrMapping/>
+  </p:clrMapOvr>
+  <p:timing>
+    <p:tnLst>
+      <p:par>
+        <p:cTn id="1" dur="indefinite" restart="never" nodeType="tmRoot"/>
+      </p:par>
+    </p:tnLst>
+  </p:timing>
+</p:sld>
+</file>
+
 <file path=ppt/slides/slide3.xml><?xml version="1.0" encoding="utf-8"?>
 <p:sld xmlns:a="http://schemas.openxmlformats.org/drawingml/2006/main" xmlns:r="http://schemas.openxmlformats.org/officeDocument/2006/relationships" xmlns:p="http://schemas.openxmlformats.org/presentationml/2006/main">
   <p:cSld>
@@ -3628,6 +8934,1254 @@
 </p:sld>
 </file>
 
+<file path=ppt/slides/slide30.xml><?xml version="1.0" encoding="utf-8"?>
+<p:sld xmlns:a="http://schemas.openxmlformats.org/drawingml/2006/main" xmlns:r="http://schemas.openxmlformats.org/officeDocument/2006/relationships" xmlns:p="http://schemas.openxmlformats.org/presentationml/2006/main">
+  <p:cSld>
+    <p:spTree>
+      <p:nvGrpSpPr>
+        <p:cNvPr id="1" name=""/>
+        <p:cNvGrpSpPr/>
+        <p:nvPr/>
+      </p:nvGrpSpPr>
+      <p:grpSpPr>
+        <a:xfrm>
+          <a:off x="0" y="0"/>
+          <a:ext cx="0" cy="0"/>
+          <a:chOff x="0" y="0"/>
+          <a:chExt cx="0" cy="0"/>
+        </a:xfrm>
+      </p:grpSpPr>
+      <p:sp>
+        <p:nvSpPr>
+          <p:cNvPr id="2" name="Title 1"/>
+          <p:cNvSpPr>
+            <a:spLocks noGrp="1"/>
+          </p:cNvSpPr>
+          <p:nvPr>
+            <p:ph type="title"/>
+          </p:nvPr>
+        </p:nvSpPr>
+        <p:spPr>
+          <a:xfrm>
+            <a:off x="838200" y="145317"/>
+            <a:ext cx="10515600" cy="1325563"/>
+          </a:xfrm>
+        </p:spPr>
+        <p:txBody>
+          <a:bodyPr/>
+          <a:lstStyle/>
+          <a:p>
+            <a:r>
+              <a:rPr lang="en-US" dirty="0" smtClean="0"/>
+              <a:t>Backtest – bandit Agent</a:t>
+            </a:r>
+            <a:endParaRPr lang="en-US" dirty="0"/>
+          </a:p>
+        </p:txBody>
+      </p:sp>
+      <p:sp>
+        <p:nvSpPr>
+          <p:cNvPr id="5" name="Rectangle 2"/>
+          <p:cNvSpPr>
+            <a:spLocks noGrp="1" noChangeArrowheads="1"/>
+          </p:cNvSpPr>
+          <p:nvPr>
+            <p:ph idx="1"/>
+          </p:nvPr>
+        </p:nvSpPr>
+        <p:spPr bwMode="auto">
+          <a:xfrm>
+            <a:off x="688262" y="1470880"/>
+            <a:ext cx="9777419" cy="523220"/>
+          </a:xfrm>
+          <a:prstGeom prst="rect">
+            <a:avLst/>
+          </a:prstGeom>
+          <a:noFill/>
+          <a:ln>
+            <a:noFill/>
+          </a:ln>
+          <a:effectLst/>
+          <a:extLst>
+            <a:ext uri="{909E8E84-426E-40DD-AFC4-6F175D3DCCD1}">
+              <a14:hiddenFill xmlns:a14="http://schemas.microsoft.com/office/drawing/2010/main">
+                <a:solidFill>
+                  <a:schemeClr val="accent1"/>
+                </a:solidFill>
+              </a14:hiddenFill>
+            </a:ext>
+            <a:ext uri="{91240B29-F687-4F45-9708-019B960494DF}">
+              <a14:hiddenLine xmlns:a14="http://schemas.microsoft.com/office/drawing/2010/main" w="9525">
+                <a:solidFill>
+                  <a:schemeClr val="tx1"/>
+                </a:solidFill>
+                <a:miter lim="800000"/>
+                <a:headEnd/>
+                <a:tailEnd/>
+              </a14:hiddenLine>
+            </a:ext>
+            <a:ext uri="{AF507438-7753-43E0-B8FC-AC1667EBCBE1}">
+              <a14:hiddenEffects xmlns:a14="http://schemas.microsoft.com/office/drawing/2010/main">
+                <a:effectLst>
+                  <a:outerShdw dist="35921" dir="2700000" algn="ctr" rotWithShape="0">
+                    <a:schemeClr val="bg2"/>
+                  </a:outerShdw>
+                </a:effectLst>
+              </a14:hiddenEffects>
+            </a:ext>
+          </a:extLst>
+        </p:spPr>
+        <p:txBody>
+          <a:bodyPr vert="horz" wrap="square" lIns="91440" tIns="45720" rIns="91440" bIns="45720" numCol="1" anchor="ctr" anchorCtr="0" compatLnSpc="1">
+            <a:prstTxWarp prst="textNoShape">
+              <a:avLst/>
+            </a:prstTxWarp>
+            <a:spAutoFit/>
+          </a:bodyPr>
+          <a:lstStyle/>
+          <a:p>
+            <a:pPr marL="0" marR="0" lvl="0" indent="0" algn="l" defTabSz="914400" rtl="0" eaLnBrk="0" fontAlgn="base" latinLnBrk="0" hangingPunct="0">
+              <a:lnSpc>
+                <a:spcPct val="100000"/>
+              </a:lnSpc>
+              <a:spcBef>
+                <a:spcPct val="0"/>
+              </a:spcBef>
+              <a:spcAft>
+                <a:spcPct val="0"/>
+              </a:spcAft>
+              <a:buClrTx/>
+              <a:buSzTx/>
+              <a:buNone/>
+              <a:tabLst/>
+            </a:pPr>
+            <a:r>
+              <a:rPr kumimoji="0" lang="en-US" altLang="en-US" b="0" i="0" u="none" strike="noStrike" cap="none" normalizeH="0" baseline="0" dirty="0" smtClean="0">
+                <a:ln>
+                  <a:noFill/>
+                </a:ln>
+                <a:solidFill>
+                  <a:schemeClr val="tx1"/>
+                </a:solidFill>
+                <a:effectLst/>
+                <a:latin typeface="Arial" panose="020B0604020202020204" pitchFamily="34" charset="0"/>
+              </a:rPr>
+              <a:t>Drawdown part1</a:t>
+            </a:r>
+          </a:p>
+        </p:txBody>
+      </p:sp>
+      <p:pic>
+        <p:nvPicPr>
+          <p:cNvPr id="3" name="Picture 2"/>
+          <p:cNvPicPr>
+            <a:picLocks noChangeAspect="1"/>
+          </p:cNvPicPr>
+          <p:nvPr/>
+        </p:nvPicPr>
+        <p:blipFill>
+          <a:blip r:embed="rId2"/>
+          <a:stretch>
+            <a:fillRect/>
+          </a:stretch>
+        </p:blipFill>
+        <p:spPr>
+          <a:xfrm>
+            <a:off x="457201" y="2347254"/>
+            <a:ext cx="10637520" cy="3191256"/>
+          </a:xfrm>
+          <a:prstGeom prst="rect">
+            <a:avLst/>
+          </a:prstGeom>
+        </p:spPr>
+      </p:pic>
+    </p:spTree>
+    <p:extLst>
+      <p:ext uri="{BB962C8B-B14F-4D97-AF65-F5344CB8AC3E}">
+        <p14:creationId xmlns:p14="http://schemas.microsoft.com/office/powerpoint/2010/main" val="2741745282"/>
+      </p:ext>
+    </p:extLst>
+  </p:cSld>
+  <p:clrMapOvr>
+    <a:masterClrMapping/>
+  </p:clrMapOvr>
+  <p:timing>
+    <p:tnLst>
+      <p:par>
+        <p:cTn id="1" dur="indefinite" restart="never" nodeType="tmRoot"/>
+      </p:par>
+    </p:tnLst>
+  </p:timing>
+</p:sld>
+</file>
+
+<file path=ppt/slides/slide31.xml><?xml version="1.0" encoding="utf-8"?>
+<p:sld xmlns:a="http://schemas.openxmlformats.org/drawingml/2006/main" xmlns:r="http://schemas.openxmlformats.org/officeDocument/2006/relationships" xmlns:p="http://schemas.openxmlformats.org/presentationml/2006/main">
+  <p:cSld>
+    <p:spTree>
+      <p:nvGrpSpPr>
+        <p:cNvPr id="1" name=""/>
+        <p:cNvGrpSpPr/>
+        <p:nvPr/>
+      </p:nvGrpSpPr>
+      <p:grpSpPr>
+        <a:xfrm>
+          <a:off x="0" y="0"/>
+          <a:ext cx="0" cy="0"/>
+          <a:chOff x="0" y="0"/>
+          <a:chExt cx="0" cy="0"/>
+        </a:xfrm>
+      </p:grpSpPr>
+      <p:sp>
+        <p:nvSpPr>
+          <p:cNvPr id="2" name="Title 1"/>
+          <p:cNvSpPr>
+            <a:spLocks noGrp="1"/>
+          </p:cNvSpPr>
+          <p:nvPr>
+            <p:ph type="title"/>
+          </p:nvPr>
+        </p:nvSpPr>
+        <p:spPr>
+          <a:xfrm>
+            <a:off x="838200" y="145317"/>
+            <a:ext cx="10515600" cy="1325563"/>
+          </a:xfrm>
+        </p:spPr>
+        <p:txBody>
+          <a:bodyPr/>
+          <a:lstStyle/>
+          <a:p>
+            <a:r>
+              <a:rPr lang="en-US" dirty="0" smtClean="0"/>
+              <a:t>Backtest – bandit Agent</a:t>
+            </a:r>
+            <a:endParaRPr lang="en-US" dirty="0"/>
+          </a:p>
+        </p:txBody>
+      </p:sp>
+      <p:sp>
+        <p:nvSpPr>
+          <p:cNvPr id="5" name="Rectangle 2"/>
+          <p:cNvSpPr>
+            <a:spLocks noGrp="1" noChangeArrowheads="1"/>
+          </p:cNvSpPr>
+          <p:nvPr>
+            <p:ph idx="1"/>
+          </p:nvPr>
+        </p:nvSpPr>
+        <p:spPr bwMode="auto">
+          <a:xfrm>
+            <a:off x="688262" y="1470880"/>
+            <a:ext cx="9777419" cy="523220"/>
+          </a:xfrm>
+          <a:prstGeom prst="rect">
+            <a:avLst/>
+          </a:prstGeom>
+          <a:noFill/>
+          <a:ln>
+            <a:noFill/>
+          </a:ln>
+          <a:effectLst/>
+          <a:extLst>
+            <a:ext uri="{909E8E84-426E-40DD-AFC4-6F175D3DCCD1}">
+              <a14:hiddenFill xmlns:a14="http://schemas.microsoft.com/office/drawing/2010/main">
+                <a:solidFill>
+                  <a:schemeClr val="accent1"/>
+                </a:solidFill>
+              </a14:hiddenFill>
+            </a:ext>
+            <a:ext uri="{91240B29-F687-4F45-9708-019B960494DF}">
+              <a14:hiddenLine xmlns:a14="http://schemas.microsoft.com/office/drawing/2010/main" w="9525">
+                <a:solidFill>
+                  <a:schemeClr val="tx1"/>
+                </a:solidFill>
+                <a:miter lim="800000"/>
+                <a:headEnd/>
+                <a:tailEnd/>
+              </a14:hiddenLine>
+            </a:ext>
+            <a:ext uri="{AF507438-7753-43E0-B8FC-AC1667EBCBE1}">
+              <a14:hiddenEffects xmlns:a14="http://schemas.microsoft.com/office/drawing/2010/main">
+                <a:effectLst>
+                  <a:outerShdw dist="35921" dir="2700000" algn="ctr" rotWithShape="0">
+                    <a:schemeClr val="bg2"/>
+                  </a:outerShdw>
+                </a:effectLst>
+              </a14:hiddenEffects>
+            </a:ext>
+          </a:extLst>
+        </p:spPr>
+        <p:txBody>
+          <a:bodyPr vert="horz" wrap="square" lIns="91440" tIns="45720" rIns="91440" bIns="45720" numCol="1" anchor="ctr" anchorCtr="0" compatLnSpc="1">
+            <a:prstTxWarp prst="textNoShape">
+              <a:avLst/>
+            </a:prstTxWarp>
+            <a:spAutoFit/>
+          </a:bodyPr>
+          <a:lstStyle/>
+          <a:p>
+            <a:pPr marL="0" marR="0" lvl="0" indent="0" algn="l" defTabSz="914400" rtl="0" eaLnBrk="0" fontAlgn="base" latinLnBrk="0" hangingPunct="0">
+              <a:lnSpc>
+                <a:spcPct val="100000"/>
+              </a:lnSpc>
+              <a:spcBef>
+                <a:spcPct val="0"/>
+              </a:spcBef>
+              <a:spcAft>
+                <a:spcPct val="0"/>
+              </a:spcAft>
+              <a:buClrTx/>
+              <a:buSzTx/>
+              <a:buNone/>
+              <a:tabLst/>
+            </a:pPr>
+            <a:r>
+              <a:rPr kumimoji="0" lang="en-US" altLang="en-US" b="0" i="0" u="none" strike="noStrike" cap="none" normalizeH="0" baseline="0" dirty="0" smtClean="0">
+                <a:ln>
+                  <a:noFill/>
+                </a:ln>
+                <a:solidFill>
+                  <a:schemeClr val="tx1"/>
+                </a:solidFill>
+                <a:effectLst/>
+                <a:latin typeface="Arial" panose="020B0604020202020204" pitchFamily="34" charset="0"/>
+              </a:rPr>
+              <a:t>Drawdown part2</a:t>
+            </a:r>
+          </a:p>
+        </p:txBody>
+      </p:sp>
+      <p:pic>
+        <p:nvPicPr>
+          <p:cNvPr id="4" name="Picture 3"/>
+          <p:cNvPicPr>
+            <a:picLocks noChangeAspect="1"/>
+          </p:cNvPicPr>
+          <p:nvPr/>
+        </p:nvPicPr>
+        <p:blipFill>
+          <a:blip r:embed="rId2"/>
+          <a:stretch>
+            <a:fillRect/>
+          </a:stretch>
+        </p:blipFill>
+        <p:spPr>
+          <a:xfrm>
+            <a:off x="688262" y="2416132"/>
+            <a:ext cx="10600592" cy="3180178"/>
+          </a:xfrm>
+          <a:prstGeom prst="rect">
+            <a:avLst/>
+          </a:prstGeom>
+        </p:spPr>
+      </p:pic>
+    </p:spTree>
+    <p:extLst>
+      <p:ext uri="{BB962C8B-B14F-4D97-AF65-F5344CB8AC3E}">
+        <p14:creationId xmlns:p14="http://schemas.microsoft.com/office/powerpoint/2010/main" val="1887005075"/>
+      </p:ext>
+    </p:extLst>
+  </p:cSld>
+  <p:clrMapOvr>
+    <a:masterClrMapping/>
+  </p:clrMapOvr>
+  <p:timing>
+    <p:tnLst>
+      <p:par>
+        <p:cTn id="1" dur="indefinite" restart="never" nodeType="tmRoot"/>
+      </p:par>
+    </p:tnLst>
+  </p:timing>
+</p:sld>
+</file>
+
+<file path=ppt/slides/slide32.xml><?xml version="1.0" encoding="utf-8"?>
+<p:sld xmlns:a="http://schemas.openxmlformats.org/drawingml/2006/main" xmlns:r="http://schemas.openxmlformats.org/officeDocument/2006/relationships" xmlns:p="http://schemas.openxmlformats.org/presentationml/2006/main">
+  <p:cSld>
+    <p:spTree>
+      <p:nvGrpSpPr>
+        <p:cNvPr id="1" name=""/>
+        <p:cNvGrpSpPr/>
+        <p:nvPr/>
+      </p:nvGrpSpPr>
+      <p:grpSpPr>
+        <a:xfrm>
+          <a:off x="0" y="0"/>
+          <a:ext cx="0" cy="0"/>
+          <a:chOff x="0" y="0"/>
+          <a:chExt cx="0" cy="0"/>
+        </a:xfrm>
+      </p:grpSpPr>
+      <p:sp>
+        <p:nvSpPr>
+          <p:cNvPr id="2" name="Title 1"/>
+          <p:cNvSpPr>
+            <a:spLocks noGrp="1"/>
+          </p:cNvSpPr>
+          <p:nvPr>
+            <p:ph type="title"/>
+          </p:nvPr>
+        </p:nvSpPr>
+        <p:spPr>
+          <a:xfrm>
+            <a:off x="838200" y="145317"/>
+            <a:ext cx="10515600" cy="1325563"/>
+          </a:xfrm>
+        </p:spPr>
+        <p:txBody>
+          <a:bodyPr/>
+          <a:lstStyle/>
+          <a:p>
+            <a:r>
+              <a:rPr lang="en-US" dirty="0" smtClean="0"/>
+              <a:t>Backtest – bandit Agent</a:t>
+            </a:r>
+            <a:endParaRPr lang="en-US" dirty="0"/>
+          </a:p>
+        </p:txBody>
+      </p:sp>
+      <p:sp>
+        <p:nvSpPr>
+          <p:cNvPr id="5" name="Rectangle 2"/>
+          <p:cNvSpPr>
+            <a:spLocks noGrp="1" noChangeArrowheads="1"/>
+          </p:cNvSpPr>
+          <p:nvPr>
+            <p:ph idx="1"/>
+          </p:nvPr>
+        </p:nvSpPr>
+        <p:spPr bwMode="auto">
+          <a:xfrm>
+            <a:off x="688262" y="1470880"/>
+            <a:ext cx="9777419" cy="523220"/>
+          </a:xfrm>
+          <a:prstGeom prst="rect">
+            <a:avLst/>
+          </a:prstGeom>
+          <a:noFill/>
+          <a:ln>
+            <a:noFill/>
+          </a:ln>
+          <a:effectLst/>
+          <a:extLst>
+            <a:ext uri="{909E8E84-426E-40DD-AFC4-6F175D3DCCD1}">
+              <a14:hiddenFill xmlns:a14="http://schemas.microsoft.com/office/drawing/2010/main">
+                <a:solidFill>
+                  <a:schemeClr val="accent1"/>
+                </a:solidFill>
+              </a14:hiddenFill>
+            </a:ext>
+            <a:ext uri="{91240B29-F687-4F45-9708-019B960494DF}">
+              <a14:hiddenLine xmlns:a14="http://schemas.microsoft.com/office/drawing/2010/main" w="9525">
+                <a:solidFill>
+                  <a:schemeClr val="tx1"/>
+                </a:solidFill>
+                <a:miter lim="800000"/>
+                <a:headEnd/>
+                <a:tailEnd/>
+              </a14:hiddenLine>
+            </a:ext>
+            <a:ext uri="{AF507438-7753-43E0-B8FC-AC1667EBCBE1}">
+              <a14:hiddenEffects xmlns:a14="http://schemas.microsoft.com/office/drawing/2010/main">
+                <a:effectLst>
+                  <a:outerShdw dist="35921" dir="2700000" algn="ctr" rotWithShape="0">
+                    <a:schemeClr val="bg2"/>
+                  </a:outerShdw>
+                </a:effectLst>
+              </a14:hiddenEffects>
+            </a:ext>
+          </a:extLst>
+        </p:spPr>
+        <p:txBody>
+          <a:bodyPr vert="horz" wrap="square" lIns="91440" tIns="45720" rIns="91440" bIns="45720" numCol="1" anchor="ctr" anchorCtr="0" compatLnSpc="1">
+            <a:prstTxWarp prst="textNoShape">
+              <a:avLst/>
+            </a:prstTxWarp>
+            <a:spAutoFit/>
+          </a:bodyPr>
+          <a:lstStyle/>
+          <a:p>
+            <a:pPr marL="0" marR="0" lvl="0" indent="0" algn="l" defTabSz="914400" rtl="0" eaLnBrk="0" fontAlgn="base" latinLnBrk="0" hangingPunct="0">
+              <a:lnSpc>
+                <a:spcPct val="100000"/>
+              </a:lnSpc>
+              <a:spcBef>
+                <a:spcPct val="0"/>
+              </a:spcBef>
+              <a:spcAft>
+                <a:spcPct val="0"/>
+              </a:spcAft>
+              <a:buClrTx/>
+              <a:buSzTx/>
+              <a:buNone/>
+              <a:tabLst/>
+            </a:pPr>
+            <a:r>
+              <a:rPr kumimoji="0" lang="en-US" altLang="en-US" b="0" i="0" u="none" strike="noStrike" cap="none" normalizeH="0" baseline="0" dirty="0" smtClean="0">
+                <a:ln>
+                  <a:noFill/>
+                </a:ln>
+                <a:solidFill>
+                  <a:schemeClr val="tx1"/>
+                </a:solidFill>
+                <a:effectLst/>
+                <a:latin typeface="Arial" panose="020B0604020202020204" pitchFamily="34" charset="0"/>
+              </a:rPr>
+              <a:t>Drawdown part3</a:t>
+            </a:r>
+          </a:p>
+        </p:txBody>
+      </p:sp>
+      <p:pic>
+        <p:nvPicPr>
+          <p:cNvPr id="4" name="Picture 3"/>
+          <p:cNvPicPr>
+            <a:picLocks noChangeAspect="1"/>
+          </p:cNvPicPr>
+          <p:nvPr/>
+        </p:nvPicPr>
+        <p:blipFill>
+          <a:blip r:embed="rId2"/>
+          <a:stretch>
+            <a:fillRect/>
+          </a:stretch>
+        </p:blipFill>
+        <p:spPr>
+          <a:xfrm>
+            <a:off x="495300" y="2512260"/>
+            <a:ext cx="10858500" cy="3257550"/>
+          </a:xfrm>
+          <a:prstGeom prst="rect">
+            <a:avLst/>
+          </a:prstGeom>
+        </p:spPr>
+      </p:pic>
+    </p:spTree>
+    <p:extLst>
+      <p:ext uri="{BB962C8B-B14F-4D97-AF65-F5344CB8AC3E}">
+        <p14:creationId xmlns:p14="http://schemas.microsoft.com/office/powerpoint/2010/main" val="798543237"/>
+      </p:ext>
+    </p:extLst>
+  </p:cSld>
+  <p:clrMapOvr>
+    <a:masterClrMapping/>
+  </p:clrMapOvr>
+  <p:timing>
+    <p:tnLst>
+      <p:par>
+        <p:cTn id="1" dur="indefinite" restart="never" nodeType="tmRoot"/>
+      </p:par>
+    </p:tnLst>
+  </p:timing>
+</p:sld>
+</file>
+
+<file path=ppt/slides/slide33.xml><?xml version="1.0" encoding="utf-8"?>
+<p:sld xmlns:a="http://schemas.openxmlformats.org/drawingml/2006/main" xmlns:r="http://schemas.openxmlformats.org/officeDocument/2006/relationships" xmlns:p="http://schemas.openxmlformats.org/presentationml/2006/main">
+  <p:cSld>
+    <p:spTree>
+      <p:nvGrpSpPr>
+        <p:cNvPr id="1" name=""/>
+        <p:cNvGrpSpPr/>
+        <p:nvPr/>
+      </p:nvGrpSpPr>
+      <p:grpSpPr>
+        <a:xfrm>
+          <a:off x="0" y="0"/>
+          <a:ext cx="0" cy="0"/>
+          <a:chOff x="0" y="0"/>
+          <a:chExt cx="0" cy="0"/>
+        </a:xfrm>
+      </p:grpSpPr>
+      <p:sp>
+        <p:nvSpPr>
+          <p:cNvPr id="2" name="Title 1"/>
+          <p:cNvSpPr>
+            <a:spLocks noGrp="1"/>
+          </p:cNvSpPr>
+          <p:nvPr>
+            <p:ph type="title"/>
+          </p:nvPr>
+        </p:nvSpPr>
+        <p:spPr>
+          <a:xfrm>
+            <a:off x="838200" y="145317"/>
+            <a:ext cx="10515600" cy="1325563"/>
+          </a:xfrm>
+        </p:spPr>
+        <p:txBody>
+          <a:bodyPr/>
+          <a:lstStyle/>
+          <a:p>
+            <a:r>
+              <a:rPr lang="en-US" dirty="0" smtClean="0"/>
+              <a:t>Backtest – TỔNG KẾT</a:t>
+            </a:r>
+            <a:endParaRPr lang="en-US" dirty="0"/>
+          </a:p>
+        </p:txBody>
+      </p:sp>
+      <p:sp>
+        <p:nvSpPr>
+          <p:cNvPr id="5" name="Rectangle 2"/>
+          <p:cNvSpPr>
+            <a:spLocks noGrp="1" noChangeArrowheads="1"/>
+          </p:cNvSpPr>
+          <p:nvPr>
+            <p:ph idx="1"/>
+          </p:nvPr>
+        </p:nvSpPr>
+        <p:spPr bwMode="auto">
+          <a:xfrm>
+            <a:off x="524608" y="2008843"/>
+            <a:ext cx="11142784" cy="2677656"/>
+          </a:xfrm>
+          <a:prstGeom prst="rect">
+            <a:avLst/>
+          </a:prstGeom>
+          <a:noFill/>
+          <a:ln>
+            <a:noFill/>
+          </a:ln>
+          <a:effectLst/>
+          <a:extLst>
+            <a:ext uri="{909E8E84-426E-40DD-AFC4-6F175D3DCCD1}">
+              <a14:hiddenFill xmlns:a14="http://schemas.microsoft.com/office/drawing/2010/main">
+                <a:solidFill>
+                  <a:schemeClr val="accent1"/>
+                </a:solidFill>
+              </a14:hiddenFill>
+            </a:ext>
+            <a:ext uri="{91240B29-F687-4F45-9708-019B960494DF}">
+              <a14:hiddenLine xmlns:a14="http://schemas.microsoft.com/office/drawing/2010/main" w="9525">
+                <a:solidFill>
+                  <a:schemeClr val="tx1"/>
+                </a:solidFill>
+                <a:miter lim="800000"/>
+                <a:headEnd/>
+                <a:tailEnd/>
+              </a14:hiddenLine>
+            </a:ext>
+            <a:ext uri="{AF507438-7753-43E0-B8FC-AC1667EBCBE1}">
+              <a14:hiddenEffects xmlns:a14="http://schemas.microsoft.com/office/drawing/2010/main">
+                <a:effectLst>
+                  <a:outerShdw dist="35921" dir="2700000" algn="ctr" rotWithShape="0">
+                    <a:schemeClr val="bg2"/>
+                  </a:outerShdw>
+                </a:effectLst>
+              </a14:hiddenEffects>
+            </a:ext>
+          </a:extLst>
+        </p:spPr>
+        <p:txBody>
+          <a:bodyPr vert="horz" wrap="square" lIns="91440" tIns="45720" rIns="91440" bIns="45720" numCol="1" anchor="ctr" anchorCtr="0" compatLnSpc="1">
+            <a:prstTxWarp prst="textNoShape">
+              <a:avLst/>
+            </a:prstTxWarp>
+            <a:spAutoFit/>
+          </a:bodyPr>
+          <a:lstStyle/>
+          <a:p>
+            <a:pPr marL="0" marR="0" lvl="0" indent="0" algn="l" defTabSz="914400" rtl="0" eaLnBrk="0" fontAlgn="base" latinLnBrk="0" hangingPunct="0">
+              <a:lnSpc>
+                <a:spcPct val="100000"/>
+              </a:lnSpc>
+              <a:spcBef>
+                <a:spcPct val="0"/>
+              </a:spcBef>
+              <a:spcAft>
+                <a:spcPct val="0"/>
+              </a:spcAft>
+              <a:buClrTx/>
+              <a:buSzTx/>
+              <a:buFontTx/>
+              <a:buChar char="•"/>
+              <a:tabLst/>
+            </a:pPr>
+            <a:r>
+              <a:rPr kumimoji="0" lang="en-US" altLang="en-US" b="0" i="0" u="none" strike="noStrike" cap="none" normalizeH="0" baseline="0" dirty="0" smtClean="0">
+                <a:ln>
+                  <a:noFill/>
+                </a:ln>
+                <a:solidFill>
+                  <a:schemeClr val="tx1"/>
+                </a:solidFill>
+                <a:effectLst/>
+                <a:latin typeface="Arial" panose="020B0604020202020204" pitchFamily="34" charset="0"/>
+              </a:rPr>
+              <a:t>Kết quả backtest cho thấy agent </a:t>
+            </a:r>
+            <a:r>
+              <a:rPr kumimoji="0" lang="en-US" altLang="en-US" b="1" i="0" u="none" strike="noStrike" cap="none" normalizeH="0" baseline="0" dirty="0" smtClean="0">
+                <a:ln>
+                  <a:noFill/>
+                </a:ln>
+                <a:solidFill>
+                  <a:schemeClr val="tx1"/>
+                </a:solidFill>
+                <a:effectLst/>
+                <a:latin typeface="Arial" panose="020B0604020202020204" pitchFamily="34" charset="0"/>
+              </a:rPr>
+              <a:t>mang tính thực dụng</a:t>
+            </a:r>
+            <a:r>
+              <a:rPr kumimoji="0" lang="en-US" altLang="en-US" b="0" i="0" u="none" strike="noStrike" cap="none" normalizeH="0" baseline="0" dirty="0" smtClean="0">
+                <a:ln>
+                  <a:noFill/>
+                </a:ln>
+                <a:solidFill>
+                  <a:schemeClr val="tx1"/>
+                </a:solidFill>
+                <a:effectLst/>
+                <a:latin typeface="Arial" panose="020B0604020202020204" pitchFamily="34" charset="0"/>
+              </a:rPr>
+              <a:t>, không dựa vào dự đoán chính xác từng bước.</a:t>
+            </a:r>
+          </a:p>
+          <a:p>
+            <a:pPr marL="0" marR="0" lvl="0" indent="0" algn="l" defTabSz="914400" rtl="0" eaLnBrk="0" fontAlgn="base" latinLnBrk="0" hangingPunct="0">
+              <a:lnSpc>
+                <a:spcPct val="100000"/>
+              </a:lnSpc>
+              <a:spcBef>
+                <a:spcPct val="0"/>
+              </a:spcBef>
+              <a:spcAft>
+                <a:spcPct val="0"/>
+              </a:spcAft>
+              <a:buClrTx/>
+              <a:buSzTx/>
+              <a:buFontTx/>
+              <a:buChar char="•"/>
+              <a:tabLst/>
+            </a:pPr>
+            <a:r>
+              <a:rPr kumimoji="0" lang="en-US" altLang="en-US" b="0" i="0" u="none" strike="noStrike" cap="none" normalizeH="0" baseline="0" dirty="0" smtClean="0">
+                <a:ln>
+                  <a:noFill/>
+                </a:ln>
+                <a:solidFill>
+                  <a:schemeClr val="tx1"/>
+                </a:solidFill>
+                <a:effectLst/>
+                <a:latin typeface="Arial" panose="020B0604020202020204" pitchFamily="34" charset="0"/>
+              </a:rPr>
+              <a:t>Hiệu quả đến từ </a:t>
+            </a:r>
+            <a:r>
+              <a:rPr kumimoji="0" lang="en-US" altLang="en-US" b="1" i="0" u="none" strike="noStrike" cap="none" normalizeH="0" baseline="0" dirty="0" smtClean="0">
+                <a:ln>
+                  <a:noFill/>
+                </a:ln>
+                <a:solidFill>
+                  <a:schemeClr val="tx1"/>
+                </a:solidFill>
+                <a:effectLst/>
+                <a:latin typeface="Arial" panose="020B0604020202020204" pitchFamily="34" charset="0"/>
+              </a:rPr>
+              <a:t>signal vừa đủ + execution control chặt chẽ</a:t>
+            </a:r>
+            <a:r>
+              <a:rPr kumimoji="0" lang="en-US" altLang="en-US" b="0" i="0" u="none" strike="noStrike" cap="none" normalizeH="0" baseline="0" dirty="0" smtClean="0">
+                <a:ln>
+                  <a:noFill/>
+                </a:ln>
+                <a:solidFill>
+                  <a:schemeClr val="tx1"/>
+                </a:solidFill>
+                <a:effectLst/>
+                <a:latin typeface="Arial" panose="020B0604020202020204" pitchFamily="34" charset="0"/>
+              </a:rPr>
+              <a:t>, thay vì học thuần như RL truyền thống.</a:t>
+            </a:r>
+          </a:p>
+          <a:p>
+            <a:pPr marL="0" marR="0" lvl="0" indent="0" algn="l" defTabSz="914400" rtl="0" eaLnBrk="0" fontAlgn="base" latinLnBrk="0" hangingPunct="0">
+              <a:lnSpc>
+                <a:spcPct val="100000"/>
+              </a:lnSpc>
+              <a:spcBef>
+                <a:spcPct val="0"/>
+              </a:spcBef>
+              <a:spcAft>
+                <a:spcPct val="0"/>
+              </a:spcAft>
+              <a:buClrTx/>
+              <a:buSzTx/>
+              <a:buFontTx/>
+              <a:buChar char="•"/>
+              <a:tabLst/>
+            </a:pPr>
+            <a:r>
+              <a:rPr kumimoji="0" lang="en-US" altLang="en-US" b="0" i="0" u="none" strike="noStrike" cap="none" normalizeH="0" baseline="0" dirty="0" smtClean="0">
+                <a:ln>
+                  <a:noFill/>
+                </a:ln>
+                <a:solidFill>
+                  <a:schemeClr val="tx1"/>
+                </a:solidFill>
+                <a:effectLst/>
+                <a:latin typeface="Arial" panose="020B0604020202020204" pitchFamily="34" charset="0"/>
+              </a:rPr>
+              <a:t>Pipeline phù hợp để </a:t>
+            </a:r>
+            <a:r>
+              <a:rPr kumimoji="0" lang="en-US" altLang="en-US" b="1" i="0" u="none" strike="noStrike" cap="none" normalizeH="0" baseline="0" dirty="0" smtClean="0">
+                <a:ln>
+                  <a:noFill/>
+                </a:ln>
+                <a:solidFill>
+                  <a:schemeClr val="tx1"/>
+                </a:solidFill>
+                <a:effectLst/>
+                <a:latin typeface="Arial" panose="020B0604020202020204" pitchFamily="34" charset="0"/>
+              </a:rPr>
+              <a:t>mở rộng sang paper trading / live trading có kiểm soát</a:t>
+            </a:r>
+            <a:r>
+              <a:rPr kumimoji="0" lang="en-US" altLang="en-US" b="0" i="0" u="none" strike="noStrike" cap="none" normalizeH="0" baseline="0" dirty="0" smtClean="0">
+                <a:ln>
+                  <a:noFill/>
+                </a:ln>
+                <a:solidFill>
+                  <a:schemeClr val="tx1"/>
+                </a:solidFill>
+                <a:effectLst/>
+                <a:latin typeface="Arial" panose="020B0604020202020204" pitchFamily="34" charset="0"/>
+              </a:rPr>
+              <a:t>.</a:t>
+            </a:r>
+          </a:p>
+        </p:txBody>
+      </p:sp>
+    </p:spTree>
+    <p:extLst>
+      <p:ext uri="{BB962C8B-B14F-4D97-AF65-F5344CB8AC3E}">
+        <p14:creationId xmlns:p14="http://schemas.microsoft.com/office/powerpoint/2010/main" val="2152044885"/>
+      </p:ext>
+    </p:extLst>
+  </p:cSld>
+  <p:clrMapOvr>
+    <a:masterClrMapping/>
+  </p:clrMapOvr>
+  <p:timing>
+    <p:tnLst>
+      <p:par>
+        <p:cTn id="1" dur="indefinite" restart="never" nodeType="tmRoot"/>
+      </p:par>
+    </p:tnLst>
+  </p:timing>
+</p:sld>
+</file>
+
+<file path=ppt/slides/slide34.xml><?xml version="1.0" encoding="utf-8"?>
+<p:sld xmlns:a="http://schemas.openxmlformats.org/drawingml/2006/main" xmlns:r="http://schemas.openxmlformats.org/officeDocument/2006/relationships" xmlns:p="http://schemas.openxmlformats.org/presentationml/2006/main">
+  <p:cSld>
+    <p:spTree>
+      <p:nvGrpSpPr>
+        <p:cNvPr id="1" name=""/>
+        <p:cNvGrpSpPr/>
+        <p:nvPr/>
+      </p:nvGrpSpPr>
+      <p:grpSpPr>
+        <a:xfrm>
+          <a:off x="0" y="0"/>
+          <a:ext cx="0" cy="0"/>
+          <a:chOff x="0" y="0"/>
+          <a:chExt cx="0" cy="0"/>
+        </a:xfrm>
+      </p:grpSpPr>
+      <p:sp>
+        <p:nvSpPr>
+          <p:cNvPr id="2" name="Title 1"/>
+          <p:cNvSpPr>
+            <a:spLocks noGrp="1"/>
+          </p:cNvSpPr>
+          <p:nvPr>
+            <p:ph type="title"/>
+          </p:nvPr>
+        </p:nvSpPr>
+        <p:spPr>
+          <a:xfrm>
+            <a:off x="838200" y="145317"/>
+            <a:ext cx="10515600" cy="1325563"/>
+          </a:xfrm>
+        </p:spPr>
+        <p:txBody>
+          <a:bodyPr/>
+          <a:lstStyle/>
+          <a:p>
+            <a:r>
+              <a:rPr lang="en-US" dirty="0" smtClean="0"/>
+              <a:t>Backtest – TỔNG KẾT</a:t>
+            </a:r>
+            <a:endParaRPr lang="en-US" dirty="0"/>
+          </a:p>
+        </p:txBody>
+      </p:sp>
+      <p:graphicFrame>
+        <p:nvGraphicFramePr>
+          <p:cNvPr id="3" name="Content Placeholder 2"/>
+          <p:cNvGraphicFramePr>
+            <a:graphicFrameLocks noGrp="1"/>
+          </p:cNvGraphicFramePr>
+          <p:nvPr>
+            <p:ph idx="1"/>
+            <p:extLst>
+              <p:ext uri="{D42A27DB-BD31-4B8C-83A1-F6EECF244321}">
+                <p14:modId xmlns:p14="http://schemas.microsoft.com/office/powerpoint/2010/main" val="1513126292"/>
+              </p:ext>
+            </p:extLst>
+          </p:nvPr>
+        </p:nvGraphicFramePr>
+        <p:xfrm>
+          <a:off x="1544315" y="1778000"/>
+          <a:ext cx="9966964" cy="3748818"/>
+        </p:xfrm>
+        <a:graphic>
+          <a:graphicData uri="http://schemas.openxmlformats.org/drawingml/2006/table">
+            <a:tbl>
+              <a:tblPr/>
+              <a:tblGrid>
+                <a:gridCol w="4983482">
+                  <a:extLst>
+                    <a:ext uri="{9D8B030D-6E8A-4147-A177-3AD203B41FA5}">
+                      <a16:colId xmlns:a16="http://schemas.microsoft.com/office/drawing/2014/main" val="2874046242"/>
+                    </a:ext>
+                  </a:extLst>
+                </a:gridCol>
+                <a:gridCol w="4983482">
+                  <a:extLst>
+                    <a:ext uri="{9D8B030D-6E8A-4147-A177-3AD203B41FA5}">
+                      <a16:colId xmlns:a16="http://schemas.microsoft.com/office/drawing/2014/main" val="3682569817"/>
+                    </a:ext>
+                  </a:extLst>
+                </a:gridCol>
+              </a:tblGrid>
+              <a:tr h="717296">
+                <a:tc>
+                  <a:txBody>
+                    <a:bodyPr/>
+                    <a:lstStyle/>
+                    <a:p>
+                      <a:r>
+                        <a:rPr lang="en-US" sz="2800"/>
+                        <a:t>Thành phần</a:t>
+                      </a:r>
+                    </a:p>
+                  </a:txBody>
+                  <a:tcPr marL="26194" marR="26194" marT="13097" marB="13097" anchor="ctr">
+                    <a:lnL>
+                      <a:noFill/>
+                    </a:lnL>
+                    <a:lnR>
+                      <a:noFill/>
+                    </a:lnR>
+                    <a:lnT>
+                      <a:noFill/>
+                    </a:lnT>
+                    <a:lnB>
+                      <a:noFill/>
+                    </a:lnB>
+                  </a:tcPr>
+                </a:tc>
+                <a:tc>
+                  <a:txBody>
+                    <a:bodyPr/>
+                    <a:lstStyle/>
+                    <a:p>
+                      <a:r>
+                        <a:rPr lang="en-US" sz="2800"/>
+                        <a:t>Đóng góp</a:t>
+                      </a:r>
+                    </a:p>
+                  </a:txBody>
+                  <a:tcPr marL="26194" marR="26194" marT="13097" marB="13097" anchor="ctr">
+                    <a:lnL>
+                      <a:noFill/>
+                    </a:lnL>
+                    <a:lnR>
+                      <a:noFill/>
+                    </a:lnR>
+                    <a:lnT>
+                      <a:noFill/>
+                    </a:lnT>
+                    <a:lnB>
+                      <a:noFill/>
+                    </a:lnB>
+                  </a:tcPr>
+                </a:tc>
+                <a:extLst>
+                  <a:ext uri="{0D108BD9-81ED-4DB2-BD59-A6C34878D82A}">
+                    <a16:rowId xmlns:a16="http://schemas.microsoft.com/office/drawing/2014/main" val="2252618554"/>
+                  </a:ext>
+                </a:extLst>
+              </a:tr>
+              <a:tr h="717296">
+                <a:tc>
+                  <a:txBody>
+                    <a:bodyPr/>
+                    <a:lstStyle/>
+                    <a:p>
+                      <a:r>
+                        <a:rPr lang="en-US" sz="2800"/>
+                        <a:t>ML models (FinBERT + TS + Fusion)</a:t>
+                      </a:r>
+                    </a:p>
+                  </a:txBody>
+                  <a:tcPr marL="26194" marR="26194" marT="13097" marB="13097" anchor="ctr">
+                    <a:lnL>
+                      <a:noFill/>
+                    </a:lnL>
+                    <a:lnR>
+                      <a:noFill/>
+                    </a:lnR>
+                    <a:lnT>
+                      <a:noFill/>
+                    </a:lnT>
+                    <a:lnB>
+                      <a:noFill/>
+                    </a:lnB>
+                  </a:tcPr>
+                </a:tc>
+                <a:tc>
+                  <a:txBody>
+                    <a:bodyPr/>
+                    <a:lstStyle/>
+                    <a:p>
+                      <a:r>
+                        <a:rPr lang="en-US" sz="2800" b="1"/>
+                        <a:t>30–40%</a:t>
+                      </a:r>
+                      <a:endParaRPr lang="en-US" sz="2800"/>
+                    </a:p>
+                  </a:txBody>
+                  <a:tcPr marL="26194" marR="26194" marT="13097" marB="13097" anchor="ctr">
+                    <a:lnL>
+                      <a:noFill/>
+                    </a:lnL>
+                    <a:lnR>
+                      <a:noFill/>
+                    </a:lnR>
+                    <a:lnT>
+                      <a:noFill/>
+                    </a:lnT>
+                    <a:lnB>
+                      <a:noFill/>
+                    </a:lnB>
+                  </a:tcPr>
+                </a:tc>
+                <a:extLst>
+                  <a:ext uri="{0D108BD9-81ED-4DB2-BD59-A6C34878D82A}">
+                    <a16:rowId xmlns:a16="http://schemas.microsoft.com/office/drawing/2014/main" val="2676658183"/>
+                  </a:ext>
+                </a:extLst>
+              </a:tr>
+              <a:tr h="717296">
+                <a:tc>
+                  <a:txBody>
+                    <a:bodyPr/>
+                    <a:lstStyle/>
+                    <a:p>
+                      <a:r>
+                        <a:rPr lang="en-US" sz="2800"/>
+                        <a:t>Bandit + Execution rules</a:t>
+                      </a:r>
+                    </a:p>
+                  </a:txBody>
+                  <a:tcPr marL="26194" marR="26194" marT="13097" marB="13097" anchor="ctr">
+                    <a:lnL>
+                      <a:noFill/>
+                    </a:lnL>
+                    <a:lnR>
+                      <a:noFill/>
+                    </a:lnR>
+                    <a:lnT>
+                      <a:noFill/>
+                    </a:lnT>
+                    <a:lnB>
+                      <a:noFill/>
+                    </a:lnB>
+                  </a:tcPr>
+                </a:tc>
+                <a:tc>
+                  <a:txBody>
+                    <a:bodyPr/>
+                    <a:lstStyle/>
+                    <a:p>
+                      <a:r>
+                        <a:rPr lang="en-US" sz="2800" b="1" dirty="0"/>
+                        <a:t>40–50%</a:t>
+                      </a:r>
+                      <a:endParaRPr lang="en-US" sz="2800" dirty="0"/>
+                    </a:p>
+                  </a:txBody>
+                  <a:tcPr marL="26194" marR="26194" marT="13097" marB="13097" anchor="ctr">
+                    <a:lnL>
+                      <a:noFill/>
+                    </a:lnL>
+                    <a:lnR>
+                      <a:noFill/>
+                    </a:lnR>
+                    <a:lnT>
+                      <a:noFill/>
+                    </a:lnT>
+                    <a:lnB>
+                      <a:noFill/>
+                    </a:lnB>
+                  </a:tcPr>
+                </a:tc>
+                <a:extLst>
+                  <a:ext uri="{0D108BD9-81ED-4DB2-BD59-A6C34878D82A}">
+                    <a16:rowId xmlns:a16="http://schemas.microsoft.com/office/drawing/2014/main" val="953873533"/>
+                  </a:ext>
+                </a:extLst>
+              </a:tr>
+              <a:tr h="717296">
+                <a:tc>
+                  <a:txBody>
+                    <a:bodyPr/>
+                    <a:lstStyle/>
+                    <a:p>
+                      <a:r>
+                        <a:rPr lang="en-US" sz="2800"/>
+                        <a:t>Risk &amp; backtest design</a:t>
+                      </a:r>
+                    </a:p>
+                  </a:txBody>
+                  <a:tcPr marL="26194" marR="26194" marT="13097" marB="13097" anchor="ctr">
+                    <a:lnL>
+                      <a:noFill/>
+                    </a:lnL>
+                    <a:lnR>
+                      <a:noFill/>
+                    </a:lnR>
+                    <a:lnT>
+                      <a:noFill/>
+                    </a:lnT>
+                    <a:lnB>
+                      <a:noFill/>
+                    </a:lnB>
+                  </a:tcPr>
+                </a:tc>
+                <a:tc>
+                  <a:txBody>
+                    <a:bodyPr/>
+                    <a:lstStyle/>
+                    <a:p>
+                      <a:r>
+                        <a:rPr lang="en-US" sz="2800" b="1"/>
+                        <a:t>15–20%</a:t>
+                      </a:r>
+                      <a:endParaRPr lang="en-US" sz="2800"/>
+                    </a:p>
+                  </a:txBody>
+                  <a:tcPr marL="26194" marR="26194" marT="13097" marB="13097" anchor="ctr">
+                    <a:lnL>
+                      <a:noFill/>
+                    </a:lnL>
+                    <a:lnR>
+                      <a:noFill/>
+                    </a:lnR>
+                    <a:lnT>
+                      <a:noFill/>
+                    </a:lnT>
+                    <a:lnB>
+                      <a:noFill/>
+                    </a:lnB>
+                  </a:tcPr>
+                </a:tc>
+                <a:extLst>
+                  <a:ext uri="{0D108BD9-81ED-4DB2-BD59-A6C34878D82A}">
+                    <a16:rowId xmlns:a16="http://schemas.microsoft.com/office/drawing/2014/main" val="2439822099"/>
+                  </a:ext>
+                </a:extLst>
+              </a:tr>
+              <a:tr h="717296">
+                <a:tc>
+                  <a:txBody>
+                    <a:bodyPr/>
+                    <a:lstStyle/>
+                    <a:p>
+                      <a:r>
+                        <a:rPr lang="en-US" sz="2800"/>
+                        <a:t>Market luck</a:t>
+                      </a:r>
+                    </a:p>
+                  </a:txBody>
+                  <a:tcPr marL="26194" marR="26194" marT="13097" marB="13097" anchor="ctr">
+                    <a:lnL>
+                      <a:noFill/>
+                    </a:lnL>
+                    <a:lnR>
+                      <a:noFill/>
+                    </a:lnR>
+                    <a:lnT>
+                      <a:noFill/>
+                    </a:lnT>
+                    <a:lnB>
+                      <a:noFill/>
+                    </a:lnB>
+                  </a:tcPr>
+                </a:tc>
+                <a:tc>
+                  <a:txBody>
+                    <a:bodyPr/>
+                    <a:lstStyle/>
+                    <a:p>
+                      <a:r>
+                        <a:rPr lang="en-US" sz="2800" b="1" dirty="0"/>
+                        <a:t>5–10%</a:t>
+                      </a:r>
+                      <a:endParaRPr lang="en-US" sz="2800" dirty="0"/>
+                    </a:p>
+                  </a:txBody>
+                  <a:tcPr marL="26194" marR="26194" marT="13097" marB="13097" anchor="ctr">
+                    <a:lnL>
+                      <a:noFill/>
+                    </a:lnL>
+                    <a:lnR>
+                      <a:noFill/>
+                    </a:lnR>
+                    <a:lnT>
+                      <a:noFill/>
+                    </a:lnT>
+                    <a:lnB>
+                      <a:noFill/>
+                    </a:lnB>
+                  </a:tcPr>
+                </a:tc>
+                <a:extLst>
+                  <a:ext uri="{0D108BD9-81ED-4DB2-BD59-A6C34878D82A}">
+                    <a16:rowId xmlns:a16="http://schemas.microsoft.com/office/drawing/2014/main" val="3727804614"/>
+                  </a:ext>
+                </a:extLst>
+              </a:tr>
+            </a:tbl>
+          </a:graphicData>
+        </a:graphic>
+      </p:graphicFrame>
+    </p:spTree>
+    <p:extLst>
+      <p:ext uri="{BB962C8B-B14F-4D97-AF65-F5344CB8AC3E}">
+        <p14:creationId xmlns:p14="http://schemas.microsoft.com/office/powerpoint/2010/main" val="4163449553"/>
+      </p:ext>
+    </p:extLst>
+  </p:cSld>
+  <p:clrMapOvr>
+    <a:masterClrMapping/>
+  </p:clrMapOvr>
+  <p:timing>
+    <p:tnLst>
+      <p:par>
+        <p:cTn id="1" dur="indefinite" restart="never" nodeType="tmRoot"/>
+      </p:par>
+    </p:tnLst>
+  </p:timing>
+</p:sld>
+</file>
+
 <file path=ppt/slides/slide4.xml><?xml version="1.0" encoding="utf-8"?>
 <p:sld xmlns:a="http://schemas.openxmlformats.org/drawingml/2006/main" xmlns:r="http://schemas.openxmlformats.org/officeDocument/2006/relationships" xmlns:p="http://schemas.openxmlformats.org/presentationml/2006/main">
   <p:cSld>
@@ -3908,31 +10462,7 @@
           <a:p>
             <a:r>
               <a:rPr lang="en-US" dirty="0" smtClean="0"/>
-              <a:t>nghiêng về </a:t>
-            </a:r>
-            <a:r>
-              <a:rPr lang="en-US" i="1" dirty="0" smtClean="0"/>
-              <a:t>positive</a:t>
-            </a:r>
-            <a:r>
-              <a:rPr lang="en-US" dirty="0" smtClean="0"/>
-              <a:t> và </a:t>
-            </a:r>
-            <a:r>
-              <a:rPr lang="en-US" i="1" dirty="0" smtClean="0"/>
-              <a:t>neutral</a:t>
-            </a:r>
-            <a:r>
-              <a:rPr lang="en-US" dirty="0" smtClean="0"/>
-              <a:t>, thiếu tự tin với </a:t>
-            </a:r>
-            <a:r>
-              <a:rPr lang="en-US" i="1" dirty="0" smtClean="0"/>
-              <a:t>negative</a:t>
-            </a:r>
-            <a:r>
-              <a:rPr lang="en-US" dirty="0" smtClean="0"/>
-              <a:t>.</a:t>
+              <a:t>Confusion matrix</a:t>
             </a:r>
             <a:endParaRPr lang="en-US" dirty="0"/>
           </a:p>
@@ -3940,7 +10470,7 @@
       </p:sp>
       <p:pic>
         <p:nvPicPr>
-          <p:cNvPr id="6" name="Picture 5"/>
+          <p:cNvPr id="4" name="Picture 3"/>
           <p:cNvPicPr>
             <a:picLocks noChangeAspect="1"/>
           </p:cNvPicPr>
@@ -3954,8 +10484,8 @@
         </p:blipFill>
         <p:spPr>
           <a:xfrm>
-            <a:off x="2514599" y="2363971"/>
-            <a:ext cx="6233748" cy="4155832"/>
+            <a:off x="2623038" y="2265485"/>
+            <a:ext cx="6178062" cy="4118708"/>
           </a:xfrm>
           <a:prstGeom prst="rect">
             <a:avLst/>
@@ -4016,7 +10546,7 @@
           <a:p>
             <a:r>
               <a:rPr lang="en-US" dirty="0" smtClean="0"/>
-              <a:t>Finetuning LSTM baseline</a:t>
+              <a:t>Finetuning finBERT – kết quả</a:t>
             </a:r>
             <a:endParaRPr lang="en-US" dirty="0"/>
           </a:p>
@@ -4039,13 +10569,7 @@
           <a:p>
             <a:r>
               <a:rPr lang="en-US" dirty="0" smtClean="0"/>
-              <a:t>Loss ổn định</a:t>
-            </a:r>
-          </a:p>
-          <a:p>
-            <a:r>
-              <a:rPr lang="en-US" dirty="0" smtClean="0"/>
-              <a:t>Sai số tương đối trung bình</a:t>
+              <a:t>Score tốt đối với Negative và positive</a:t>
             </a:r>
             <a:endParaRPr lang="en-US" dirty="0"/>
           </a:p>
@@ -4053,7 +10577,7 @@
       </p:sp>
       <p:pic>
         <p:nvPicPr>
-          <p:cNvPr id="4" name="Picture 3"/>
+          <p:cNvPr id="5" name="Picture 4"/>
           <p:cNvPicPr>
             <a:picLocks noChangeAspect="1"/>
           </p:cNvPicPr>
@@ -4067,32 +10591,8 @@
         </p:blipFill>
         <p:spPr>
           <a:xfrm>
-            <a:off x="5550877" y="1513381"/>
-            <a:ext cx="6283569" cy="2581635"/>
-          </a:xfrm>
-          <a:prstGeom prst="rect">
-            <a:avLst/>
-          </a:prstGeom>
-        </p:spPr>
-      </p:pic>
-      <p:pic>
-        <p:nvPicPr>
-          <p:cNvPr id="7" name="Picture 6"/>
-          <p:cNvPicPr>
-            <a:picLocks noChangeAspect="1"/>
-          </p:cNvPicPr>
-          <p:nvPr/>
-        </p:nvPicPr>
-        <p:blipFill>
-          <a:blip r:embed="rId3"/>
-          <a:stretch>
-            <a:fillRect/>
-          </a:stretch>
-        </p:blipFill>
-        <p:spPr>
-          <a:xfrm>
-            <a:off x="5091708" y="4919377"/>
-            <a:ext cx="6874623" cy="647790"/>
+            <a:off x="2593730" y="2383056"/>
+            <a:ext cx="7218485" cy="4331091"/>
           </a:xfrm>
           <a:prstGeom prst="rect">
             <a:avLst/>
@@ -4102,7 +10602,7 @@
     </p:spTree>
     <p:extLst>
       <p:ext uri="{BB962C8B-B14F-4D97-AF65-F5344CB8AC3E}">
-        <p14:creationId xmlns:p14="http://schemas.microsoft.com/office/powerpoint/2010/main" val="1145526379"/>
+        <p14:creationId xmlns:p14="http://schemas.microsoft.com/office/powerpoint/2010/main" val="1289053837"/>
       </p:ext>
     </p:extLst>
   </p:cSld>
@@ -4153,7 +10653,7 @@
           <a:p>
             <a:r>
               <a:rPr lang="en-US" dirty="0" smtClean="0"/>
-              <a:t>Finetuning Transformer</a:t>
+              <a:t>Finetuning LSTM baseline</a:t>
             </a:r>
             <a:endParaRPr lang="en-US" dirty="0"/>
           </a:p>
@@ -4176,13 +10676,13 @@
           <a:p>
             <a:r>
               <a:rPr lang="en-US" dirty="0" smtClean="0"/>
-              <a:t>Loss ổn định sớm</a:t>
+              <a:t>Loss ổn định</a:t>
             </a:r>
           </a:p>
           <a:p>
             <a:r>
               <a:rPr lang="en-US" dirty="0" smtClean="0"/>
-              <a:t>Embedding giàu chiều hơn</a:t>
+              <a:t>Sai số tương đối trung bình</a:t>
             </a:r>
             <a:endParaRPr lang="en-US" dirty="0"/>
           </a:p>
@@ -4204,8 +10704,8 @@
         </p:blipFill>
         <p:spPr>
           <a:xfrm>
-            <a:off x="5643422" y="2008060"/>
-            <a:ext cx="6548578" cy="3562847"/>
+            <a:off x="5523207" y="1631891"/>
+            <a:ext cx="6224765" cy="4738806"/>
           </a:xfrm>
           <a:prstGeom prst="rect">
             <a:avLst/>
@@ -4215,7 +10715,7 @@
     </p:spTree>
     <p:extLst>
       <p:ext uri="{BB962C8B-B14F-4D97-AF65-F5344CB8AC3E}">
-        <p14:creationId xmlns:p14="http://schemas.microsoft.com/office/powerpoint/2010/main" val="1294028854"/>
+        <p14:creationId xmlns:p14="http://schemas.microsoft.com/office/powerpoint/2010/main" val="1145526379"/>
       </p:ext>
     </p:extLst>
   </p:cSld>
@@ -4266,7 +10766,7 @@
           <a:p>
             <a:r>
               <a:rPr lang="en-US" dirty="0" smtClean="0"/>
-              <a:t>Finetuning Att-cnn</a:t>
+              <a:t>Finetuning Transformer</a:t>
             </a:r>
             <a:endParaRPr lang="en-US" dirty="0"/>
           </a:p>
@@ -4295,16 +10795,7 @@
           <a:p>
             <a:r>
               <a:rPr lang="en-US" dirty="0" smtClean="0"/>
-              <a:t>MSE và MAE tốt hơn một chút </a:t>
-            </a:r>
-          </a:p>
-          <a:p>
-            <a:pPr marL="0" indent="0">
-              <a:buNone/>
-            </a:pPr>
-            <a:r>
-              <a:rPr lang="en-US" dirty="0" smtClean="0"/>
-              <a:t>So với transformer</a:t>
+              <a:t>Embedding giàu chiều hơn</a:t>
             </a:r>
             <a:endParaRPr lang="en-US" dirty="0"/>
           </a:p>
@@ -4326,8 +10817,32 @@
         </p:blipFill>
         <p:spPr>
           <a:xfrm>
-            <a:off x="5778169" y="1474116"/>
-            <a:ext cx="5651831" cy="4196452"/>
+            <a:off x="5204482" y="3659182"/>
+            <a:ext cx="6366195" cy="2942864"/>
+          </a:xfrm>
+          <a:prstGeom prst="rect">
+            <a:avLst/>
+          </a:prstGeom>
+        </p:spPr>
+      </p:pic>
+      <p:pic>
+        <p:nvPicPr>
+          <p:cNvPr id="6" name="Picture 5"/>
+          <p:cNvPicPr>
+            <a:picLocks noChangeAspect="1"/>
+          </p:cNvPicPr>
+          <p:nvPr/>
+        </p:nvPicPr>
+        <p:blipFill>
+          <a:blip r:embed="rId3"/>
+          <a:stretch>
+            <a:fillRect/>
+          </a:stretch>
+        </p:blipFill>
+        <p:spPr>
+          <a:xfrm>
+            <a:off x="6216161" y="687227"/>
+            <a:ext cx="5635869" cy="2837018"/>
           </a:xfrm>
           <a:prstGeom prst="rect">
             <a:avLst/>
@@ -4337,7 +10852,7 @@
     </p:spTree>
     <p:extLst>
       <p:ext uri="{BB962C8B-B14F-4D97-AF65-F5344CB8AC3E}">
-        <p14:creationId xmlns:p14="http://schemas.microsoft.com/office/powerpoint/2010/main" val="4218851155"/>
+        <p14:creationId xmlns:p14="http://schemas.microsoft.com/office/powerpoint/2010/main" val="1294028854"/>
       </p:ext>
     </p:extLst>
   </p:cSld>
